--- a/P25301051-p3-presentation-15-slides.pptx
+++ b/P25301051-p3-presentation-15-slides.pptx
@@ -3167,7 +3167,7 @@
                 <a:ea typeface="Calibri" pitchFamily="34" charset="-122"/>
                 <a:cs typeface="Calibri" pitchFamily="34" charset="-120"/>
               </a:rPr>
-              <a:t>Brac University  .  September 2026</a:t>
+              <a:t>Brac University  .  January 2027</a:t>
             </a:r>
             <a:endParaRPr lang="en-US" sz="1300" dirty="0"/>
           </a:p>

--- a/P25301051-p3-presentation-15-slides.pptx
+++ b/P25301051-p3-presentation-15-slides.pptx
@@ -311,7 +311,7 @@
             <a:lstStyle/>
             <a:p>
               <a:pPr>
-                <a:defRPr sz="1400" b="1">
+                <a:defRPr sz="1500" b="1">
                   <a:solidFill>
                     <a:srgbClr val="FFFFFF"/>
                   </a:solidFill>
@@ -355,7 +355,7 @@
           <a:lstStyle/>
           <a:p>
             <a:pPr>
-              <a:defRPr sz="1300">
+              <a:defRPr sz="1400">
                 <a:solidFill>
                   <a:srgbClr val="374151"/>
                 </a:solidFill>
@@ -391,7 +391,7 @@
           <a:lstStyle/>
           <a:p>
             <a:pPr>
-              <a:defRPr sz="1100">
+              <a:defRPr sz="1200">
                 <a:solidFill>
                   <a:srgbClr val="6B7280"/>
                 </a:solidFill>
@@ -416,7 +416,7 @@
     <a:lstStyle/>
     <a:p>
       <a:pPr>
-        <a:defRPr sz="1200">
+        <a:defRPr sz="1300">
           <a:solidFill>
             <a:srgbClr val="374151"/>
           </a:solidFill>
@@ -658,7 +658,7 @@
             <a:lstStyle/>
             <a:p>
               <a:pPr>
-                <a:defRPr sz="1400" b="1">
+                <a:defRPr sz="1500" b="1">
                   <a:solidFill>
                     <a:srgbClr val="FFFFFF"/>
                   </a:solidFill>
@@ -702,7 +702,7 @@
           <a:lstStyle/>
           <a:p>
             <a:pPr>
-              <a:defRPr sz="1300">
+              <a:defRPr sz="1400">
                 <a:solidFill>
                   <a:srgbClr val="374151"/>
                 </a:solidFill>
@@ -739,7 +739,7 @@
           <a:lstStyle/>
           <a:p>
             <a:pPr>
-              <a:defRPr sz="1100">
+              <a:defRPr sz="1200">
                 <a:solidFill>
                   <a:srgbClr val="6B7280"/>
                 </a:solidFill>
@@ -765,7 +765,7 @@
     <a:lstStyle/>
     <a:p>
       <a:pPr>
-        <a:defRPr sz="1200">
+        <a:defRPr sz="1300">
           <a:solidFill>
             <a:srgbClr val="374151"/>
           </a:solidFill>
@@ -3250,7 +3250,7 @@
               <a:buNone/>
             </a:pPr>
             <a:r>
-              <a:rPr lang="en-US" sz="1250" b="1" dirty="0">
+              <a:rPr lang="en-US" sz="1450" b="1" dirty="0">
                 <a:solidFill>
                   <a:srgbClr val="FFFFFF"/>
                 </a:solidFill>
@@ -3260,7 +3260,7 @@
               </a:rPr>
               <a:t>PROBLEMS</a:t>
             </a:r>
-            <a:endParaRPr lang="en-US" sz="1250" dirty="0"/>
+            <a:endParaRPr lang="en-US" sz="1450" dirty="0"/>
           </a:p>
         </p:txBody>
       </p:sp>
@@ -3328,7 +3328,7 @@
               <a:buNone/>
             </a:pPr>
             <a:r>
-              <a:rPr lang="en-US" sz="1600" i="1" dirty="0">
+              <a:rPr lang="en-US" sz="1700" i="1" dirty="0">
                 <a:solidFill>
                   <a:srgbClr val="6B7280"/>
                 </a:solidFill>
@@ -3338,7 +3338,7 @@
               </a:rPr>
               <a:t>Found by testing the app on real inputs, then fixed and re-tested</a:t>
             </a:r>
-            <a:endParaRPr lang="en-US" sz="1600" dirty="0"/>
+            <a:endParaRPr lang="en-US" sz="1700" dirty="0"/>
           </a:p>
         </p:txBody>
       </p:sp>
@@ -3419,7 +3419,7 @@
               <a:buNone/>
             </a:pPr>
             <a:r>
-              <a:rPr lang="en-US" sz="1550" b="1" dirty="0">
+              <a:rPr lang="en-US" sz="1650" b="1" dirty="0">
                 <a:solidFill>
                   <a:srgbClr val="141B3D"/>
                 </a:solidFill>
@@ -3429,7 +3429,7 @@
               </a:rPr>
               <a:t>A list of 6 clauses gave 14 cards</a:t>
             </a:r>
-            <a:endParaRPr lang="en-US" sz="1550" dirty="0"/>
+            <a:endParaRPr lang="en-US" sz="1650" dirty="0"/>
           </a:p>
         </p:txBody>
       </p:sp>
@@ -3458,7 +3458,7 @@
               <a:buNone/>
             </a:pPr>
             <a:r>
-              <a:rPr lang="en-US" sz="1350" dirty="0">
+              <a:rPr lang="en-US" sz="1550" dirty="0">
                 <a:solidFill>
                   <a:srgbClr val="374151"/>
                 </a:solidFill>
@@ -3468,7 +3468,7 @@
               </a:rPr>
               <a:t>We added a clause mode in which each paragraph gets exactly one category and one card. A contract with 18 numbered clauses now gives 18 cards.</a:t>
             </a:r>
-            <a:endParaRPr lang="en-US" sz="1350" dirty="0"/>
+            <a:endParaRPr lang="en-US" sz="1550" dirty="0"/>
           </a:p>
         </p:txBody>
       </p:sp>
@@ -3549,7 +3549,7 @@
               <a:buNone/>
             </a:pPr>
             <a:r>
-              <a:rPr lang="en-US" sz="1550" b="1" dirty="0">
+              <a:rPr lang="en-US" sz="1650" b="1" dirty="0">
                 <a:solidFill>
                   <a:srgbClr val="141B3D"/>
                 </a:solidFill>
@@ -3559,7 +3559,7 @@
               </a:rPr>
               <a:t>Scores were not comparable across categories</a:t>
             </a:r>
-            <a:endParaRPr lang="en-US" sz="1550" dirty="0"/>
+            <a:endParaRPr lang="en-US" sz="1650" dirty="0"/>
           </a:p>
         </p:txBody>
       </p:sp>
@@ -3588,7 +3588,7 @@
               <a:buNone/>
             </a:pPr>
             <a:r>
-              <a:rPr lang="en-US" sz="1350" dirty="0">
+              <a:rPr lang="en-US" sz="1550" dirty="0">
                 <a:solidFill>
                   <a:srgbClr val="374151"/>
                 </a:solidFill>
@@ -3598,7 +3598,7 @@
               </a:rPr>
               <a:t>“Parties” scored about 0.98 on almost any clause. Each score is now adjusted against 1,586 training clauses, which raised correct categories from 9.6% to 42.3%.</a:t>
             </a:r>
-            <a:endParaRPr lang="en-US" sz="1350" dirty="0"/>
+            <a:endParaRPr lang="en-US" sz="1550" dirty="0"/>
           </a:p>
         </p:txBody>
       </p:sp>
@@ -3679,7 +3679,7 @@
               <a:buNone/>
             </a:pPr>
             <a:r>
-              <a:rPr lang="en-US" sz="1550" b="1" dirty="0">
+              <a:rPr lang="en-US" sz="1650" b="1" dirty="0">
                 <a:solidFill>
                   <a:srgbClr val="141B3D"/>
                 </a:solidFill>
@@ -3689,7 +3689,7 @@
               </a:rPr>
               <a:t>The quoted text was almost the same for every category</a:t>
             </a:r>
-            <a:endParaRPr lang="en-US" sz="1550" dirty="0"/>
+            <a:endParaRPr lang="en-US" sz="1650" dirty="0"/>
           </a:p>
         </p:txBody>
       </p:sp>
@@ -3718,7 +3718,7 @@
               <a:buNone/>
             </a:pPr>
             <a:r>
-              <a:rPr lang="en-US" sz="1350" dirty="0">
+              <a:rPr lang="en-US" sz="1550" dirty="0">
                 <a:solidFill>
                   <a:srgbClr val="374151"/>
                 </a:solidFill>
@@ -3728,7 +3728,7 @@
               </a:rPr>
               <a:t>The presence model now picks the paragraph, and the span model only highlights the key phrase inside it.</a:t>
             </a:r>
-            <a:endParaRPr lang="en-US" sz="1350" dirty="0"/>
+            <a:endParaRPr lang="en-US" sz="1550" dirty="0"/>
           </a:p>
         </p:txBody>
       </p:sp>
@@ -3809,7 +3809,7 @@
               <a:buNone/>
             </a:pPr>
             <a:r>
-              <a:rPr lang="en-US" sz="1550" b="1" dirty="0">
+              <a:rPr lang="en-US" sz="1650" b="1" dirty="0">
                 <a:solidFill>
                   <a:srgbClr val="141B3D"/>
                 </a:solidFill>
@@ -3819,7 +3819,7 @@
               </a:rPr>
               <a:t>Very long contracts were slow</a:t>
             </a:r>
-            <a:endParaRPr lang="en-US" sz="1550" dirty="0"/>
+            <a:endParaRPr lang="en-US" sz="1650" dirty="0"/>
           </a:p>
         </p:txBody>
       </p:sp>
@@ -3848,7 +3848,7 @@
               <a:buNone/>
             </a:pPr>
             <a:r>
-              <a:rPr lang="en-US" sz="1350" dirty="0">
+              <a:rPr lang="en-US" sz="1550" dirty="0">
                 <a:solidFill>
                   <a:srgbClr val="374151"/>
                 </a:solidFill>
@@ -3858,7 +3858,7 @@
               </a:rPr>
               <a:t>The app reads at most 30 windows (about 45,500 characters), so even the longest test contract takes 34.8 s. The app states this on screen.</a:t>
             </a:r>
-            <a:endParaRPr lang="en-US" sz="1350" dirty="0"/>
+            <a:endParaRPr lang="en-US" sz="1550" dirty="0"/>
           </a:p>
         </p:txBody>
       </p:sp>
@@ -3939,7 +3939,7 @@
               <a:buNone/>
             </a:pPr>
             <a:r>
-              <a:rPr lang="en-US" sz="1250" b="1" dirty="0">
+              <a:rPr lang="en-US" sz="1450" b="1" dirty="0">
                 <a:solidFill>
                   <a:srgbClr val="1E2761"/>
                 </a:solidFill>
@@ -3949,7 +3949,7 @@
               </a:rPr>
               <a:t>EVALUATION</a:t>
             </a:r>
-            <a:endParaRPr lang="en-US" sz="1250" dirty="0"/>
+            <a:endParaRPr lang="en-US" sz="1450" dirty="0"/>
           </a:p>
         </p:txBody>
       </p:sp>
@@ -4017,7 +4017,7 @@
               <a:buNone/>
             </a:pPr>
             <a:r>
-              <a:rPr lang="en-US" sz="1600" i="1" dirty="0">
+              <a:rPr lang="en-US" sz="1700" i="1" dirty="0">
                 <a:solidFill>
                   <a:srgbClr val="6B7280"/>
                 </a:solidFill>
@@ -4027,7 +4027,7 @@
               </a:rPr>
               <a:t>Every number comes from contracts the models never saw</a:t>
             </a:r>
-            <a:endParaRPr lang="en-US" sz="1600" dirty="0"/>
+            <a:endParaRPr lang="en-US" sz="1700" dirty="0"/>
           </a:p>
         </p:txBody>
       </p:sp>
@@ -4083,7 +4083,7 @@
               <a:buNone/>
             </a:pPr>
             <a:r>
-              <a:rPr lang="en-US" sz="1600" b="1" dirty="0">
+              <a:rPr lang="en-US" sz="1700" b="1" dirty="0">
                 <a:solidFill>
                   <a:srgbClr val="141B3D"/>
                 </a:solidFill>
@@ -4093,7 +4093,7 @@
               </a:rPr>
               <a:t>510 CUAD contracts</a:t>
             </a:r>
-            <a:endParaRPr lang="en-US" sz="1600" dirty="0"/>
+            <a:endParaRPr lang="en-US" sz="1700" dirty="0"/>
           </a:p>
         </p:txBody>
       </p:sp>
@@ -4122,7 +4122,7 @@
               <a:buNone/>
             </a:pPr>
             <a:r>
-              <a:rPr lang="en-US" sz="1300" dirty="0">
+              <a:rPr lang="en-US" sz="1500" dirty="0">
                 <a:solidFill>
                   <a:srgbClr val="6B7280"/>
                 </a:solidFill>
@@ -4132,7 +4132,7 @@
               </a:rPr>
               <a:t>↓  split once by contract, seed 42</a:t>
             </a:r>
-            <a:endParaRPr lang="en-US" sz="1300" dirty="0"/>
+            <a:endParaRPr lang="en-US" sz="1500" dirty="0"/>
           </a:p>
         </p:txBody>
       </p:sp>
@@ -4188,7 +4188,7 @@
               <a:buNone/>
             </a:pPr>
             <a:r>
-              <a:rPr lang="en-US" sz="1600" b="1" dirty="0">
+              <a:rPr lang="en-US" sz="1700" b="1" dirty="0">
                 <a:solidFill>
                   <a:srgbClr val="141B3D"/>
                 </a:solidFill>
@@ -4198,7 +4198,7 @@
               </a:rPr>
               <a:t>102 unseen test contracts  (408 used for training)</a:t>
             </a:r>
-            <a:endParaRPr lang="en-US" sz="1600" dirty="0"/>
+            <a:endParaRPr lang="en-US" sz="1700" dirty="0"/>
           </a:p>
         </p:txBody>
       </p:sp>
@@ -4227,7 +4227,7 @@
               <a:buNone/>
             </a:pPr>
             <a:r>
-              <a:rPr lang="en-US" sz="1300" dirty="0">
+              <a:rPr lang="en-US" sz="1500" dirty="0">
                 <a:solidFill>
                   <a:srgbClr val="6B7280"/>
                 </a:solidFill>
@@ -4237,7 +4237,7 @@
               </a:rPr>
               <a:t>↓  a separate notebook loads the saved models</a:t>
             </a:r>
-            <a:endParaRPr lang="en-US" sz="1300" dirty="0"/>
+            <a:endParaRPr lang="en-US" sz="1500" dirty="0"/>
           </a:p>
         </p:txBody>
       </p:sp>
@@ -4293,7 +4293,7 @@
               <a:buNone/>
             </a:pPr>
             <a:r>
-              <a:rPr lang="en-US" sz="1600" b="1" dirty="0">
+              <a:rPr lang="en-US" sz="1700" b="1" dirty="0">
                 <a:solidFill>
                   <a:srgbClr val="FFFFFF"/>
                 </a:solidFill>
@@ -4303,7 +4303,7 @@
               </a:rPr>
               <a:t>4,182 presence decisions · 2,667 span windows · 150 clauses</a:t>
             </a:r>
-            <a:endParaRPr lang="en-US" sz="1600" dirty="0"/>
+            <a:endParaRPr lang="en-US" sz="1700" dirty="0"/>
           </a:p>
         </p:txBody>
       </p:sp>
@@ -4371,7 +4371,7 @@
               <a:buNone/>
             </a:pPr>
             <a:r>
-              <a:rPr lang="en-US" sz="1300" dirty="0">
+              <a:rPr lang="en-US" sz="1500" dirty="0">
                 <a:solidFill>
                   <a:srgbClr val="374151"/>
                 </a:solidFill>
@@ -4379,16 +4379,16 @@
                 <a:ea typeface="Calibri" pitchFamily="34" charset="-122"/>
                 <a:cs typeface="Calibri" pitchFamily="34" charset="-120"/>
               </a:rPr>
-              <a:t>bootstrap resamples of whole contracts</a:t>
-            </a:r>
-            <a:endParaRPr lang="en-US" sz="1300" dirty="0"/>
+              <a:t>bootstrap resamples of contracts</a:t>
+            </a:r>
+            <a:endParaRPr lang="en-US" sz="1500" dirty="0"/>
           </a:p>
           <a:p>
             <a:pPr indent="0" marL="0">
               <a:buNone/>
             </a:pPr>
             <a:r>
-              <a:rPr lang="en-US" sz="1300" dirty="0">
+              <a:rPr lang="en-US" sz="1500" dirty="0">
                 <a:solidFill>
                   <a:srgbClr val="374151"/>
                 </a:solidFill>
@@ -4398,7 +4398,7 @@
               </a:rPr>
               <a:t>for every 95% confidence interval</a:t>
             </a:r>
-            <a:endParaRPr lang="en-US" sz="1300" dirty="0"/>
+            <a:endParaRPr lang="en-US" sz="1500" dirty="0"/>
           </a:p>
         </p:txBody>
       </p:sp>
@@ -4427,7 +4427,7 @@
               <a:buNone/>
             </a:pPr>
             <a:r>
-              <a:rPr lang="en-US" sz="1300" dirty="0">
+              <a:rPr lang="en-US" sz="1500" dirty="0">
                 <a:solidFill>
                   <a:srgbClr val="374151"/>
                 </a:solidFill>
@@ -4437,7 +4437,7 @@
               </a:rPr>
               <a:t>Scores: micro-F1, accuracy, precision, recall and specificity for presence; token-F1 and exact match for clause text; ROUGE-L for explanations. We re-checked the main result with three seeds, the full training set and 20 different splits.</a:t>
             </a:r>
-            <a:endParaRPr lang="en-US" sz="1300" dirty="0"/>
+            <a:endParaRPr lang="en-US" sz="1500" dirty="0"/>
           </a:p>
         </p:txBody>
       </p:sp>
@@ -4518,7 +4518,7 @@
               <a:buNone/>
             </a:pPr>
             <a:r>
-              <a:rPr lang="en-US" sz="1250" b="1" dirty="0">
+              <a:rPr lang="en-US" sz="1450" b="1" dirty="0">
                 <a:solidFill>
                   <a:srgbClr val="1E2761"/>
                 </a:solidFill>
@@ -4528,7 +4528,7 @@
               </a:rPr>
               <a:t>RESULTS</a:t>
             </a:r>
-            <a:endParaRPr lang="en-US" sz="1250" dirty="0"/>
+            <a:endParaRPr lang="en-US" sz="1450" dirty="0"/>
           </a:p>
         </p:txBody>
       </p:sp>
@@ -4596,7 +4596,7 @@
               <a:buNone/>
             </a:pPr>
             <a:r>
-              <a:rPr lang="en-US" sz="1600" i="1" dirty="0">
+              <a:rPr lang="en-US" sz="1700" i="1" dirty="0">
                 <a:solidFill>
                   <a:srgbClr val="6B7280"/>
                 </a:solidFill>
@@ -4606,7 +4606,7 @@
               </a:rPr>
               <a:t>Micro-F1 over 4,182 (contract, category) test decisions</a:t>
             </a:r>
-            <a:endParaRPr lang="en-US" sz="1600" dirty="0"/>
+            <a:endParaRPr lang="en-US" sz="1700" dirty="0"/>
           </a:p>
         </p:txBody>
       </p:sp>
@@ -4635,7 +4635,7 @@
               <a:buNone/>
             </a:pPr>
             <a:r>
-              <a:rPr lang="en-US" sz="1300" i="1" dirty="0">
+              <a:rPr lang="en-US" sz="1500" i="1" dirty="0">
                 <a:solidFill>
                   <a:srgbClr val="6B7280"/>
                 </a:solidFill>
@@ -4645,14 +4645,14 @@
               </a:rPr>
               <a:t>Per-category F1, twelve</a:t>
             </a:r>
-            <a:endParaRPr lang="en-US" sz="1300" dirty="0"/>
+            <a:endParaRPr lang="en-US" sz="1500" dirty="0"/>
           </a:p>
           <a:p>
             <a:pPr indent="0" marL="0">
               <a:buNone/>
             </a:pPr>
             <a:r>
-              <a:rPr lang="en-US" sz="1300" i="1" dirty="0">
+              <a:rPr lang="en-US" sz="1500" i="1" dirty="0">
                 <a:solidFill>
                   <a:srgbClr val="6B7280"/>
                 </a:solidFill>
@@ -4662,7 +4662,7 @@
               </a:rPr>
               <a:t>strongest categories (Fig. 5.3)</a:t>
             </a:r>
-            <a:endParaRPr lang="en-US" sz="1300" dirty="0"/>
+            <a:endParaRPr lang="en-US" sz="1500" dirty="0"/>
           </a:p>
         </p:txBody>
       </p:sp>
@@ -4743,7 +4743,7 @@
               <a:buNone/>
             </a:pPr>
             <a:r>
-              <a:rPr lang="en-US" sz="1550" b="1" dirty="0">
+              <a:rPr lang="en-US" sz="1650" b="1" dirty="0">
                 <a:solidFill>
                   <a:srgbClr val="141B3D"/>
                 </a:solidFill>
@@ -4753,7 +4753,7 @@
               </a:rPr>
               <a:t>Highest score: the AND-ensemble</a:t>
             </a:r>
-            <a:endParaRPr lang="en-US" sz="1550" dirty="0"/>
+            <a:endParaRPr lang="en-US" sz="1650" dirty="0"/>
           </a:p>
         </p:txBody>
       </p:sp>
@@ -4782,7 +4782,7 @@
               <a:buNone/>
             </a:pPr>
             <a:r>
-              <a:rPr lang="en-US" sz="1350" dirty="0">
+              <a:rPr lang="en-US" sz="1550" dirty="0">
                 <a:solidFill>
                   <a:srgbClr val="374151"/>
                 </a:solidFill>
@@ -4792,7 +4792,7 @@
               </a:rPr>
               <a:t>Micro-F1 0.779 · accuracy 85.65% · precision 77.38% · recall 78.41% · specificity 89.10%. Its lead over TF-IDF is inside the 95% interval, so we call it a tie.</a:t>
             </a:r>
-            <a:endParaRPr lang="en-US" sz="1350" dirty="0"/>
+            <a:endParaRPr lang="en-US" sz="1550" dirty="0"/>
           </a:p>
         </p:txBody>
       </p:sp>
@@ -4873,7 +4873,7 @@
               <a:buNone/>
             </a:pPr>
             <a:r>
-              <a:rPr lang="en-US" sz="1550" b="1" dirty="0">
+              <a:rPr lang="en-US" sz="1650" b="1" dirty="0">
                 <a:solidFill>
                   <a:srgbClr val="141B3D"/>
                 </a:solidFill>
@@ -4883,7 +4883,7 @@
               </a:rPr>
               <a:t>A strong simple baseline</a:t>
             </a:r>
-            <a:endParaRPr lang="en-US" sz="1550" dirty="0"/>
+            <a:endParaRPr lang="en-US" sz="1650" dirty="0"/>
           </a:p>
         </p:txBody>
       </p:sp>
@@ -4912,7 +4912,7 @@
               <a:buNone/>
             </a:pPr>
             <a:r>
-              <a:rPr lang="en-US" sz="1350" dirty="0">
+              <a:rPr lang="en-US" sz="1550" dirty="0">
                 <a:solidFill>
                   <a:srgbClr val="374151"/>
                 </a:solidFill>
@@ -4922,7 +4922,7 @@
               </a:rPr>
               <a:t>TF-IDF reaches 0.775 and beats the window transformer (0.692) by 0.082. The gap held with three seeds, all 53,662 windows and six pooling rules.</a:t>
             </a:r>
-            <a:endParaRPr lang="en-US" sz="1350" dirty="0"/>
+            <a:endParaRPr lang="en-US" sz="1550" dirty="0"/>
           </a:p>
         </p:txBody>
       </p:sp>
@@ -5003,7 +5003,7 @@
               <a:buNone/>
             </a:pPr>
             <a:r>
-              <a:rPr lang="en-US" sz="1550" b="1" dirty="0">
+              <a:rPr lang="en-US" sz="1650" b="1" dirty="0">
                 <a:solidFill>
                   <a:srgbClr val="141B3D"/>
                 </a:solidFill>
@@ -5013,7 +5013,7 @@
               </a:rPr>
               <a:t>Common clauses are almost solved</a:t>
             </a:r>
-            <a:endParaRPr lang="en-US" sz="1550" dirty="0"/>
+            <a:endParaRPr lang="en-US" sz="1650" dirty="0"/>
           </a:p>
         </p:txBody>
       </p:sp>
@@ -5042,7 +5042,7 @@
               <a:buNone/>
             </a:pPr>
             <a:r>
-              <a:rPr lang="en-US" sz="1350" dirty="0">
+              <a:rPr lang="en-US" sz="1550" dirty="0">
                 <a:solidFill>
                   <a:srgbClr val="374151"/>
                 </a:solidFill>
@@ -5052,7 +5052,7 @@
               </a:rPr>
               <a:t>Document Name 1.000, Parties 0.995, Agreement Date 0.963, Governing Law 0.931. The rarest categories have only 2 to 7 test examples, too few to learn reliably.</a:t>
             </a:r>
-            <a:endParaRPr lang="en-US" sz="1350" dirty="0"/>
+            <a:endParaRPr lang="en-US" sz="1550" dirty="0"/>
           </a:p>
         </p:txBody>
       </p:sp>
@@ -5175,7 +5175,7 @@
               <a:buNone/>
             </a:pPr>
             <a:r>
-              <a:rPr lang="en-US" sz="1250" b="1" dirty="0">
+              <a:rPr lang="en-US" sz="1450" b="1" dirty="0">
                 <a:solidFill>
                   <a:srgbClr val="1E2761"/>
                 </a:solidFill>
@@ -5185,7 +5185,7 @@
               </a:rPr>
               <a:t>RESULTS</a:t>
             </a:r>
-            <a:endParaRPr lang="en-US" sz="1250" dirty="0"/>
+            <a:endParaRPr lang="en-US" sz="1450" dirty="0"/>
           </a:p>
         </p:txBody>
       </p:sp>
@@ -5253,7 +5253,7 @@
               <a:buNone/>
             </a:pPr>
             <a:r>
-              <a:rPr lang="en-US" sz="1600" i="1" dirty="0">
+              <a:rPr lang="en-US" sz="1700" i="1" dirty="0">
                 <a:solidFill>
                   <a:srgbClr val="6B7280"/>
                 </a:solidFill>
@@ -5263,7 +5263,7 @@
               </a:rPr>
               <a:t>How the span model and the summarizer do on unseen clauses</a:t>
             </a:r>
-            <a:endParaRPr lang="en-US" sz="1600" dirty="0"/>
+            <a:endParaRPr lang="en-US" sz="1700" dirty="0"/>
           </a:p>
         </p:txBody>
       </p:sp>
@@ -5319,7 +5319,7 @@
               <a:buNone/>
             </a:pPr>
             <a:r>
-              <a:rPr lang="en-US" sz="1250" dirty="0">
+              <a:rPr lang="en-US" sz="1450" dirty="0">
                 <a:solidFill>
                   <a:srgbClr val="374151"/>
                 </a:solidFill>
@@ -5329,14 +5329,14 @@
               </a:rPr>
               <a:t>clause text</a:t>
             </a:r>
-            <a:endParaRPr lang="en-US" sz="1250" dirty="0"/>
+            <a:endParaRPr lang="en-US" sz="1450" dirty="0"/>
           </a:p>
           <a:p>
             <a:pPr algn="ctr" indent="0" marL="0">
               <a:buNone/>
             </a:pPr>
             <a:r>
-              <a:rPr lang="en-US" sz="1250" dirty="0">
+              <a:rPr lang="en-US" sz="1450" dirty="0">
                 <a:solidFill>
                   <a:srgbClr val="374151"/>
                 </a:solidFill>
@@ -5346,7 +5346,7 @@
               </a:rPr>
               <a:t>“any attempted assignment … will be void”</a:t>
             </a:r>
-            <a:endParaRPr lang="en-US" sz="1250" dirty="0"/>
+            <a:endParaRPr lang="en-US" sz="1450" dirty="0"/>
           </a:p>
         </p:txBody>
       </p:sp>
@@ -5441,7 +5441,7 @@
               <a:buNone/>
             </a:pPr>
             <a:r>
-              <a:rPr lang="en-US" sz="1250" b="1" dirty="0">
+              <a:rPr lang="en-US" sz="1450" b="1" dirty="0">
                 <a:solidFill>
                   <a:srgbClr val="FFFFFF"/>
                 </a:solidFill>
@@ -5451,14 +5451,14 @@
               </a:rPr>
               <a:t>FLAN-T5-small</a:t>
             </a:r>
-            <a:endParaRPr lang="en-US" sz="1250" dirty="0"/>
+            <a:endParaRPr lang="en-US" sz="1450" dirty="0"/>
           </a:p>
           <a:p>
             <a:pPr algn="ctr" indent="0" marL="0">
               <a:buNone/>
             </a:pPr>
             <a:r>
-              <a:rPr lang="en-US" sz="1250" b="1" dirty="0">
+              <a:rPr lang="en-US" sz="1450" b="1" dirty="0">
                 <a:solidFill>
                   <a:srgbClr val="FFFFFF"/>
                 </a:solidFill>
@@ -5468,7 +5468,7 @@
               </a:rPr>
               <a:t>picks the category sentence</a:t>
             </a:r>
-            <a:endParaRPr lang="en-US" sz="1250" dirty="0"/>
+            <a:endParaRPr lang="en-US" sz="1450" dirty="0"/>
           </a:p>
         </p:txBody>
       </p:sp>
@@ -5563,7 +5563,7 @@
               <a:buNone/>
             </a:pPr>
             <a:r>
-              <a:rPr lang="en-US" sz="1250" dirty="0">
+              <a:rPr lang="en-US" sz="1450" dirty="0">
                 <a:solidFill>
                   <a:srgbClr val="141B3D"/>
                 </a:solidFill>
@@ -5573,7 +5573,7 @@
               </a:rPr>
               <a:t>Anti-Assignment sentence</a:t>
             </a:r>
-            <a:endParaRPr lang="en-US" sz="1250" dirty="0"/>
+            <a:endParaRPr lang="en-US" sz="1450" dirty="0"/>
           </a:p>
         </p:txBody>
       </p:sp>
@@ -5602,7 +5602,7 @@
               <a:buNone/>
             </a:pPr>
             <a:r>
-              <a:rPr lang="en-US" sz="1250" b="1" dirty="0">
+              <a:rPr lang="en-US" sz="1450" b="1" dirty="0">
                 <a:solidFill>
                   <a:srgbClr val="4CAF82"/>
                 </a:solidFill>
@@ -5612,7 +5612,7 @@
               </a:rPr>
               <a:t>right 70%</a:t>
             </a:r>
-            <a:endParaRPr lang="en-US" sz="1250" dirty="0"/>
+            <a:endParaRPr lang="en-US" sz="1450" dirty="0"/>
           </a:p>
         </p:txBody>
       </p:sp>
@@ -5668,7 +5668,7 @@
               <a:buNone/>
             </a:pPr>
             <a:r>
-              <a:rPr lang="en-US" sz="1250" dirty="0">
+              <a:rPr lang="en-US" sz="1450" dirty="0">
                 <a:solidFill>
                   <a:srgbClr val="6B7280"/>
                 </a:solidFill>
@@ -5678,7 +5678,7 @@
               </a:rPr>
               <a:t>Cap on Liability sentence</a:t>
             </a:r>
-            <a:endParaRPr lang="en-US" sz="1250" dirty="0"/>
+            <a:endParaRPr lang="en-US" sz="1450" dirty="0"/>
           </a:p>
         </p:txBody>
       </p:sp>
@@ -5734,7 +5734,7 @@
               <a:buNone/>
             </a:pPr>
             <a:r>
-              <a:rPr lang="en-US" sz="1250" dirty="0">
+              <a:rPr lang="en-US" sz="1450" dirty="0">
                 <a:solidFill>
                   <a:srgbClr val="141B3D"/>
                 </a:solidFill>
@@ -5744,7 +5744,7 @@
               </a:rPr>
               <a:t>ROFR sentence</a:t>
             </a:r>
-            <a:endParaRPr lang="en-US" sz="1250" dirty="0"/>
+            <a:endParaRPr lang="en-US" sz="1450" dirty="0"/>
           </a:p>
         </p:txBody>
       </p:sp>
@@ -5773,7 +5773,7 @@
               <a:buNone/>
             </a:pPr>
             <a:r>
-              <a:rPr lang="en-US" sz="1250" b="1" dirty="0">
+              <a:rPr lang="en-US" sz="1450" b="1" dirty="0">
                 <a:solidFill>
                   <a:srgbClr val="D94F5C"/>
                 </a:solidFill>
@@ -5783,7 +5783,7 @@
               </a:rPr>
               <a:t>other 30%</a:t>
             </a:r>
-            <a:endParaRPr lang="en-US" sz="1250" dirty="0"/>
+            <a:endParaRPr lang="en-US" sz="1450" dirty="0"/>
           </a:p>
         </p:txBody>
       </p:sp>
@@ -5812,7 +5812,7 @@
               <a:buNone/>
             </a:pPr>
             <a:r>
-              <a:rPr lang="en-US" sz="1250" dirty="0">
+              <a:rPr lang="en-US" sz="1450" dirty="0">
                 <a:solidFill>
                   <a:srgbClr val="6B7280"/>
                 </a:solidFill>
@@ -5822,7 +5822,7 @@
               </a:rPr>
               <a:t>⋮  one of the 41 sentences we wrote</a:t>
             </a:r>
-            <a:endParaRPr lang="en-US" sz="1250" dirty="0"/>
+            <a:endParaRPr lang="en-US" sz="1450" dirty="0"/>
           </a:p>
         </p:txBody>
       </p:sp>
@@ -5890,7 +5890,7 @@
               <a:buNone/>
             </a:pPr>
             <a:r>
-              <a:rPr lang="en-US" sz="1350" dirty="0">
+              <a:rPr lang="en-US" sz="1550" dirty="0">
                 <a:solidFill>
                   <a:srgbClr val="6B7280"/>
                 </a:solidFill>
@@ -5898,9 +5898,26 @@
                 <a:ea typeface="Calibri" pitchFamily="34" charset="-122"/>
                 <a:cs typeface="Calibri" pitchFamily="34" charset="-120"/>
               </a:rPr>
-              <a:t>token-F1 of the clause text (95% CI 0.743 to 0.782)</a:t>
-            </a:r>
-            <a:endParaRPr lang="en-US" sz="1350" dirty="0"/>
+              <a:t>token-F1 of the clause text</a:t>
+            </a:r>
+            <a:endParaRPr lang="en-US" sz="1550" dirty="0"/>
+          </a:p>
+          <a:p>
+            <a:pPr algn="ctr" indent="0" marL="0">
+              <a:buNone/>
+            </a:pPr>
+            <a:r>
+              <a:rPr lang="en-US" sz="1550" dirty="0">
+                <a:solidFill>
+                  <a:srgbClr val="6B7280"/>
+                </a:solidFill>
+                <a:latin typeface="Calibri" pitchFamily="34" charset="0"/>
+                <a:ea typeface="Calibri" pitchFamily="34" charset="-122"/>
+                <a:cs typeface="Calibri" pitchFamily="34" charset="-120"/>
+              </a:rPr>
+              <a:t>95% CI 0.743 to 0.782</a:t>
+            </a:r>
+            <a:endParaRPr lang="en-US" sz="1550" dirty="0"/>
           </a:p>
         </p:txBody>
       </p:sp>
@@ -5968,7 +5985,7 @@
               <a:buNone/>
             </a:pPr>
             <a:r>
-              <a:rPr lang="en-US" sz="1350" dirty="0">
+              <a:rPr lang="en-US" sz="1550" dirty="0">
                 <a:solidFill>
                   <a:srgbClr val="6B7280"/>
                 </a:solidFill>
@@ -5976,9 +5993,26 @@
                 <a:ea typeface="Calibri" pitchFamily="34" charset="-122"/>
                 <a:cs typeface="Calibri" pitchFamily="34" charset="-120"/>
               </a:rPr>
-              <a:t>of answers overlap the real clause well (F1 ≥ 0.5)</a:t>
-            </a:r>
-            <a:endParaRPr lang="en-US" sz="1350" dirty="0"/>
+              <a:t>of answers overlap the real clause</a:t>
+            </a:r>
+            <a:endParaRPr lang="en-US" sz="1550" dirty="0"/>
+          </a:p>
+          <a:p>
+            <a:pPr algn="ctr" indent="0" marL="0">
+              <a:buNone/>
+            </a:pPr>
+            <a:r>
+              <a:rPr lang="en-US" sz="1550" dirty="0">
+                <a:solidFill>
+                  <a:srgbClr val="6B7280"/>
+                </a:solidFill>
+                <a:latin typeface="Calibri" pitchFamily="34" charset="0"/>
+                <a:ea typeface="Calibri" pitchFamily="34" charset="-122"/>
+                <a:cs typeface="Calibri" pitchFamily="34" charset="-120"/>
+              </a:rPr>
+              <a:t>well (token-F1 ≥ 0.5)</a:t>
+            </a:r>
+            <a:endParaRPr lang="en-US" sz="1550" dirty="0"/>
           </a:p>
         </p:txBody>
       </p:sp>
@@ -6046,7 +6080,7 @@
               <a:buNone/>
             </a:pPr>
             <a:r>
-              <a:rPr lang="en-US" sz="1350" dirty="0">
+              <a:rPr lang="en-US" sz="1550" dirty="0">
                 <a:solidFill>
                   <a:srgbClr val="6B7280"/>
                 </a:solidFill>
@@ -6054,9 +6088,26 @@
                 <a:ea typeface="Calibri" pitchFamily="34" charset="-122"/>
                 <a:cs typeface="Calibri" pitchFamily="34" charset="-120"/>
               </a:rPr>
-              <a:t>ROUGE-L of the explanations against our 41 sentences</a:t>
-            </a:r>
-            <a:endParaRPr lang="en-US" sz="1350" dirty="0"/>
+              <a:t>ROUGE-L of the explanations</a:t>
+            </a:r>
+            <a:endParaRPr lang="en-US" sz="1550" dirty="0"/>
+          </a:p>
+          <a:p>
+            <a:pPr algn="ctr" indent="0" marL="0">
+              <a:buNone/>
+            </a:pPr>
+            <a:r>
+              <a:rPr lang="en-US" sz="1550" dirty="0">
+                <a:solidFill>
+                  <a:srgbClr val="6B7280"/>
+                </a:solidFill>
+                <a:latin typeface="Calibri" pitchFamily="34" charset="0"/>
+                <a:ea typeface="Calibri" pitchFamily="34" charset="-122"/>
+                <a:cs typeface="Calibri" pitchFamily="34" charset="-120"/>
+              </a:rPr>
+              <a:t>against our 41 sentences</a:t>
+            </a:r>
+            <a:endParaRPr lang="en-US" sz="1550" dirty="0"/>
           </a:p>
         </p:txBody>
       </p:sp>
@@ -6137,7 +6188,7 @@
               <a:buNone/>
             </a:pPr>
             <a:r>
-              <a:rPr lang="en-US" sz="1550" b="1" dirty="0">
+              <a:rPr lang="en-US" sz="1650" b="1" dirty="0">
                 <a:solidFill>
                   <a:srgbClr val="141B3D"/>
                 </a:solidFill>
@@ -6147,7 +6198,7 @@
               </a:rPr>
               <a:t>How to read these numbers</a:t>
             </a:r>
-            <a:endParaRPr lang="en-US" sz="1550" dirty="0"/>
+            <a:endParaRPr lang="en-US" sz="1650" dirty="0"/>
           </a:p>
         </p:txBody>
       </p:sp>
@@ -6176,7 +6227,7 @@
               <a:buNone/>
             </a:pPr>
             <a:r>
-              <a:rPr lang="en-US" sz="1350" dirty="0">
+              <a:rPr lang="en-US" sz="1550" dirty="0">
                 <a:solidFill>
                   <a:srgbClr val="374151"/>
                 </a:solidFill>
@@ -6186,7 +6237,7 @@
               </a:rPr>
               <a:t>The span score is measured on windows that contain the clause, with a 67M-parameter model about ten times smaller than the best published CUAD model. The summarizer explains the category: it outputs one of our 41 sentences, which is why it scores only 0.116 against clause-specific references.</a:t>
             </a:r>
-            <a:endParaRPr lang="en-US" sz="1350" dirty="0"/>
+            <a:endParaRPr lang="en-US" sz="1550" dirty="0"/>
           </a:p>
         </p:txBody>
       </p:sp>
@@ -6267,7 +6318,7 @@
               <a:buNone/>
             </a:pPr>
             <a:r>
-              <a:rPr lang="en-US" sz="1250" b="1" dirty="0">
+              <a:rPr lang="en-US" sz="1450" b="1" dirty="0">
                 <a:solidFill>
                   <a:srgbClr val="1E2761"/>
                 </a:solidFill>
@@ -6277,7 +6328,7 @@
               </a:rPr>
               <a:t>RESULTS</a:t>
             </a:r>
-            <a:endParaRPr lang="en-US" sz="1250" dirty="0"/>
+            <a:endParaRPr lang="en-US" sz="1450" dirty="0"/>
           </a:p>
         </p:txBody>
       </p:sp>
@@ -6345,7 +6396,7 @@
               <a:buNone/>
             </a:pPr>
             <a:r>
-              <a:rPr lang="en-US" sz="1600" i="1" dirty="0">
+              <a:rPr lang="en-US" sz="1700" i="1" dirty="0">
                 <a:solidFill>
                   <a:srgbClr val="6B7280"/>
                 </a:solidFill>
@@ -6355,7 +6406,7 @@
               </a:rPr>
               <a:t>All the trained models running on any contract, with the risky clauses first</a:t>
             </a:r>
-            <a:endParaRPr lang="en-US" sz="1600" dirty="0"/>
+            <a:endParaRPr lang="en-US" sz="1700" dirty="0"/>
           </a:p>
         </p:txBody>
       </p:sp>
@@ -6384,7 +6435,7 @@
               <a:buNone/>
             </a:pPr>
             <a:r>
-              <a:rPr lang="en-US" sz="1200" i="1" dirty="0">
+              <a:rPr lang="en-US" sz="1400" i="1" dirty="0">
                 <a:solidFill>
                   <a:srgbClr val="6B7280"/>
                 </a:solidFill>
@@ -6394,7 +6445,7 @@
               </a:rPr>
               <a:t>The risk-sorted report (Fig. 4.15)</a:t>
             </a:r>
-            <a:endParaRPr lang="en-US" sz="1200" dirty="0"/>
+            <a:endParaRPr lang="en-US" sz="1400" dirty="0"/>
           </a:p>
         </p:txBody>
       </p:sp>
@@ -6475,7 +6526,7 @@
               <a:buNone/>
             </a:pPr>
             <a:r>
-              <a:rPr lang="en-US" sz="1550" b="1" dirty="0">
+              <a:rPr lang="en-US" sz="1650" b="1" dirty="0">
                 <a:solidFill>
                   <a:srgbClr val="141B3D"/>
                 </a:solidFill>
@@ -6485,7 +6536,7 @@
               </a:rPr>
               <a:t>Speed, measured</a:t>
             </a:r>
-            <a:endParaRPr lang="en-US" sz="1550" dirty="0"/>
+            <a:endParaRPr lang="en-US" sz="1650" dirty="0"/>
           </a:p>
         </p:txBody>
       </p:sp>
@@ -6514,7 +6565,7 @@
               <a:buNone/>
             </a:pPr>
             <a:r>
-              <a:rPr lang="en-US" sz="1350" dirty="0">
+              <a:rPr lang="en-US" sz="1550" dirty="0">
                 <a:solidFill>
                   <a:srgbClr val="374151"/>
                 </a:solidFill>
@@ -6524,7 +6575,7 @@
               </a:rPr>
               <a:t>Median contract 30.1 s, worst case 34.8 s on a CPU.</a:t>
             </a:r>
-            <a:endParaRPr lang="en-US" sz="1350" dirty="0"/>
+            <a:endParaRPr lang="en-US" sz="1550" dirty="0"/>
           </a:p>
         </p:txBody>
       </p:sp>
@@ -6605,7 +6656,7 @@
               <a:buNone/>
             </a:pPr>
             <a:r>
-              <a:rPr lang="en-US" sz="1550" b="1" dirty="0">
+              <a:rPr lang="en-US" sz="1650" b="1" dirty="0">
                 <a:solidFill>
                   <a:srgbClr val="141B3D"/>
                 </a:solidFill>
@@ -6615,7 +6666,7 @@
               </a:rPr>
               <a:t>Finds High-risk clauses</a:t>
             </a:r>
-            <a:endParaRPr lang="en-US" sz="1550" dirty="0"/>
+            <a:endParaRPr lang="en-US" sz="1650" dirty="0"/>
           </a:p>
         </p:txBody>
       </p:sp>
@@ -6644,7 +6695,7 @@
               <a:buNone/>
             </a:pPr>
             <a:r>
-              <a:rPr lang="en-US" sz="1350" dirty="0">
+              <a:rPr lang="en-US" sz="1550" dirty="0">
                 <a:solidFill>
                   <a:srgbClr val="374151"/>
                 </a:solidFill>
@@ -6654,7 +6705,7 @@
               </a:rPr>
               <a:t>The default detector finds 84% of High-risk clauses.</a:t>
             </a:r>
-            <a:endParaRPr lang="en-US" sz="1350" dirty="0"/>
+            <a:endParaRPr lang="en-US" sz="1550" dirty="0"/>
           </a:p>
         </p:txBody>
       </p:sp>
@@ -6735,7 +6786,7 @@
               <a:buNone/>
             </a:pPr>
             <a:r>
-              <a:rPr lang="en-US" sz="1550" b="1" dirty="0">
+              <a:rPr lang="en-US" sz="1650" b="1" dirty="0">
                 <a:solidFill>
                   <a:srgbClr val="141B3D"/>
                 </a:solidFill>
@@ -6745,7 +6796,7 @@
               </a:rPr>
               <a:t>Clause mode</a:t>
             </a:r>
-            <a:endParaRPr lang="en-US" sz="1550" dirty="0"/>
+            <a:endParaRPr lang="en-US" sz="1650" dirty="0"/>
           </a:p>
         </p:txBody>
       </p:sp>
@@ -6774,7 +6825,7 @@
               <a:buNone/>
             </a:pPr>
             <a:r>
-              <a:rPr lang="en-US" sz="1350" dirty="0">
+              <a:rPr lang="en-US" sz="1550" dirty="0">
                 <a:solidFill>
                   <a:srgbClr val="374151"/>
                 </a:solidFill>
@@ -6784,7 +6835,7 @@
               </a:rPr>
               <a:t>One card per clause: 18 numbered clauses give 18 cards.</a:t>
             </a:r>
-            <a:endParaRPr lang="en-US" sz="1350" dirty="0"/>
+            <a:endParaRPr lang="en-US" sz="1550" dirty="0"/>
           </a:p>
         </p:txBody>
       </p:sp>
@@ -6865,7 +6916,7 @@
               <a:buNone/>
             </a:pPr>
             <a:r>
-              <a:rPr lang="en-US" sz="1550" b="1" dirty="0">
+              <a:rPr lang="en-US" sz="1650" b="1" dirty="0">
                 <a:solidFill>
                   <a:srgbClr val="141B3D"/>
                 </a:solidFill>
@@ -6875,7 +6926,7 @@
               </a:rPr>
               <a:t>Private by design</a:t>
             </a:r>
-            <a:endParaRPr lang="en-US" sz="1550" dirty="0"/>
+            <a:endParaRPr lang="en-US" sz="1650" dirty="0"/>
           </a:p>
         </p:txBody>
       </p:sp>
@@ -6904,7 +6955,7 @@
               <a:buNone/>
             </a:pPr>
             <a:r>
-              <a:rPr lang="en-US" sz="1350" dirty="0">
+              <a:rPr lang="en-US" sz="1550" dirty="0">
                 <a:solidFill>
                   <a:srgbClr val="374151"/>
                 </a:solidFill>
@@ -6914,7 +6965,7 @@
               </a:rPr>
               <a:t>Runs locally; the contract is never saved or sent anywhere.</a:t>
             </a:r>
-            <a:endParaRPr lang="en-US" sz="1350" dirty="0"/>
+            <a:endParaRPr lang="en-US" sz="1550" dirty="0"/>
           </a:p>
         </p:txBody>
       </p:sp>
@@ -6943,7 +6994,7 @@
               <a:buNone/>
             </a:pPr>
             <a:r>
-              <a:rPr lang="en-US" sz="1700" b="1" dirty="0">
+              <a:rPr lang="en-US" sz="1800" b="1" dirty="0">
                 <a:solidFill>
                   <a:srgbClr val="141B3D"/>
                 </a:solidFill>
@@ -6953,7 +7004,7 @@
               </a:rPr>
               <a:t>What the app does</a:t>
             </a:r>
-            <a:endParaRPr lang="en-US" sz="1700" dirty="0"/>
+            <a:endParaRPr lang="en-US" sz="1800" dirty="0"/>
           </a:p>
         </p:txBody>
       </p:sp>
@@ -7034,7 +7085,7 @@
               <a:buNone/>
             </a:pPr>
             <a:r>
-              <a:rPr lang="en-US" sz="1400" b="1" dirty="0">
+              <a:rPr lang="en-US" sz="1600" b="1" dirty="0">
                 <a:solidFill>
                   <a:srgbClr val="141B3D"/>
                 </a:solidFill>
@@ -7044,7 +7095,7 @@
               </a:rPr>
               <a:t>Upload or paste</a:t>
             </a:r>
-            <a:endParaRPr lang="en-US" sz="1400" dirty="0"/>
+            <a:endParaRPr lang="en-US" sz="1600" dirty="0"/>
           </a:p>
         </p:txBody>
       </p:sp>
@@ -7073,7 +7124,7 @@
               <a:buNone/>
             </a:pPr>
             <a:r>
-              <a:rPr lang="en-US" sz="1250" dirty="0">
+              <a:rPr lang="en-US" sz="1450" dirty="0">
                 <a:solidFill>
                   <a:srgbClr val="374151"/>
                 </a:solidFill>
@@ -7083,7 +7134,7 @@
               </a:rPr>
               <a:t>PDF, Word or text; whole contract, separate clauses, or Auto</a:t>
             </a:r>
-            <a:endParaRPr lang="en-US" sz="1250" dirty="0"/>
+            <a:endParaRPr lang="en-US" sz="1450" dirty="0"/>
           </a:p>
         </p:txBody>
       </p:sp>
@@ -7164,7 +7215,7 @@
               <a:buNone/>
             </a:pPr>
             <a:r>
-              <a:rPr lang="en-US" sz="1400" b="1" dirty="0">
+              <a:rPr lang="en-US" sz="1600" b="1" dirty="0">
                 <a:solidFill>
                   <a:srgbClr val="141B3D"/>
                 </a:solidFill>
@@ -7174,7 +7225,7 @@
               </a:rPr>
               <a:t>Risk-sorted cards</a:t>
             </a:r>
-            <a:endParaRPr lang="en-US" sz="1400" dirty="0"/>
+            <a:endParaRPr lang="en-US" sz="1600" dirty="0"/>
           </a:p>
         </p:txBody>
       </p:sp>
@@ -7203,7 +7254,7 @@
               <a:buNone/>
             </a:pPr>
             <a:r>
-              <a:rPr lang="en-US" sz="1250" dirty="0">
+              <a:rPr lang="en-US" sz="1450" dirty="0">
                 <a:solidFill>
                   <a:srgbClr val="374151"/>
                 </a:solidFill>
@@ -7213,7 +7264,7 @@
               </a:rPr>
               <a:t>category, risk level and reason, plain-English line, scores and quoted text</a:t>
             </a:r>
-            <a:endParaRPr lang="en-US" sz="1250" dirty="0"/>
+            <a:endParaRPr lang="en-US" sz="1450" dirty="0"/>
           </a:p>
         </p:txBody>
       </p:sp>
@@ -7294,7 +7345,7 @@
               <a:buNone/>
             </a:pPr>
             <a:r>
-              <a:rPr lang="en-US" sz="1400" b="1" dirty="0">
+              <a:rPr lang="en-US" sz="1600" b="1" dirty="0">
                 <a:solidFill>
                   <a:srgbClr val="141B3D"/>
                 </a:solidFill>
@@ -7304,7 +7355,7 @@
               </a:rPr>
               <a:t>Highlighted contract</a:t>
             </a:r>
-            <a:endParaRPr lang="en-US" sz="1400" dirty="0"/>
+            <a:endParaRPr lang="en-US" sz="1600" dirty="0"/>
           </a:p>
         </p:txBody>
       </p:sp>
@@ -7333,7 +7384,7 @@
               <a:buNone/>
             </a:pPr>
             <a:r>
-              <a:rPr lang="en-US" sz="1250" dirty="0">
+              <a:rPr lang="en-US" sz="1450" dirty="0">
                 <a:solidFill>
                   <a:srgbClr val="374151"/>
                 </a:solidFill>
@@ -7343,7 +7394,7 @@
               </a:rPr>
               <a:t>every clause found in its risk colour, plus a missing-protection checklist</a:t>
             </a:r>
-            <a:endParaRPr lang="en-US" sz="1250" dirty="0"/>
+            <a:endParaRPr lang="en-US" sz="1450" dirty="0"/>
           </a:p>
         </p:txBody>
       </p:sp>
@@ -7424,7 +7475,7 @@
               <a:buNone/>
             </a:pPr>
             <a:r>
-              <a:rPr lang="en-US" sz="1400" b="1" dirty="0">
+              <a:rPr lang="en-US" sz="1600" b="1" dirty="0">
                 <a:solidFill>
                   <a:srgbClr val="141B3D"/>
                 </a:solidFill>
@@ -7434,7 +7485,7 @@
               </a:rPr>
               <a:t>Downloadable report</a:t>
             </a:r>
-            <a:endParaRPr lang="en-US" sz="1400" dirty="0"/>
+            <a:endParaRPr lang="en-US" sz="1600" dirty="0"/>
           </a:p>
         </p:txBody>
       </p:sp>
@@ -7463,7 +7514,7 @@
               <a:buNone/>
             </a:pPr>
             <a:r>
-              <a:rPr lang="en-US" sz="1250" dirty="0">
+              <a:rPr lang="en-US" sz="1450" dirty="0">
                 <a:solidFill>
                   <a:srgbClr val="374151"/>
                 </a:solidFill>
@@ -7473,7 +7524,7 @@
               </a:rPr>
               <a:t>PDF and CSV files; 38 of 38 automated app tests pass</a:t>
             </a:r>
-            <a:endParaRPr lang="en-US" sz="1250" dirty="0"/>
+            <a:endParaRPr lang="en-US" sz="1450" dirty="0"/>
           </a:p>
         </p:txBody>
       </p:sp>
@@ -7578,7 +7629,7 @@
               <a:buNone/>
             </a:pPr>
             <a:r>
-              <a:rPr lang="en-US" sz="1250" b="1" dirty="0">
+              <a:rPr lang="en-US" sz="1450" b="1" dirty="0">
                 <a:solidFill>
                   <a:srgbClr val="FFFFFF"/>
                 </a:solidFill>
@@ -7588,7 +7639,7 @@
               </a:rPr>
               <a:t>DISCUSSION</a:t>
             </a:r>
-            <a:endParaRPr lang="en-US" sz="1250" dirty="0"/>
+            <a:endParaRPr lang="en-US" sz="1450" dirty="0"/>
           </a:p>
         </p:txBody>
       </p:sp>
@@ -7656,7 +7707,7 @@
               <a:buNone/>
             </a:pPr>
             <a:r>
-              <a:rPr lang="en-US" sz="1600" i="1" dirty="0">
+              <a:rPr lang="en-US" sz="1700" i="1" dirty="0">
                 <a:solidFill>
                   <a:srgbClr val="6B7280"/>
                 </a:solidFill>
@@ -7666,7 +7717,7 @@
               </a:rPr>
               <a:t>What the project delivered, and what we would do next</a:t>
             </a:r>
-            <a:endParaRPr lang="en-US" sz="1600" dirty="0"/>
+            <a:endParaRPr lang="en-US" sz="1700" dirty="0"/>
           </a:p>
         </p:txBody>
       </p:sp>
@@ -7695,7 +7746,7 @@
               <a:buNone/>
             </a:pPr>
             <a:r>
-              <a:rPr lang="en-US" sz="1700" b="1" dirty="0">
+              <a:rPr lang="en-US" sz="1800" b="1" dirty="0">
                 <a:solidFill>
                   <a:srgbClr val="4CAF82"/>
                 </a:solidFill>
@@ -7705,7 +7756,7 @@
               </a:rPr>
               <a:t>What we achieved</a:t>
             </a:r>
-            <a:endParaRPr lang="en-US" sz="1700" dirty="0"/>
+            <a:endParaRPr lang="en-US" sz="1800" dirty="0"/>
           </a:p>
         </p:txBody>
       </p:sp>
@@ -7761,7 +7812,7 @@
               <a:buNone/>
             </a:pPr>
             <a:r>
-              <a:rPr lang="en-US" sz="1400" b="1" dirty="0">
+              <a:rPr lang="en-US" sz="1600" b="1" dirty="0">
                 <a:solidFill>
                   <a:srgbClr val="141B3D"/>
                 </a:solidFill>
@@ -7771,7 +7822,7 @@
               </a:rPr>
               <a:t>A complete system, tested on unseen contracts</a:t>
             </a:r>
-            <a:endParaRPr lang="en-US" sz="1400" dirty="0"/>
+            <a:endParaRPr lang="en-US" sz="1600" dirty="0"/>
           </a:p>
         </p:txBody>
       </p:sp>
@@ -7800,7 +7851,7 @@
               <a:buNone/>
             </a:pPr>
             <a:r>
-              <a:rPr lang="en-US" sz="1300" dirty="0">
+              <a:rPr lang="en-US" sz="1500" dirty="0">
                 <a:solidFill>
                   <a:srgbClr val="374151"/>
                 </a:solidFill>
@@ -7810,7 +7861,7 @@
               </a:rPr>
               <a:t>presence, clause text, risk level and plain English for 41 clause types</a:t>
             </a:r>
-            <a:endParaRPr lang="en-US" sz="1300" dirty="0"/>
+            <a:endParaRPr lang="en-US" sz="1500" dirty="0"/>
           </a:p>
         </p:txBody>
       </p:sp>
@@ -7866,7 +7917,7 @@
               <a:buNone/>
             </a:pPr>
             <a:r>
-              <a:rPr lang="en-US" sz="1400" b="1" dirty="0">
+              <a:rPr lang="en-US" sz="1600" b="1" dirty="0">
                 <a:solidFill>
                   <a:srgbClr val="141B3D"/>
                 </a:solidFill>
@@ -7876,7 +7927,7 @@
               </a:rPr>
               <a:t>A strong result on finding clauses</a:t>
             </a:r>
-            <a:endParaRPr lang="en-US" sz="1400" dirty="0"/>
+            <a:endParaRPr lang="en-US" sz="1600" dirty="0"/>
           </a:p>
         </p:txBody>
       </p:sp>
@@ -7905,7 +7956,7 @@
               <a:buNone/>
             </a:pPr>
             <a:r>
-              <a:rPr lang="en-US" sz="1300" dirty="0">
+              <a:rPr lang="en-US" sz="1500" dirty="0">
                 <a:solidFill>
                   <a:srgbClr val="374151"/>
                 </a:solidFill>
@@ -7915,7 +7966,7 @@
               </a:rPr>
               <a:t>AND-ensemble micro-F1 0.779 and accuracy 85.65%; TF-IDF 0.775 is a strong baseline</a:t>
             </a:r>
-            <a:endParaRPr lang="en-US" sz="1300" dirty="0"/>
+            <a:endParaRPr lang="en-US" sz="1500" dirty="0"/>
           </a:p>
         </p:txBody>
       </p:sp>
@@ -7971,7 +8022,7 @@
               <a:buNone/>
             </a:pPr>
             <a:r>
-              <a:rPr lang="en-US" sz="1400" b="1" dirty="0">
+              <a:rPr lang="en-US" sz="1600" b="1" dirty="0">
                 <a:solidFill>
                   <a:srgbClr val="141B3D"/>
                 </a:solidFill>
@@ -7981,7 +8032,7 @@
               </a:rPr>
               <a:t>Accurate clause text</a:t>
             </a:r>
-            <a:endParaRPr lang="en-US" sz="1400" dirty="0"/>
+            <a:endParaRPr lang="en-US" sz="1600" dirty="0"/>
           </a:p>
         </p:txBody>
       </p:sp>
@@ -8010,7 +8061,7 @@
               <a:buNone/>
             </a:pPr>
             <a:r>
-              <a:rPr lang="en-US" sz="1300" dirty="0">
+              <a:rPr lang="en-US" sz="1500" dirty="0">
                 <a:solidFill>
                   <a:srgbClr val="374151"/>
                 </a:solidFill>
@@ -8020,7 +8071,7 @@
               </a:rPr>
               <a:t>token-F1 0.764, with 82.8% good overlap when the window holds the clause</a:t>
             </a:r>
-            <a:endParaRPr lang="en-US" sz="1300" dirty="0"/>
+            <a:endParaRPr lang="en-US" sz="1500" dirty="0"/>
           </a:p>
         </p:txBody>
       </p:sp>
@@ -8076,7 +8127,7 @@
               <a:buNone/>
             </a:pPr>
             <a:r>
-              <a:rPr lang="en-US" sz="1400" b="1" dirty="0">
+              <a:rPr lang="en-US" sz="1600" b="1" dirty="0">
                 <a:solidFill>
                   <a:srgbClr val="141B3D"/>
                 </a:solidFill>
@@ -8086,7 +8137,7 @@
               </a:rPr>
               <a:t>A working, tested app</a:t>
             </a:r>
-            <a:endParaRPr lang="en-US" sz="1400" dirty="0"/>
+            <a:endParaRPr lang="en-US" sz="1600" dirty="0"/>
           </a:p>
         </p:txBody>
       </p:sp>
@@ -8115,7 +8166,7 @@
               <a:buNone/>
             </a:pPr>
             <a:r>
-              <a:rPr lang="en-US" sz="1300" dirty="0">
+              <a:rPr lang="en-US" sz="1500" dirty="0">
                 <a:solidFill>
                   <a:srgbClr val="374151"/>
                 </a:solidFill>
@@ -8125,7 +8176,7 @@
               </a:rPr>
               <a:t>Clausify runs locally in about 30 s per contract; 38 of 38 tests pass</a:t>
             </a:r>
-            <a:endParaRPr lang="en-US" sz="1300" dirty="0"/>
+            <a:endParaRPr lang="en-US" sz="1500" dirty="0"/>
           </a:p>
         </p:txBody>
       </p:sp>
@@ -8154,7 +8205,7 @@
               <a:buNone/>
             </a:pPr>
             <a:r>
-              <a:rPr lang="en-US" sz="1700" b="1" dirty="0">
+              <a:rPr lang="en-US" sz="1800" b="1" dirty="0">
                 <a:solidFill>
                   <a:srgbClr val="1E2761"/>
                 </a:solidFill>
@@ -8164,7 +8215,7 @@
               </a:rPr>
               <a:t>Next steps</a:t>
             </a:r>
-            <a:endParaRPr lang="en-US" sz="1700" dirty="0"/>
+            <a:endParaRPr lang="en-US" sz="1800" dirty="0"/>
           </a:p>
         </p:txBody>
       </p:sp>
@@ -8220,7 +8271,7 @@
               <a:buNone/>
             </a:pPr>
             <a:r>
-              <a:rPr lang="en-US" sz="1400" b="1" dirty="0">
+              <a:rPr lang="en-US" sz="1600" b="1" dirty="0">
                 <a:solidFill>
                   <a:srgbClr val="141B3D"/>
                 </a:solidFill>
@@ -8230,7 +8281,7 @@
               </a:rPr>
               <a:t>Lawyer review of the risk table</a:t>
             </a:r>
-            <a:endParaRPr lang="en-US" sz="1400" dirty="0"/>
+            <a:endParaRPr lang="en-US" sz="1600" dirty="0"/>
           </a:p>
         </p:txBody>
       </p:sp>
@@ -8259,7 +8310,7 @@
               <a:buNone/>
             </a:pPr>
             <a:r>
-              <a:rPr lang="en-US" sz="1300" dirty="0">
+              <a:rPr lang="en-US" sz="1500" dirty="0">
                 <a:solidFill>
                   <a:srgbClr val="374151"/>
                 </a:solidFill>
@@ -8269,7 +8320,7 @@
               </a:rPr>
               <a:t>two or three reviewers, with agreement measured by kappa</a:t>
             </a:r>
-            <a:endParaRPr lang="en-US" sz="1300" dirty="0"/>
+            <a:endParaRPr lang="en-US" sz="1500" dirty="0"/>
           </a:p>
         </p:txBody>
       </p:sp>
@@ -8325,7 +8376,7 @@
               <a:buNone/>
             </a:pPr>
             <a:r>
-              <a:rPr lang="en-US" sz="1400" b="1" dirty="0">
+              <a:rPr lang="en-US" sz="1600" b="1" dirty="0">
                 <a:solidFill>
                   <a:srgbClr val="141B3D"/>
                 </a:solidFill>
@@ -8335,7 +8386,7 @@
               </a:rPr>
               <a:t>Calibrate the confidence score</a:t>
             </a:r>
-            <a:endParaRPr lang="en-US" sz="1400" dirty="0"/>
+            <a:endParaRPr lang="en-US" sz="1600" dirty="0"/>
           </a:p>
         </p:txBody>
       </p:sp>
@@ -8364,7 +8415,7 @@
               <a:buNone/>
             </a:pPr>
             <a:r>
-              <a:rPr lang="en-US" sz="1300" dirty="0">
+              <a:rPr lang="en-US" sz="1500" dirty="0">
                 <a:solidFill>
                   <a:srgbClr val="374151"/>
                 </a:solidFill>
@@ -8374,7 +8425,7 @@
               </a:rPr>
               <a:t>fit it on a validation split so the bar reads as a probability</a:t>
             </a:r>
-            <a:endParaRPr lang="en-US" sz="1300" dirty="0"/>
+            <a:endParaRPr lang="en-US" sz="1500" dirty="0"/>
           </a:p>
         </p:txBody>
       </p:sp>
@@ -8430,7 +8481,7 @@
               <a:buNone/>
             </a:pPr>
             <a:r>
-              <a:rPr lang="en-US" sz="1400" b="1" dirty="0">
+              <a:rPr lang="en-US" sz="1600" b="1" dirty="0">
                 <a:solidFill>
                   <a:srgbClr val="141B3D"/>
                 </a:solidFill>
@@ -8440,7 +8491,7 @@
               </a:rPr>
               <a:t>A user study</a:t>
             </a:r>
-            <a:endParaRPr lang="en-US" sz="1400" dirty="0"/>
+            <a:endParaRPr lang="en-US" sz="1600" dirty="0"/>
           </a:p>
         </p:txBody>
       </p:sp>
@@ -8469,7 +8520,7 @@
               <a:buNone/>
             </a:pPr>
             <a:r>
-              <a:rPr lang="en-US" sz="1300" dirty="0">
+              <a:rPr lang="en-US" sz="1500" dirty="0">
                 <a:solidFill>
                   <a:srgbClr val="374151"/>
                 </a:solidFill>
@@ -8479,7 +8530,7 @@
               </a:rPr>
               <a:t>5 to 10 non-lawyers, measuring time and clauses found</a:t>
             </a:r>
-            <a:endParaRPr lang="en-US" sz="1300" dirty="0"/>
+            <a:endParaRPr lang="en-US" sz="1500" dirty="0"/>
           </a:p>
         </p:txBody>
       </p:sp>
@@ -8535,7 +8586,7 @@
               <a:buNone/>
             </a:pPr>
             <a:r>
-              <a:rPr lang="en-US" sz="1400" b="1" dirty="0">
+              <a:rPr lang="en-US" sz="1600" b="1" dirty="0">
                 <a:solidFill>
                   <a:srgbClr val="141B3D"/>
                 </a:solidFill>
@@ -8545,7 +8596,7 @@
               </a:rPr>
               <a:t>Explanations for each clause</a:t>
             </a:r>
-            <a:endParaRPr lang="en-US" sz="1400" dirty="0"/>
+            <a:endParaRPr lang="en-US" sz="1600" dirty="0"/>
           </a:p>
         </p:txBody>
       </p:sp>
@@ -8574,7 +8625,7 @@
               <a:buNone/>
             </a:pPr>
             <a:r>
-              <a:rPr lang="en-US" sz="1300" dirty="0">
+              <a:rPr lang="en-US" sz="1500" dirty="0">
                 <a:solidFill>
                   <a:srgbClr val="374151"/>
                 </a:solidFill>
@@ -8584,7 +8635,7 @@
               </a:rPr>
               <a:t>grow the 150-clause trial set into a few thousand targets</a:t>
             </a:r>
-            <a:endParaRPr lang="en-US" sz="1300" dirty="0"/>
+            <a:endParaRPr lang="en-US" sz="1500" dirty="0"/>
           </a:p>
         </p:txBody>
       </p:sp>
@@ -8640,7 +8691,7 @@
               <a:buNone/>
             </a:pPr>
             <a:r>
-              <a:rPr lang="en-US" sz="1400" b="1" dirty="0">
+              <a:rPr lang="en-US" sz="1600" b="1" dirty="0">
                 <a:solidFill>
                   <a:srgbClr val="141B3D"/>
                 </a:solidFill>
@@ -8650,7 +8701,7 @@
               </a:rPr>
               <a:t>Beyond CUAD</a:t>
             </a:r>
-            <a:endParaRPr lang="en-US" sz="1400" dirty="0"/>
+            <a:endParaRPr lang="en-US" sz="1600" dirty="0"/>
           </a:p>
         </p:txBody>
       </p:sp>
@@ -8679,7 +8730,7 @@
               <a:buNone/>
             </a:pPr>
             <a:r>
-              <a:rPr lang="en-US" sz="1300" dirty="0">
+              <a:rPr lang="en-US" sz="1500" dirty="0">
                 <a:solidFill>
                   <a:srgbClr val="374151"/>
                 </a:solidFill>
@@ -8689,7 +8740,7 @@
               </a:rPr>
               <a:t>larger models on a GPU, and contracts from Bangladesh</a:t>
             </a:r>
-            <a:endParaRPr lang="en-US" sz="1300" dirty="0"/>
+            <a:endParaRPr lang="en-US" sz="1500" dirty="0"/>
           </a:p>
         </p:txBody>
       </p:sp>
@@ -8770,7 +8821,7 @@
               <a:buNone/>
             </a:pPr>
             <a:r>
-              <a:rPr lang="en-US" sz="1250" b="1" dirty="0">
+              <a:rPr lang="en-US" sz="1450" b="1" dirty="0">
                 <a:solidFill>
                   <a:srgbClr val="1E2761"/>
                 </a:solidFill>
@@ -8780,7 +8831,7 @@
               </a:rPr>
               <a:t>INTRODUCTION</a:t>
             </a:r>
-            <a:endParaRPr lang="en-US" sz="1250" dirty="0"/>
+            <a:endParaRPr lang="en-US" sz="1450" dirty="0"/>
           </a:p>
         </p:txBody>
       </p:sp>
@@ -8848,7 +8899,7 @@
               <a:buNone/>
             </a:pPr>
             <a:r>
-              <a:rPr lang="en-US" sz="1600" i="1" dirty="0">
+              <a:rPr lang="en-US" sz="1700" i="1" dirty="0">
                 <a:solidFill>
                   <a:srgbClr val="6B7280"/>
                 </a:solidFill>
@@ -8858,7 +8909,7 @@
               </a:rPr>
               <a:t>Why we built a system that reads a contract for the person signing it</a:t>
             </a:r>
-            <a:endParaRPr lang="en-US" sz="1600" dirty="0"/>
+            <a:endParaRPr lang="en-US" sz="1700" dirty="0"/>
           </a:p>
         </p:txBody>
       </p:sp>
@@ -8939,7 +8990,7 @@
               <a:buNone/>
             </a:pPr>
             <a:r>
-              <a:rPr lang="en-US" sz="1550" b="1" dirty="0">
+              <a:rPr lang="en-US" sz="1650" b="1" dirty="0">
                 <a:solidFill>
                   <a:srgbClr val="141B3D"/>
                 </a:solidFill>
@@ -8949,7 +9000,7 @@
               </a:rPr>
               <a:t>Contracts are long</a:t>
             </a:r>
-            <a:endParaRPr lang="en-US" sz="1550" dirty="0"/>
+            <a:endParaRPr lang="en-US" sz="1650" dirty="0"/>
           </a:p>
         </p:txBody>
       </p:sp>
@@ -8978,7 +9029,7 @@
               <a:buNone/>
             </a:pPr>
             <a:r>
-              <a:rPr lang="en-US" sz="1350" dirty="0">
+              <a:rPr lang="en-US" sz="1550" dirty="0">
                 <a:solidFill>
                   <a:srgbClr val="374151"/>
                 </a:solidFill>
@@ -8988,7 +9039,7 @@
               </a:rPr>
               <a:t>A typical CUAD contract has about 33,000 characters (5,000 words); the longest has more than 338,000.</a:t>
             </a:r>
-            <a:endParaRPr lang="en-US" sz="1350" dirty="0"/>
+            <a:endParaRPr lang="en-US" sz="1550" dirty="0"/>
           </a:p>
         </p:txBody>
       </p:sp>
@@ -9069,7 +9120,7 @@
               <a:buNone/>
             </a:pPr>
             <a:r>
-              <a:rPr lang="en-US" sz="1550" b="1" dirty="0">
+              <a:rPr lang="en-US" sz="1650" b="1" dirty="0">
                 <a:solidFill>
                   <a:srgbClr val="141B3D"/>
                 </a:solidFill>
@@ -9079,7 +9130,7 @@
               </a:rPr>
               <a:t>Lawyers are expensive</a:t>
             </a:r>
-            <a:endParaRPr lang="en-US" sz="1550" dirty="0"/>
+            <a:endParaRPr lang="en-US" sz="1650" dirty="0"/>
           </a:p>
         </p:txBody>
       </p:sp>
@@ -9108,7 +9159,7 @@
               <a:buNone/>
             </a:pPr>
             <a:r>
-              <a:rPr lang="en-US" sz="1350" dirty="0">
+              <a:rPr lang="en-US" sz="1550" dirty="0">
                 <a:solidFill>
                   <a:srgbClr val="374151"/>
                 </a:solidFill>
@@ -9118,7 +9169,7 @@
               </a:rPr>
               <a:t>A full review takes hours and costs money that freelancers and small businesses often cannot pay, so many people sign without understanding the risks.</a:t>
             </a:r>
-            <a:endParaRPr lang="en-US" sz="1350" dirty="0"/>
+            <a:endParaRPr lang="en-US" sz="1550" dirty="0"/>
           </a:p>
         </p:txBody>
       </p:sp>
@@ -9199,7 +9250,7 @@
               <a:buNone/>
             </a:pPr>
             <a:r>
-              <a:rPr lang="en-US" sz="1550" b="1" dirty="0">
+              <a:rPr lang="en-US" sz="1650" b="1" dirty="0">
                 <a:solidFill>
                   <a:srgbClr val="141B3D"/>
                 </a:solidFill>
@@ -9209,7 +9260,7 @@
               </a:rPr>
               <a:t>CUAD only finds the text</a:t>
             </a:r>
-            <a:endParaRPr lang="en-US" sz="1550" dirty="0"/>
+            <a:endParaRPr lang="en-US" sz="1650" dirty="0"/>
           </a:p>
         </p:txBody>
       </p:sp>
@@ -9238,7 +9289,7 @@
               <a:buNone/>
             </a:pPr>
             <a:r>
-              <a:rPr lang="en-US" sz="1350" dirty="0">
+              <a:rPr lang="en-US" sz="1550" dirty="0">
                 <a:solidFill>
                   <a:srgbClr val="374151"/>
                 </a:solidFill>
@@ -9248,7 +9299,7 @@
               </a:rPr>
               <a:t>Given a category, the CUAD benchmark finds the clause. It does not say how risky the clause is or what it means in plain words.</a:t>
             </a:r>
-            <a:endParaRPr lang="en-US" sz="1350" dirty="0"/>
+            <a:endParaRPr lang="en-US" sz="1550" dirty="0"/>
           </a:p>
         </p:txBody>
       </p:sp>
@@ -9329,7 +9380,7 @@
               <a:buNone/>
             </a:pPr>
             <a:r>
-              <a:rPr lang="en-US" sz="1550" b="1" dirty="0">
+              <a:rPr lang="en-US" sz="1650" b="1" dirty="0">
                 <a:solidFill>
                   <a:srgbClr val="141B3D"/>
                 </a:solidFill>
@@ -9339,7 +9390,7 @@
               </a:rPr>
               <a:t>What we add</a:t>
             </a:r>
-            <a:endParaRPr lang="en-US" sz="1550" dirty="0"/>
+            <a:endParaRPr lang="en-US" sz="1650" dirty="0"/>
           </a:p>
         </p:txBody>
       </p:sp>
@@ -9368,7 +9419,7 @@
               <a:buNone/>
             </a:pPr>
             <a:r>
-              <a:rPr lang="en-US" sz="1350" dirty="0">
+              <a:rPr lang="en-US" sz="1550" dirty="0">
                 <a:solidFill>
                   <a:srgbClr val="374151"/>
                 </a:solidFill>
@@ -9378,7 +9429,7 @@
               </a:rPr>
               <a:t>A risk level for every clause category, a one-sentence plain-English explanation, and Clausify, an app that shows the risky clauses first.</a:t>
             </a:r>
-            <a:endParaRPr lang="en-US" sz="1350" dirty="0"/>
+            <a:endParaRPr lang="en-US" sz="1550" dirty="0"/>
           </a:p>
         </p:txBody>
       </p:sp>
@@ -9459,7 +9510,7 @@
               <a:buNone/>
             </a:pPr>
             <a:r>
-              <a:rPr lang="en-US" sz="1250" b="1" dirty="0">
+              <a:rPr lang="en-US" sz="1450" b="1" dirty="0">
                 <a:solidFill>
                   <a:srgbClr val="1E2761"/>
                 </a:solidFill>
@@ -9469,7 +9520,7 @@
               </a:rPr>
               <a:t>INTRODUCTION</a:t>
             </a:r>
-            <a:endParaRPr lang="en-US" sz="1250" dirty="0"/>
+            <a:endParaRPr lang="en-US" sz="1450" dirty="0"/>
           </a:p>
         </p:txBody>
       </p:sp>
@@ -9537,7 +9588,7 @@
               <a:buNone/>
             </a:pPr>
             <a:r>
-              <a:rPr lang="en-US" sz="1600" i="1" dirty="0">
+              <a:rPr lang="en-US" sz="1700" i="1" dirty="0">
                 <a:solidFill>
                   <a:srgbClr val="6B7280"/>
                 </a:solidFill>
@@ -9547,7 +9598,7 @@
               </a:rPr>
               <a:t>Four goals, which the rest of this talk follows</a:t>
             </a:r>
-            <a:endParaRPr lang="en-US" sz="1600" dirty="0"/>
+            <a:endParaRPr lang="en-US" sz="1700" dirty="0"/>
           </a:p>
         </p:txBody>
       </p:sp>
@@ -9628,7 +9679,7 @@
               <a:buNone/>
             </a:pPr>
             <a:r>
-              <a:rPr lang="en-US" sz="1350" b="1" dirty="0">
+              <a:rPr lang="en-US" sz="1550" b="1" dirty="0">
                 <a:solidFill>
                   <a:srgbClr val="FFFFFF"/>
                 </a:solidFill>
@@ -9638,7 +9689,7 @@
               </a:rPr>
               <a:t>1</a:t>
             </a:r>
-            <a:endParaRPr lang="en-US" sz="1350" dirty="0"/>
+            <a:endParaRPr lang="en-US" sz="1550" dirty="0"/>
           </a:p>
         </p:txBody>
       </p:sp>
@@ -9667,7 +9718,7 @@
               <a:buNone/>
             </a:pPr>
             <a:r>
-              <a:rPr lang="en-US" sz="1550" b="1" dirty="0">
+              <a:rPr lang="en-US" sz="1650" b="1" dirty="0">
                 <a:solidFill>
                   <a:srgbClr val="141B3D"/>
                 </a:solidFill>
@@ -9677,7 +9728,7 @@
               </a:rPr>
               <a:t>Find which clauses are present</a:t>
             </a:r>
-            <a:endParaRPr lang="en-US" sz="1550" dirty="0"/>
+            <a:endParaRPr lang="en-US" sz="1650" dirty="0"/>
           </a:p>
         </p:txBody>
       </p:sp>
@@ -9706,7 +9757,7 @@
               <a:buNone/>
             </a:pPr>
             <a:r>
-              <a:rPr lang="en-US" sz="1350" dirty="0">
+              <a:rPr lang="en-US" sz="1550" dirty="0">
                 <a:solidFill>
                   <a:srgbClr val="374151"/>
                 </a:solidFill>
@@ -9716,7 +9767,7 @@
               </a:rPr>
               <a:t>For each of the 41 CUAD categories, decide whether a contract has a clause of that type, and compare a transformer with a strong word-based baseline.</a:t>
             </a:r>
-            <a:endParaRPr lang="en-US" sz="1350" dirty="0"/>
+            <a:endParaRPr lang="en-US" sz="1550" dirty="0"/>
           </a:p>
         </p:txBody>
       </p:sp>
@@ -9797,7 +9848,7 @@
               <a:buNone/>
             </a:pPr>
             <a:r>
-              <a:rPr lang="en-US" sz="1350" b="1" dirty="0">
+              <a:rPr lang="en-US" sz="1550" b="1" dirty="0">
                 <a:solidFill>
                   <a:srgbClr val="FFFFFF"/>
                 </a:solidFill>
@@ -9807,7 +9858,7 @@
               </a:rPr>
               <a:t>2</a:t>
             </a:r>
-            <a:endParaRPr lang="en-US" sz="1350" dirty="0"/>
+            <a:endParaRPr lang="en-US" sz="1550" dirty="0"/>
           </a:p>
         </p:txBody>
       </p:sp>
@@ -9836,7 +9887,7 @@
               <a:buNone/>
             </a:pPr>
             <a:r>
-              <a:rPr lang="en-US" sz="1550" b="1" dirty="0">
+              <a:rPr lang="en-US" sz="1650" b="1" dirty="0">
                 <a:solidFill>
                   <a:srgbClr val="141B3D"/>
                 </a:solidFill>
@@ -9846,7 +9897,7 @@
               </a:rPr>
               <a:t>Find the exact clause text</a:t>
             </a:r>
-            <a:endParaRPr lang="en-US" sz="1550" dirty="0"/>
+            <a:endParaRPr lang="en-US" sz="1650" dirty="0"/>
           </a:p>
         </p:txBody>
       </p:sp>
@@ -9875,7 +9926,7 @@
               <a:buNone/>
             </a:pPr>
             <a:r>
-              <a:rPr lang="en-US" sz="1350" dirty="0">
+              <a:rPr lang="en-US" sz="1550" dirty="0">
                 <a:solidFill>
                   <a:srgbClr val="374151"/>
                 </a:solidFill>
@@ -9885,7 +9936,7 @@
               </a:rPr>
               <a:t>Extract the words of each clause found, treated as a question-answering task in the style of SQuAD.</a:t>
             </a:r>
-            <a:endParaRPr lang="en-US" sz="1350" dirty="0"/>
+            <a:endParaRPr lang="en-US" sz="1550" dirty="0"/>
           </a:p>
         </p:txBody>
       </p:sp>
@@ -9966,7 +10017,7 @@
               <a:buNone/>
             </a:pPr>
             <a:r>
-              <a:rPr lang="en-US" sz="1350" b="1" dirty="0">
+              <a:rPr lang="en-US" sz="1550" b="1" dirty="0">
                 <a:solidFill>
                   <a:srgbClr val="FFFFFF"/>
                 </a:solidFill>
@@ -9976,7 +10027,7 @@
               </a:rPr>
               <a:t>3</a:t>
             </a:r>
-            <a:endParaRPr lang="en-US" sz="1350" dirty="0"/>
+            <a:endParaRPr lang="en-US" sz="1550" dirty="0"/>
           </a:p>
         </p:txBody>
       </p:sp>
@@ -10005,7 +10056,7 @@
               <a:buNone/>
             </a:pPr>
             <a:r>
-              <a:rPr lang="en-US" sz="1550" b="1" dirty="0">
+              <a:rPr lang="en-US" sz="1650" b="1" dirty="0">
                 <a:solidFill>
                   <a:srgbClr val="141B3D"/>
                 </a:solidFill>
@@ -10015,7 +10066,7 @@
               </a:rPr>
               <a:t>Show the risk in plain English</a:t>
             </a:r>
-            <a:endParaRPr lang="en-US" sz="1550" dirty="0"/>
+            <a:endParaRPr lang="en-US" sz="1650" dirty="0"/>
           </a:p>
         </p:txBody>
       </p:sp>
@@ -10044,7 +10095,7 @@
               <a:buNone/>
             </a:pPr>
             <a:r>
-              <a:rPr lang="en-US" sz="1350" dirty="0">
+              <a:rPr lang="en-US" sz="1550" dirty="0">
                 <a:solidFill>
                   <a:srgbClr val="374151"/>
                 </a:solidFill>
@@ -10054,7 +10105,7 @@
               </a:rPr>
               <a:t>Give each clause found a High, Medium or Low level with a reason, and a one-sentence explanation.</a:t>
             </a:r>
-            <a:endParaRPr lang="en-US" sz="1350" dirty="0"/>
+            <a:endParaRPr lang="en-US" sz="1550" dirty="0"/>
           </a:p>
         </p:txBody>
       </p:sp>
@@ -10135,7 +10186,7 @@
               <a:buNone/>
             </a:pPr>
             <a:r>
-              <a:rPr lang="en-US" sz="1350" b="1" dirty="0">
+              <a:rPr lang="en-US" sz="1550" b="1" dirty="0">
                 <a:solidFill>
                   <a:srgbClr val="FFFFFF"/>
                 </a:solidFill>
@@ -10145,7 +10196,7 @@
               </a:rPr>
               <a:t>4</a:t>
             </a:r>
-            <a:endParaRPr lang="en-US" sz="1350" dirty="0"/>
+            <a:endParaRPr lang="en-US" sz="1550" dirty="0"/>
           </a:p>
         </p:txBody>
       </p:sp>
@@ -10174,7 +10225,7 @@
               <a:buNone/>
             </a:pPr>
             <a:r>
-              <a:rPr lang="en-US" sz="1550" b="1" dirty="0">
+              <a:rPr lang="en-US" sz="1650" b="1" dirty="0">
                 <a:solidFill>
                   <a:srgbClr val="141B3D"/>
                 </a:solidFill>
@@ -10184,7 +10235,7 @@
               </a:rPr>
               <a:t>Test fairly, then build the app</a:t>
             </a:r>
-            <a:endParaRPr lang="en-US" sz="1550" dirty="0"/>
+            <a:endParaRPr lang="en-US" sz="1650" dirty="0"/>
           </a:p>
         </p:txBody>
       </p:sp>
@@ -10213,7 +10264,7 @@
               <a:buNone/>
             </a:pPr>
             <a:r>
-              <a:rPr lang="en-US" sz="1350" dirty="0">
+              <a:rPr lang="en-US" sz="1550" dirty="0">
                 <a:solidFill>
                   <a:srgbClr val="374151"/>
                 </a:solidFill>
@@ -10223,7 +10274,7 @@
               </a:rPr>
               <a:t>Test every model on 102 contracts never seen in training, then put all the models into the Clausify web app.</a:t>
             </a:r>
-            <a:endParaRPr lang="en-US" sz="1350" dirty="0"/>
+            <a:endParaRPr lang="en-US" sz="1550" dirty="0"/>
           </a:p>
         </p:txBody>
       </p:sp>
@@ -10304,7 +10355,7 @@
               <a:buNone/>
             </a:pPr>
             <a:r>
-              <a:rPr lang="en-US" sz="1250" b="1" dirty="0">
+              <a:rPr lang="en-US" sz="1450" b="1" dirty="0">
                 <a:solidFill>
                   <a:srgbClr val="1E2761"/>
                 </a:solidFill>
@@ -10314,7 +10365,7 @@
               </a:rPr>
               <a:t>DATA</a:t>
             </a:r>
-            <a:endParaRPr lang="en-US" sz="1250" dirty="0"/>
+            <a:endParaRPr lang="en-US" sz="1450" dirty="0"/>
           </a:p>
         </p:txBody>
       </p:sp>
@@ -10382,7 +10433,7 @@
               <a:buNone/>
             </a:pPr>
             <a:r>
-              <a:rPr lang="en-US" sz="1600" i="1" dirty="0">
+              <a:rPr lang="en-US" sz="1700" i="1" dirty="0">
                 <a:solidFill>
                   <a:srgbClr val="6B7280"/>
                 </a:solidFill>
@@ -10392,7 +10443,7 @@
               </a:rPr>
               <a:t>510 real business contracts, marked by legal experts for 41 clause categories</a:t>
             </a:r>
-            <a:endParaRPr lang="en-US" sz="1600" dirty="0"/>
+            <a:endParaRPr lang="en-US" sz="1700" dirty="0"/>
           </a:p>
         </p:txBody>
       </p:sp>
@@ -10460,7 +10511,7 @@
               <a:buNone/>
             </a:pPr>
             <a:r>
-              <a:rPr lang="en-US" sz="1350" dirty="0">
+              <a:rPr lang="en-US" sz="1550" dirty="0">
                 <a:solidFill>
                   <a:srgbClr val="6B7280"/>
                 </a:solidFill>
@@ -10470,7 +10521,7 @@
               </a:rPr>
               <a:t>contracts</a:t>
             </a:r>
-            <a:endParaRPr lang="en-US" sz="1350" dirty="0"/>
+            <a:endParaRPr lang="en-US" sz="1550" dirty="0"/>
           </a:p>
         </p:txBody>
       </p:sp>
@@ -10538,7 +10589,7 @@
               <a:buNone/>
             </a:pPr>
             <a:r>
-              <a:rPr lang="en-US" sz="1350" dirty="0">
+              <a:rPr lang="en-US" sz="1550" dirty="0">
                 <a:solidFill>
                   <a:srgbClr val="6B7280"/>
                 </a:solidFill>
@@ -10548,7 +10599,7 @@
               </a:rPr>
               <a:t>clause categories</a:t>
             </a:r>
-            <a:endParaRPr lang="en-US" sz="1350" dirty="0"/>
+            <a:endParaRPr lang="en-US" sz="1550" dirty="0"/>
           </a:p>
         </p:txBody>
       </p:sp>
@@ -10616,7 +10667,7 @@
               <a:buNone/>
             </a:pPr>
             <a:r>
-              <a:rPr lang="en-US" sz="1350" dirty="0">
+              <a:rPr lang="en-US" sz="1550" dirty="0">
                 <a:solidFill>
                   <a:srgbClr val="6B7280"/>
                 </a:solidFill>
@@ -10626,7 +10677,7 @@
               </a:rPr>
               <a:t>median contract (chars)</a:t>
             </a:r>
-            <a:endParaRPr lang="en-US" sz="1350" dirty="0"/>
+            <a:endParaRPr lang="en-US" sz="1550" dirty="0"/>
           </a:p>
         </p:txBody>
       </p:sp>
@@ -10694,7 +10745,7 @@
               <a:buNone/>
             </a:pPr>
             <a:r>
-              <a:rPr lang="en-US" sz="1350" dirty="0">
+              <a:rPr lang="en-US" sz="1550" dirty="0">
                 <a:solidFill>
                   <a:srgbClr val="6B7280"/>
                 </a:solidFill>
@@ -10704,7 +10755,7 @@
               </a:rPr>
               <a:t>median clause (chars)</a:t>
             </a:r>
-            <a:endParaRPr lang="en-US" sz="1350" dirty="0"/>
+            <a:endParaRPr lang="en-US" sz="1550" dirty="0"/>
           </a:p>
         </p:txBody>
       </p:sp>
@@ -10757,7 +10808,7 @@
               <a:buNone/>
             </a:pPr>
             <a:r>
-              <a:rPr lang="en-US" sz="1200" i="1" dirty="0">
+              <a:rPr lang="en-US" sz="1400" i="1" dirty="0">
                 <a:solidFill>
                   <a:srgbClr val="6B7280"/>
                 </a:solidFill>
@@ -10767,7 +10818,7 @@
               </a:rPr>
               <a:t>Per-category positive rate, train vs test (Fig. 4.8)</a:t>
             </a:r>
-            <a:endParaRPr lang="en-US" sz="1200" dirty="0"/>
+            <a:endParaRPr lang="en-US" sz="1400" dirty="0"/>
           </a:p>
         </p:txBody>
       </p:sp>
@@ -10848,7 +10899,7 @@
               <a:buNone/>
             </a:pPr>
             <a:r>
-              <a:rPr lang="en-US" sz="1550" b="1" dirty="0">
+              <a:rPr lang="en-US" sz="1650" b="1" dirty="0">
                 <a:solidFill>
                   <a:srgbClr val="141B3D"/>
                 </a:solidFill>
@@ -10858,7 +10909,7 @@
               </a:rPr>
               <a:t>Contract-level 80/20 split</a:t>
             </a:r>
-            <a:endParaRPr lang="en-US" sz="1550" dirty="0"/>
+            <a:endParaRPr lang="en-US" sz="1650" dirty="0"/>
           </a:p>
         </p:txBody>
       </p:sp>
@@ -10887,7 +10938,7 @@
               <a:buNone/>
             </a:pPr>
             <a:r>
-              <a:rPr lang="en-US" sz="1350" dirty="0">
+              <a:rPr lang="en-US" sz="1550" dirty="0">
                 <a:solidFill>
                   <a:srgbClr val="374151"/>
                 </a:solidFill>
@@ -10897,7 +10948,7 @@
               </a:rPr>
               <a:t>408 training and 102 test contracts, seed 42, used by all three models. No clause from a training contract can reach the test set.</a:t>
             </a:r>
-            <a:endParaRPr lang="en-US" sz="1350" dirty="0"/>
+            <a:endParaRPr lang="en-US" sz="1550" dirty="0"/>
           </a:p>
         </p:txBody>
       </p:sp>
@@ -10978,7 +11029,7 @@
               <a:buNone/>
             </a:pPr>
             <a:r>
-              <a:rPr lang="en-US" sz="1550" b="1" dirty="0">
+              <a:rPr lang="en-US" sz="1650" b="1" dirty="0">
                 <a:solidFill>
                   <a:srgbClr val="141B3D"/>
                 </a:solidFill>
@@ -10988,7 +11039,7 @@
               </a:rPr>
               <a:t>Very uneven categories</a:t>
             </a:r>
-            <a:endParaRPr lang="en-US" sz="1550" dirty="0"/>
+            <a:endParaRPr lang="en-US" sz="1650" dirty="0"/>
           </a:p>
         </p:txBody>
       </p:sp>
@@ -11017,7 +11068,7 @@
               <a:buNone/>
             </a:pPr>
             <a:r>
-              <a:rPr lang="en-US" sz="1350" dirty="0">
+              <a:rPr lang="en-US" sz="1550" dirty="0">
                 <a:solidFill>
                   <a:srgbClr val="374151"/>
                 </a:solidFill>
@@ -11027,7 +11078,7 @@
               </a:rPr>
               <a:t>From 100% of contracts (Document Name) down to 2.5% (Source Code Escrow). The median category appears in 23% of contracts.</a:t>
             </a:r>
-            <a:endParaRPr lang="en-US" sz="1350" dirty="0"/>
+            <a:endParaRPr lang="en-US" sz="1550" dirty="0"/>
           </a:p>
         </p:txBody>
       </p:sp>
@@ -11108,7 +11159,7 @@
               <a:buNone/>
             </a:pPr>
             <a:r>
-              <a:rPr lang="en-US" sz="1550" b="1" dirty="0">
+              <a:rPr lang="en-US" sz="1650" b="1" dirty="0">
                 <a:solidFill>
                   <a:srgbClr val="141B3D"/>
                 </a:solidFill>
@@ -11118,7 +11169,7 @@
               </a:rPr>
               <a:t>A small, fixed dataset</a:t>
             </a:r>
-            <a:endParaRPr lang="en-US" sz="1550" dirty="0"/>
+            <a:endParaRPr lang="en-US" sz="1650" dirty="0"/>
           </a:p>
         </p:txBody>
       </p:sp>
@@ -11147,7 +11198,7 @@
               <a:buNone/>
             </a:pPr>
             <a:r>
-              <a:rPr lang="en-US" sz="1350" dirty="0">
+              <a:rPr lang="en-US" sz="1550" dirty="0">
                 <a:solidFill>
                   <a:srgbClr val="374151"/>
                 </a:solidFill>
@@ -11157,7 +11208,7 @@
               </a:rPr>
               <a:t>The experts' marking reportedly cost about $2M, so the data cannot be grown. We start from pre-trained models and guard against over-fitting.</a:t>
             </a:r>
-            <a:endParaRPr lang="en-US" sz="1350" dirty="0"/>
+            <a:endParaRPr lang="en-US" sz="1550" dirty="0"/>
           </a:p>
         </p:txBody>
       </p:sp>
@@ -11238,7 +11289,7 @@
               <a:buNone/>
             </a:pPr>
             <a:r>
-              <a:rPr lang="en-US" sz="1250" b="1" dirty="0">
+              <a:rPr lang="en-US" sz="1450" b="1" dirty="0">
                 <a:solidFill>
                   <a:srgbClr val="1E2761"/>
                 </a:solidFill>
@@ -11248,7 +11299,7 @@
               </a:rPr>
               <a:t>DATA</a:t>
             </a:r>
-            <a:endParaRPr lang="en-US" sz="1250" dirty="0"/>
+            <a:endParaRPr lang="en-US" sz="1450" dirty="0"/>
           </a:p>
         </p:txBody>
       </p:sp>
@@ -11316,7 +11367,7 @@
               <a:buNone/>
             </a:pPr>
             <a:r>
-              <a:rPr lang="en-US" sz="1600" i="1" dirty="0">
+              <a:rPr lang="en-US" sz="1700" i="1" dirty="0">
                 <a:solidFill>
                   <a:srgbClr val="6B7280"/>
                 </a:solidFill>
@@ -11326,7 +11377,7 @@
               </a:rPr>
               <a:t>From two CUAD files to examples the models can learn from</a:t>
             </a:r>
-            <a:endParaRPr lang="en-US" sz="1600" dirty="0"/>
+            <a:endParaRPr lang="en-US" sz="1700" dirty="0"/>
           </a:p>
         </p:txBody>
       </p:sp>
@@ -11407,7 +11458,7 @@
               <a:buNone/>
             </a:pPr>
             <a:r>
-              <a:rPr lang="en-US" sz="1350" b="1" dirty="0">
+              <a:rPr lang="en-US" sz="1550" b="1" dirty="0">
                 <a:solidFill>
                   <a:srgbClr val="FFFFFF"/>
                 </a:solidFill>
@@ -11417,7 +11468,7 @@
               </a:rPr>
               <a:t>1</a:t>
             </a:r>
-            <a:endParaRPr lang="en-US" sz="1350" dirty="0"/>
+            <a:endParaRPr lang="en-US" sz="1550" dirty="0"/>
           </a:p>
         </p:txBody>
       </p:sp>
@@ -11446,7 +11497,7 @@
               <a:buNone/>
             </a:pPr>
             <a:r>
-              <a:rPr lang="en-US" sz="1550" b="1" dirty="0">
+              <a:rPr lang="en-US" sz="1650" b="1" dirty="0">
                 <a:solidFill>
                   <a:srgbClr val="141B3D"/>
                 </a:solidFill>
@@ -11456,7 +11507,7 @@
               </a:rPr>
               <a:t>Clean the labels</a:t>
             </a:r>
-            <a:endParaRPr lang="en-US" sz="1550" dirty="0"/>
+            <a:endParaRPr lang="en-US" sz="1650" dirty="0"/>
           </a:p>
         </p:txBody>
       </p:sp>
@@ -11485,7 +11536,7 @@
               <a:buNone/>
             </a:pPr>
             <a:r>
-              <a:rPr lang="en-US" sz="1350" dirty="0">
+              <a:rPr lang="en-US" sz="1550" dirty="0">
                 <a:solidFill>
                   <a:srgbClr val="374151"/>
                 </a:solidFill>
@@ -11495,7 +11546,7 @@
               </a:rPr>
               <a:t>Empty cells mean the category is absent, clause lists stored as text are parsed, and blank answers are dropped. Expert values are kept as they are.</a:t>
             </a:r>
-            <a:endParaRPr lang="en-US" sz="1350" dirty="0"/>
+            <a:endParaRPr lang="en-US" sz="1550" dirty="0"/>
           </a:p>
         </p:txBody>
       </p:sp>
@@ -11576,7 +11627,7 @@
               <a:buNone/>
             </a:pPr>
             <a:r>
-              <a:rPr lang="en-US" sz="1350" b="1" dirty="0">
+              <a:rPr lang="en-US" sz="1550" b="1" dirty="0">
                 <a:solidFill>
                   <a:srgbClr val="FFFFFF"/>
                 </a:solidFill>
@@ -11586,7 +11637,7 @@
               </a:rPr>
               <a:t>2</a:t>
             </a:r>
-            <a:endParaRPr lang="en-US" sz="1350" dirty="0"/>
+            <a:endParaRPr lang="en-US" sz="1550" dirty="0"/>
           </a:p>
         </p:txBody>
       </p:sp>
@@ -11615,7 +11666,7 @@
               <a:buNone/>
             </a:pPr>
             <a:r>
-              <a:rPr lang="en-US" sz="1550" b="1" dirty="0">
+              <a:rPr lang="en-US" sz="1650" b="1" dirty="0">
                 <a:solidFill>
                   <a:srgbClr val="141B3D"/>
                 </a:solidFill>
@@ -11625,7 +11676,7 @@
               </a:rPr>
               <a:t>Fix a column-name typo</a:t>
             </a:r>
-            <a:endParaRPr lang="en-US" sz="1550" dirty="0"/>
+            <a:endParaRPr lang="en-US" sz="1650" dirty="0"/>
           </a:p>
         </p:txBody>
       </p:sp>
@@ -11654,7 +11705,7 @@
               <a:buNone/>
             </a:pPr>
             <a:r>
-              <a:rPr lang="en-US" sz="1350" dirty="0">
+              <a:rPr lang="en-US" sz="1550" dirty="0">
                 <a:solidFill>
                   <a:srgbClr val="374151"/>
                 </a:solidFill>
@@ -11664,7 +11715,7 @@
               </a:rPr>
               <a:t>One answer column has an extra space in its name, so columns are paired by position instead of by name.</a:t>
             </a:r>
-            <a:endParaRPr lang="en-US" sz="1350" dirty="0"/>
+            <a:endParaRPr lang="en-US" sz="1550" dirty="0"/>
           </a:p>
         </p:txBody>
       </p:sp>
@@ -11745,7 +11796,7 @@
               <a:buNone/>
             </a:pPr>
             <a:r>
-              <a:rPr lang="en-US" sz="1350" b="1" dirty="0">
+              <a:rPr lang="en-US" sz="1550" b="1" dirty="0">
                 <a:solidFill>
                   <a:srgbClr val="FFFFFF"/>
                 </a:solidFill>
@@ -11755,7 +11806,7 @@
               </a:rPr>
               <a:t>3</a:t>
             </a:r>
-            <a:endParaRPr lang="en-US" sz="1350" dirty="0"/>
+            <a:endParaRPr lang="en-US" sz="1550" dirty="0"/>
           </a:p>
         </p:txBody>
       </p:sp>
@@ -11784,7 +11835,7 @@
               <a:buNone/>
             </a:pPr>
             <a:r>
-              <a:rPr lang="en-US" sz="1550" b="1" dirty="0">
+              <a:rPr lang="en-US" sz="1650" b="1" dirty="0">
                 <a:solidFill>
                   <a:srgbClr val="141B3D"/>
                 </a:solidFill>
@@ -11794,7 +11845,7 @@
               </a:rPr>
               <a:t>One row per (contract, category)</a:t>
             </a:r>
-            <a:endParaRPr lang="en-US" sz="1550" dirty="0"/>
+            <a:endParaRPr lang="en-US" sz="1650" dirty="0"/>
           </a:p>
         </p:txBody>
       </p:sp>
@@ -11823,7 +11874,7 @@
               <a:buNone/>
             </a:pPr>
             <a:r>
-              <a:rPr lang="en-US" sz="1350" dirty="0">
+              <a:rPr lang="en-US" sz="1550" dirty="0">
                 <a:solidFill>
                   <a:srgbClr val="374151"/>
                 </a:solidFill>
@@ -11833,7 +11884,7 @@
               </a:rPr>
               <a:t>510 × 41 = 20,910 labelled rows, of which 32.1% are positive.</a:t>
             </a:r>
-            <a:endParaRPr lang="en-US" sz="1350" dirty="0"/>
+            <a:endParaRPr lang="en-US" sz="1550" dirty="0"/>
           </a:p>
         </p:txBody>
       </p:sp>
@@ -11914,7 +11965,7 @@
               <a:buNone/>
             </a:pPr>
             <a:r>
-              <a:rPr lang="en-US" sz="1350" b="1" dirty="0">
+              <a:rPr lang="en-US" sz="1550" b="1" dirty="0">
                 <a:solidFill>
                   <a:srgbClr val="FFFFFF"/>
                 </a:solidFill>
@@ -11924,7 +11975,7 @@
               </a:rPr>
               <a:t>4</a:t>
             </a:r>
-            <a:endParaRPr lang="en-US" sz="1350" dirty="0"/>
+            <a:endParaRPr lang="en-US" sz="1550" dirty="0"/>
           </a:p>
         </p:txBody>
       </p:sp>
@@ -11953,7 +12004,7 @@
               <a:buNone/>
             </a:pPr>
             <a:r>
-              <a:rPr lang="en-US" sz="1550" b="1" dirty="0">
+              <a:rPr lang="en-US" sz="1650" b="1" dirty="0">
                 <a:solidFill>
                   <a:srgbClr val="141B3D"/>
                 </a:solidFill>
@@ -11963,7 +12014,7 @@
               </a:rPr>
               <a:t>Cut contracts into windows</a:t>
             </a:r>
-            <a:endParaRPr lang="en-US" sz="1550" dirty="0"/>
+            <a:endParaRPr lang="en-US" sz="1650" dirty="0"/>
           </a:p>
         </p:txBody>
       </p:sp>
@@ -11992,7 +12043,7 @@
               <a:buNone/>
             </a:pPr>
             <a:r>
-              <a:rPr lang="en-US" sz="1350" dirty="0">
+              <a:rPr lang="en-US" sz="1550" dirty="0">
                 <a:solidFill>
                   <a:srgbClr val="374151"/>
                 </a:solidFill>
@@ -12002,7 +12053,7 @@
               </a:rPr>
               <a:t>2,000-character windows every 1,500 characters. The 500-character overlap is longer than the median clause, giving 53,662 training windows (39.2% positive).</a:t>
             </a:r>
-            <a:endParaRPr lang="en-US" sz="1350" dirty="0"/>
+            <a:endParaRPr lang="en-US" sz="1550" dirty="0"/>
           </a:p>
         </p:txBody>
       </p:sp>
@@ -12083,7 +12134,7 @@
               <a:buNone/>
             </a:pPr>
             <a:r>
-              <a:rPr lang="en-US" sz="1250" b="1" dirty="0">
+              <a:rPr lang="en-US" sz="1450" b="1" dirty="0">
                 <a:solidFill>
                   <a:srgbClr val="1E2761"/>
                 </a:solidFill>
@@ -12093,7 +12144,7 @@
               </a:rPr>
               <a:t>PIPELINE</a:t>
             </a:r>
-            <a:endParaRPr lang="en-US" sz="1250" dirty="0"/>
+            <a:endParaRPr lang="en-US" sz="1450" dirty="0"/>
           </a:p>
         </p:txBody>
       </p:sp>
@@ -12161,7 +12212,7 @@
               <a:buNone/>
             </a:pPr>
             <a:r>
-              <a:rPr lang="en-US" sz="1600" i="1" dirty="0">
+              <a:rPr lang="en-US" sz="1700" i="1" dirty="0">
                 <a:solidFill>
                   <a:srgbClr val="6B7280"/>
                 </a:solidFill>
@@ -12171,7 +12222,7 @@
               </a:rPr>
               <a:t>Four steps, from raw text to a risk-sorted report</a:t>
             </a:r>
-            <a:endParaRPr lang="en-US" sz="1600" dirty="0"/>
+            <a:endParaRPr lang="en-US" sz="1700" dirty="0"/>
           </a:p>
         </p:txBody>
       </p:sp>
@@ -12227,7 +12278,7 @@
               <a:buNone/>
             </a:pPr>
             <a:r>
-              <a:rPr lang="en-US" sz="1600" b="1" dirty="0">
+              <a:rPr lang="en-US" sz="1700" b="1" dirty="0">
                 <a:solidFill>
                   <a:srgbClr val="6B7280"/>
                 </a:solidFill>
@@ -12237,7 +12288,7 @@
               </a:rPr>
               <a:t>Contract</a:t>
             </a:r>
-            <a:endParaRPr lang="en-US" sz="1600" dirty="0"/>
+            <a:endParaRPr lang="en-US" sz="1700" dirty="0"/>
           </a:p>
         </p:txBody>
       </p:sp>
@@ -12266,7 +12317,7 @@
               <a:buNone/>
             </a:pPr>
             <a:r>
-              <a:rPr lang="en-US" sz="1300" dirty="0">
+              <a:rPr lang="en-US" sz="1500" dirty="0">
                 <a:solidFill>
                   <a:srgbClr val="374151"/>
                 </a:solidFill>
@@ -12276,7 +12327,7 @@
               </a:rPr>
               <a:t>pasted text, PDF or Word</a:t>
             </a:r>
-            <a:endParaRPr lang="en-US" sz="1300" dirty="0"/>
+            <a:endParaRPr lang="en-US" sz="1500" dirty="0"/>
           </a:p>
         </p:txBody>
       </p:sp>
@@ -12371,7 +12422,7 @@
               <a:buNone/>
             </a:pPr>
             <a:r>
-              <a:rPr lang="en-US" sz="1600" b="1" dirty="0">
+              <a:rPr lang="en-US" sz="1700" b="1" dirty="0">
                 <a:solidFill>
                   <a:srgbClr val="141B3D"/>
                 </a:solidFill>
@@ -12381,7 +12432,7 @@
               </a:rPr>
               <a:t>1 Presence</a:t>
             </a:r>
-            <a:endParaRPr lang="en-US" sz="1600" dirty="0"/>
+            <a:endParaRPr lang="en-US" sz="1700" dirty="0"/>
           </a:p>
         </p:txBody>
       </p:sp>
@@ -12410,7 +12461,7 @@
               <a:buNone/>
             </a:pPr>
             <a:r>
-              <a:rPr lang="en-US" sz="1300" dirty="0">
+              <a:rPr lang="en-US" sz="1500" dirty="0">
                 <a:solidFill>
                   <a:srgbClr val="374151"/>
                 </a:solidFill>
@@ -12420,7 +12471,7 @@
               </a:rPr>
               <a:t>TF-IDF + windowed DistilBERT</a:t>
             </a:r>
-            <a:endParaRPr lang="en-US" sz="1300" dirty="0"/>
+            <a:endParaRPr lang="en-US" sz="1500" dirty="0"/>
           </a:p>
         </p:txBody>
       </p:sp>
@@ -12515,7 +12566,7 @@
               <a:buNone/>
             </a:pPr>
             <a:r>
-              <a:rPr lang="en-US" sz="1600" b="1" dirty="0">
+              <a:rPr lang="en-US" sz="1700" b="1" dirty="0">
                 <a:solidFill>
                   <a:srgbClr val="141B3D"/>
                 </a:solidFill>
@@ -12525,7 +12576,7 @@
               </a:rPr>
               <a:t>2 Span</a:t>
             </a:r>
-            <a:endParaRPr lang="en-US" sz="1600" dirty="0"/>
+            <a:endParaRPr lang="en-US" sz="1700" dirty="0"/>
           </a:p>
         </p:txBody>
       </p:sp>
@@ -12554,7 +12605,7 @@
               <a:buNone/>
             </a:pPr>
             <a:r>
-              <a:rPr lang="en-US" sz="1300" dirty="0">
+              <a:rPr lang="en-US" sz="1500" dirty="0">
                 <a:solidFill>
                   <a:srgbClr val="374151"/>
                 </a:solidFill>
@@ -12564,7 +12615,7 @@
               </a:rPr>
               <a:t>DistilBERT-QA</a:t>
             </a:r>
-            <a:endParaRPr lang="en-US" sz="1300" dirty="0"/>
+            <a:endParaRPr lang="en-US" sz="1500" dirty="0"/>
           </a:p>
         </p:txBody>
       </p:sp>
@@ -12659,7 +12710,7 @@
               <a:buNone/>
             </a:pPr>
             <a:r>
-              <a:rPr lang="en-US" sz="1600" b="1" dirty="0">
+              <a:rPr lang="en-US" sz="1700" b="1" dirty="0">
                 <a:solidFill>
                   <a:srgbClr val="141B3D"/>
                 </a:solidFill>
@@ -12669,7 +12720,7 @@
               </a:rPr>
               <a:t>3 Risk</a:t>
             </a:r>
-            <a:endParaRPr lang="en-US" sz="1600" dirty="0"/>
+            <a:endParaRPr lang="en-US" sz="1700" dirty="0"/>
           </a:p>
         </p:txBody>
       </p:sp>
@@ -12698,7 +12749,7 @@
               <a:buNone/>
             </a:pPr>
             <a:r>
-              <a:rPr lang="en-US" sz="1300" dirty="0">
+              <a:rPr lang="en-US" sz="1500" dirty="0">
                 <a:solidFill>
                   <a:srgbClr val="374151"/>
                 </a:solidFill>
@@ -12708,7 +12759,7 @@
               </a:rPr>
               <a:t>41-category risk table</a:t>
             </a:r>
-            <a:endParaRPr lang="en-US" sz="1300" dirty="0"/>
+            <a:endParaRPr lang="en-US" sz="1500" dirty="0"/>
           </a:p>
         </p:txBody>
       </p:sp>
@@ -12803,7 +12854,7 @@
               <a:buNone/>
             </a:pPr>
             <a:r>
-              <a:rPr lang="en-US" sz="1600" b="1" dirty="0">
+              <a:rPr lang="en-US" sz="1700" b="1" dirty="0">
                 <a:solidFill>
                   <a:srgbClr val="141B3D"/>
                 </a:solidFill>
@@ -12813,7 +12864,7 @@
               </a:rPr>
               <a:t>4 Explanation</a:t>
             </a:r>
-            <a:endParaRPr lang="en-US" sz="1600" dirty="0"/>
+            <a:endParaRPr lang="en-US" sz="1700" dirty="0"/>
           </a:p>
         </p:txBody>
       </p:sp>
@@ -12842,7 +12893,7 @@
               <a:buNone/>
             </a:pPr>
             <a:r>
-              <a:rPr lang="en-US" sz="1300" dirty="0">
+              <a:rPr lang="en-US" sz="1500" dirty="0">
                 <a:solidFill>
                   <a:srgbClr val="374151"/>
                 </a:solidFill>
@@ -12852,7 +12903,7 @@
               </a:rPr>
               <a:t>FLAN-T5-small</a:t>
             </a:r>
-            <a:endParaRPr lang="en-US" sz="1300" dirty="0"/>
+            <a:endParaRPr lang="en-US" sz="1500" dirty="0"/>
           </a:p>
         </p:txBody>
       </p:sp>
@@ -12908,7 +12959,7 @@
               <a:buNone/>
             </a:pPr>
             <a:r>
-              <a:rPr lang="en-US" sz="1300" b="1" dirty="0">
+              <a:rPr lang="en-US" sz="1500" b="1" dirty="0">
                 <a:solidFill>
                   <a:srgbClr val="1E2761"/>
                 </a:solidFill>
@@ -12918,7 +12969,7 @@
               </a:rPr>
               <a:t>which of 41 types?</a:t>
             </a:r>
-            <a:endParaRPr lang="en-US" sz="1300" dirty="0"/>
+            <a:endParaRPr lang="en-US" sz="1500" dirty="0"/>
           </a:p>
         </p:txBody>
       </p:sp>
@@ -12974,7 +13025,7 @@
               <a:buNone/>
             </a:pPr>
             <a:r>
-              <a:rPr lang="en-US" sz="1300" b="1" dirty="0">
+              <a:rPr lang="en-US" sz="1500" b="1" dirty="0">
                 <a:solidFill>
                   <a:srgbClr val="1E2761"/>
                 </a:solidFill>
@@ -12984,7 +13035,7 @@
               </a:rPr>
               <a:t>the clause text</a:t>
             </a:r>
-            <a:endParaRPr lang="en-US" sz="1300" dirty="0"/>
+            <a:endParaRPr lang="en-US" sz="1500" dirty="0"/>
           </a:p>
         </p:txBody>
       </p:sp>
@@ -13040,7 +13091,7 @@
               <a:buNone/>
             </a:pPr>
             <a:r>
-              <a:rPr lang="en-US" sz="1300" b="1" dirty="0">
+              <a:rPr lang="en-US" sz="1500" b="1" dirty="0">
                 <a:solidFill>
                   <a:srgbClr val="1E2761"/>
                 </a:solidFill>
@@ -13050,7 +13101,7 @@
               </a:rPr>
               <a:t>High / Medium / Low</a:t>
             </a:r>
-            <a:endParaRPr lang="en-US" sz="1300" dirty="0"/>
+            <a:endParaRPr lang="en-US" sz="1500" dirty="0"/>
           </a:p>
         </p:txBody>
       </p:sp>
@@ -13106,7 +13157,7 @@
               <a:buNone/>
             </a:pPr>
             <a:r>
-              <a:rPr lang="en-US" sz="1300" b="1" dirty="0">
+              <a:rPr lang="en-US" sz="1500" b="1" dirty="0">
                 <a:solidFill>
                   <a:srgbClr val="1E2761"/>
                 </a:solidFill>
@@ -13116,7 +13167,7 @@
               </a:rPr>
               <a:t>one plain sentence</a:t>
             </a:r>
-            <a:endParaRPr lang="en-US" sz="1300" dirty="0"/>
+            <a:endParaRPr lang="en-US" sz="1500" dirty="0"/>
           </a:p>
         </p:txBody>
       </p:sp>
@@ -13195,7 +13246,7 @@
               <a:buNone/>
             </a:pPr>
             <a:r>
-              <a:rPr lang="en-US" sz="1250" dirty="0">
+              <a:rPr lang="en-US" sz="1450" dirty="0">
                 <a:solidFill>
                   <a:srgbClr val="D94F5C"/>
                 </a:solidFill>
@@ -13205,7 +13256,7 @@
               </a:rPr>
               <a:t>the clause, 196 chars</a:t>
             </a:r>
-            <a:endParaRPr lang="en-US" sz="1250" dirty="0"/>
+            <a:endParaRPr lang="en-US" sz="1450" dirty="0"/>
           </a:p>
         </p:txBody>
       </p:sp>
@@ -13261,7 +13312,7 @@
               <a:buNone/>
             </a:pPr>
             <a:r>
-              <a:rPr lang="en-US" sz="1250" dirty="0">
+              <a:rPr lang="en-US" sz="1450" dirty="0">
                 <a:solidFill>
                   <a:srgbClr val="6B7280"/>
                 </a:solidFill>
@@ -13271,7 +13322,7 @@
               </a:rPr>
               <a:t>window 1</a:t>
             </a:r>
-            <a:endParaRPr lang="en-US" sz="1250" dirty="0"/>
+            <a:endParaRPr lang="en-US" sz="1450" dirty="0"/>
           </a:p>
         </p:txBody>
       </p:sp>
@@ -13300,7 +13351,7 @@
               <a:buNone/>
             </a:pPr>
             <a:r>
-              <a:rPr lang="en-US" sz="1250" dirty="0">
+              <a:rPr lang="en-US" sz="1450" dirty="0">
                 <a:solidFill>
                   <a:srgbClr val="C3C9DC"/>
                 </a:solidFill>
@@ -13310,7 +13361,7 @@
               </a:rPr>
               <a:t>0.04</a:t>
             </a:r>
-            <a:endParaRPr lang="en-US" sz="1250" dirty="0"/>
+            <a:endParaRPr lang="en-US" sz="1450" dirty="0"/>
           </a:p>
         </p:txBody>
       </p:sp>
@@ -13366,7 +13417,7 @@
               <a:buNone/>
             </a:pPr>
             <a:r>
-              <a:rPr lang="en-US" sz="1250" dirty="0">
+              <a:rPr lang="en-US" sz="1450" dirty="0">
                 <a:solidFill>
                   <a:srgbClr val="6B7280"/>
                 </a:solidFill>
@@ -13376,7 +13427,7 @@
               </a:rPr>
               <a:t>window 2</a:t>
             </a:r>
-            <a:endParaRPr lang="en-US" sz="1250" dirty="0"/>
+            <a:endParaRPr lang="en-US" sz="1450" dirty="0"/>
           </a:p>
         </p:txBody>
       </p:sp>
@@ -13405,7 +13456,7 @@
               <a:buNone/>
             </a:pPr>
             <a:r>
-              <a:rPr lang="en-US" sz="1250" dirty="0">
+              <a:rPr lang="en-US" sz="1450" dirty="0">
                 <a:solidFill>
                   <a:srgbClr val="C3C9DC"/>
                 </a:solidFill>
@@ -13415,7 +13466,7 @@
               </a:rPr>
               <a:t>0.11</a:t>
             </a:r>
-            <a:endParaRPr lang="en-US" sz="1250" dirty="0"/>
+            <a:endParaRPr lang="en-US" sz="1450" dirty="0"/>
           </a:p>
         </p:txBody>
       </p:sp>
@@ -13471,7 +13522,7 @@
               <a:buNone/>
             </a:pPr>
             <a:r>
-              <a:rPr lang="en-US" sz="1250" dirty="0">
+              <a:rPr lang="en-US" sz="1450" dirty="0">
                 <a:solidFill>
                   <a:srgbClr val="6B7280"/>
                 </a:solidFill>
@@ -13481,7 +13532,7 @@
               </a:rPr>
               <a:t>window 3</a:t>
             </a:r>
-            <a:endParaRPr lang="en-US" sz="1250" dirty="0"/>
+            <a:endParaRPr lang="en-US" sz="1450" dirty="0"/>
           </a:p>
         </p:txBody>
       </p:sp>
@@ -13510,7 +13561,7 @@
               <a:buNone/>
             </a:pPr>
             <a:r>
-              <a:rPr lang="en-US" sz="1250" dirty="0">
+              <a:rPr lang="en-US" sz="1450" dirty="0">
                 <a:solidFill>
                   <a:srgbClr val="C3C9DC"/>
                 </a:solidFill>
@@ -13520,7 +13571,7 @@
               </a:rPr>
               <a:t>0.07</a:t>
             </a:r>
-            <a:endParaRPr lang="en-US" sz="1250" dirty="0"/>
+            <a:endParaRPr lang="en-US" sz="1450" dirty="0"/>
           </a:p>
         </p:txBody>
       </p:sp>
@@ -13576,7 +13627,7 @@
               <a:buNone/>
             </a:pPr>
             <a:r>
-              <a:rPr lang="en-US" sz="1250" dirty="0">
+              <a:rPr lang="en-US" sz="1450" dirty="0">
                 <a:solidFill>
                   <a:srgbClr val="2E7D5B"/>
                 </a:solidFill>
@@ -13586,7 +13637,7 @@
               </a:rPr>
               <a:t>window 4</a:t>
             </a:r>
-            <a:endParaRPr lang="en-US" sz="1250" dirty="0"/>
+            <a:endParaRPr lang="en-US" sz="1450" dirty="0"/>
           </a:p>
         </p:txBody>
       </p:sp>
@@ -13615,7 +13666,7 @@
               <a:buNone/>
             </a:pPr>
             <a:r>
-              <a:rPr lang="en-US" sz="1250" b="1" dirty="0">
+              <a:rPr lang="en-US" sz="1450" b="1" dirty="0">
                 <a:solidFill>
                   <a:srgbClr val="4CAF82"/>
                 </a:solidFill>
@@ -13625,7 +13676,7 @@
               </a:rPr>
               <a:t>0.91</a:t>
             </a:r>
-            <a:endParaRPr lang="en-US" sz="1250" dirty="0"/>
+            <a:endParaRPr lang="en-US" sz="1450" dirty="0"/>
           </a:p>
         </p:txBody>
       </p:sp>
@@ -13654,7 +13705,7 @@
               <a:buNone/>
             </a:pPr>
             <a:r>
-              <a:rPr lang="en-US" sz="1250" dirty="0">
+              <a:rPr lang="en-US" sz="1450" dirty="0">
                 <a:solidFill>
                   <a:srgbClr val="6B7280"/>
                 </a:solidFill>
@@ -13664,7 +13715,7 @@
               </a:rPr>
               <a:t>⋮  22 windows for a median contract, 226 for the longest</a:t>
             </a:r>
-            <a:endParaRPr lang="en-US" sz="1250" dirty="0"/>
+            <a:endParaRPr lang="en-US" sz="1450" dirty="0"/>
           </a:p>
         </p:txBody>
       </p:sp>
@@ -13720,7 +13771,7 @@
               <a:buNone/>
             </a:pPr>
             <a:r>
-              <a:rPr lang="en-US" sz="1400" b="1" dirty="0">
+              <a:rPr lang="en-US" sz="1600" b="1" dirty="0">
                 <a:solidFill>
                   <a:srgbClr val="FFFFFF"/>
                 </a:solidFill>
@@ -13730,14 +13781,14 @@
               </a:rPr>
               <a:t>max = 0.91</a:t>
             </a:r>
-            <a:endParaRPr lang="en-US" sz="1400" dirty="0"/>
+            <a:endParaRPr lang="en-US" sz="1600" dirty="0"/>
           </a:p>
           <a:p>
             <a:pPr algn="ctr" indent="0" marL="0">
               <a:buNone/>
             </a:pPr>
             <a:r>
-              <a:rPr lang="en-US" sz="1400" b="1" dirty="0">
+              <a:rPr lang="en-US" sz="1600" b="1" dirty="0">
                 <a:solidFill>
                   <a:srgbClr val="FFFFFF"/>
                 </a:solidFill>
@@ -13747,7 +13798,7 @@
               </a:rPr>
               <a:t>→ present</a:t>
             </a:r>
-            <a:endParaRPr lang="en-US" sz="1400" dirty="0"/>
+            <a:endParaRPr lang="en-US" sz="1600" dirty="0"/>
           </a:p>
         </p:txBody>
       </p:sp>
@@ -13828,7 +13879,7 @@
               <a:buNone/>
             </a:pPr>
             <a:r>
-              <a:rPr lang="en-US" sz="1550" b="1" dirty="0">
+              <a:rPr lang="en-US" sz="1650" b="1" dirty="0">
                 <a:solidFill>
                   <a:srgbClr val="141B3D"/>
                 </a:solidFill>
@@ -13838,7 +13889,7 @@
               </a:rPr>
               <a:t>Every clause is covered</a:t>
             </a:r>
-            <a:endParaRPr lang="en-US" sz="1550" dirty="0"/>
+            <a:endParaRPr lang="en-US" sz="1650" dirty="0"/>
           </a:p>
         </p:txBody>
       </p:sp>
@@ -13867,7 +13918,7 @@
               <a:buNone/>
             </a:pPr>
             <a:r>
-              <a:rPr lang="en-US" sz="1350" dirty="0">
+              <a:rPr lang="en-US" sz="1550" dirty="0">
                 <a:solidFill>
                   <a:srgbClr val="374151"/>
                 </a:solidFill>
@@ -13877,7 +13928,7 @@
               </a:rPr>
               <a:t>Windows overlap by 500 characters, more than the median clause, so no clause falls between two windows.</a:t>
             </a:r>
-            <a:endParaRPr lang="en-US" sz="1350" dirty="0"/>
+            <a:endParaRPr lang="en-US" sz="1550" dirty="0"/>
           </a:p>
         </p:txBody>
       </p:sp>
@@ -13958,7 +14009,7 @@
               <a:buNone/>
             </a:pPr>
             <a:r>
-              <a:rPr lang="en-US" sz="1550" b="1" dirty="0">
+              <a:rPr lang="en-US" sz="1650" b="1" dirty="0">
                 <a:solidFill>
                   <a:srgbClr val="141B3D"/>
                 </a:solidFill>
@@ -13968,7 +14019,7 @@
               </a:rPr>
               <a:t>Two models must agree</a:t>
             </a:r>
-            <a:endParaRPr lang="en-US" sz="1550" dirty="0"/>
+            <a:endParaRPr lang="en-US" sz="1650" dirty="0"/>
           </a:p>
         </p:txBody>
       </p:sp>
@@ -13997,7 +14048,7 @@
               <a:buNone/>
             </a:pPr>
             <a:r>
-              <a:rPr lang="en-US" sz="1350" dirty="0">
+              <a:rPr lang="en-US" sz="1550" dirty="0">
                 <a:solidFill>
                   <a:srgbClr val="374151"/>
                 </a:solidFill>
@@ -14005,9 +14056,9 @@
                 <a:ea typeface="Calibri" pitchFamily="34" charset="-122"/>
                 <a:cs typeface="Calibri" pitchFamily="34" charset="-120"/>
               </a:rPr>
-              <a:t>The AND rule reports a category only when TF-IDF and DistilBERT both score at least 0.5, which removes many false alarms.</a:t>
-            </a:r>
-            <a:endParaRPr lang="en-US" sz="1350" dirty="0"/>
+              <a:t>A category is reported only when TF-IDF and DistilBERT both score at least 0.5, which removes many false alarms.</a:t>
+            </a:r>
+            <a:endParaRPr lang="en-US" sz="1550" dirty="0"/>
           </a:p>
         </p:txBody>
       </p:sp>
@@ -14036,7 +14087,7 @@
               <a:buNone/>
             </a:pPr>
             <a:r>
-              <a:rPr lang="en-US" sz="1300" i="1" dirty="0">
+              <a:rPr lang="en-US" sz="1500" i="1" dirty="0">
                 <a:solidFill>
                   <a:srgbClr val="374151"/>
                 </a:solidFill>
@@ -14046,7 +14097,7 @@
               </a:rPr>
               <a:t>Measured before training: a “search first” design could find at most 64.0% of clauses, so we read every window instead.</a:t>
             </a:r>
-            <a:endParaRPr lang="en-US" sz="1300" dirty="0"/>
+            <a:endParaRPr lang="en-US" sz="1500" dirty="0"/>
           </a:p>
         </p:txBody>
       </p:sp>
@@ -14127,7 +14178,7 @@
               <a:buNone/>
             </a:pPr>
             <a:r>
-              <a:rPr lang="en-US" sz="1250" b="1" dirty="0">
+              <a:rPr lang="en-US" sz="1450" b="1" dirty="0">
                 <a:solidFill>
                   <a:srgbClr val="1E2761"/>
                 </a:solidFill>
@@ -14137,7 +14188,7 @@
               </a:rPr>
               <a:t>PIPELINE</a:t>
             </a:r>
-            <a:endParaRPr lang="en-US" sz="1250" dirty="0"/>
+            <a:endParaRPr lang="en-US" sz="1450" dirty="0"/>
           </a:p>
         </p:txBody>
       </p:sp>
@@ -14205,7 +14256,7 @@
               <a:buNone/>
             </a:pPr>
             <a:r>
-              <a:rPr lang="en-US" sz="1600" i="1" dirty="0">
+              <a:rPr lang="en-US" sz="1700" i="1" dirty="0">
                 <a:solidFill>
                   <a:srgbClr val="6B7280"/>
                 </a:solidFill>
@@ -14215,7 +14266,7 @@
               </a:rPr>
               <a:t>A fixed level for each of the 41 categories, judged from the weaker party's side</a:t>
             </a:r>
-            <a:endParaRPr lang="en-US" sz="1600" dirty="0"/>
+            <a:endParaRPr lang="en-US" sz="1700" dirty="0"/>
           </a:p>
         </p:txBody>
       </p:sp>
@@ -14244,7 +14295,7 @@
               <a:buNone/>
             </a:pPr>
             <a:r>
-              <a:rPr lang="en-US" sz="1200" i="1" dirty="0">
+              <a:rPr lang="en-US" sz="1400" i="1" dirty="0">
                 <a:solidFill>
                   <a:srgbClr val="6B7280"/>
                 </a:solidFill>
@@ -14254,7 +14305,7 @@
               </a:rPr>
               <a:t>Number of categories at each risk level (full table in Appendix A)</a:t>
             </a:r>
-            <a:endParaRPr lang="en-US" sz="1200" dirty="0"/>
+            <a:endParaRPr lang="en-US" sz="1400" dirty="0"/>
           </a:p>
         </p:txBody>
       </p:sp>
@@ -14335,7 +14386,7 @@
               <a:buNone/>
             </a:pPr>
             <a:r>
-              <a:rPr lang="en-US" sz="1550" b="1" dirty="0">
+              <a:rPr lang="en-US" sz="1650" b="1" dirty="0">
                 <a:solidFill>
                   <a:srgbClr val="141B3D"/>
                 </a:solidFill>
@@ -14345,7 +14396,7 @@
               </a:rPr>
               <a:t>Five questions per category</a:t>
             </a:r>
-            <a:endParaRPr lang="en-US" sz="1550" dirty="0"/>
+            <a:endParaRPr lang="en-US" sz="1650" dirty="0"/>
           </a:p>
         </p:txBody>
       </p:sp>
@@ -14374,7 +14425,7 @@
               <a:buNone/>
             </a:pPr>
             <a:r>
-              <a:rPr lang="en-US" sz="1350" dirty="0">
+              <a:rPr lang="en-US" sz="1550" dirty="0">
                 <a:solidFill>
                   <a:srgbClr val="374151"/>
                 </a:solidFill>
@@ -14384,7 +14435,7 @@
               </a:rPr>
               <a:t>Money at risk? Can it be undone? Limits on future freedom? One-sided? Does it last after the contract?</a:t>
             </a:r>
-            <a:endParaRPr lang="en-US" sz="1350" dirty="0"/>
+            <a:endParaRPr lang="en-US" sz="1550" dirty="0"/>
           </a:p>
         </p:txBody>
       </p:sp>
@@ -14465,7 +14516,7 @@
               <a:buNone/>
             </a:pPr>
             <a:r>
-              <a:rPr lang="en-US" sz="1550" b="1" dirty="0">
+              <a:rPr lang="en-US" sz="1650" b="1" dirty="0">
                 <a:solidFill>
                   <a:srgbClr val="141B3D"/>
                 </a:solidFill>
@@ -14475,7 +14526,7 @@
               </a:rPr>
               <a:t>The rule</a:t>
             </a:r>
-            <a:endParaRPr lang="en-US" sz="1550" dirty="0"/>
+            <a:endParaRPr lang="en-US" sz="1650" dirty="0"/>
           </a:p>
         </p:txBody>
       </p:sp>
@@ -14504,7 +14555,7 @@
               <a:buNone/>
             </a:pPr>
             <a:r>
-              <a:rPr lang="en-US" sz="1350" dirty="0">
+              <a:rPr lang="en-US" sz="1550" dirty="0">
                 <a:solidFill>
                   <a:srgbClr val="374151"/>
                 </a:solidFill>
@@ -14514,7 +14565,7 @@
               </a:rPr>
               <a:t>High: no money limit, cannot be undone, or limits freedom later. Low: only records a fact. Medium: the rest.</a:t>
             </a:r>
-            <a:endParaRPr lang="en-US" sz="1350" dirty="0"/>
+            <a:endParaRPr lang="en-US" sz="1550" dirty="0"/>
           </a:p>
         </p:txBody>
       </p:sp>
@@ -14595,7 +14646,7 @@
               <a:buNone/>
             </a:pPr>
             <a:r>
-              <a:rPr lang="en-US" sz="1550" b="1" dirty="0">
+              <a:rPr lang="en-US" sz="1650" b="1" dirty="0">
                 <a:solidFill>
                   <a:srgbClr val="141B3D"/>
                 </a:solidFill>
@@ -14605,7 +14656,7 @@
               </a:rPr>
               <a:t>Examples, with a one-line reason shown in the app</a:t>
             </a:r>
-            <a:endParaRPr lang="en-US" sz="1550" dirty="0"/>
+            <a:endParaRPr lang="en-US" sz="1650" dirty="0"/>
           </a:p>
         </p:txBody>
       </p:sp>
@@ -14634,7 +14685,7 @@
               <a:buNone/>
             </a:pPr>
             <a:r>
-              <a:rPr lang="en-US" sz="1350" dirty="0">
+              <a:rPr lang="en-US" sz="1550" dirty="0">
                 <a:solidFill>
                   <a:srgbClr val="374151"/>
                 </a:solidFill>
@@ -14644,7 +14695,7 @@
               </a:rPr>
               <a:t>High: Uncapped Liability, Liquidated Damages, IP Ownership Assignment, Non-Compete. Medium: Cap on Liability, Anti-Assignment, Renewal Term. Low: Parties, Agreement Date, Governing Law.</a:t>
             </a:r>
-            <a:endParaRPr lang="en-US" sz="1350" dirty="0"/>
+            <a:endParaRPr lang="en-US" sz="1550" dirty="0"/>
           </a:p>
         </p:txBody>
       </p:sp>
@@ -14673,7 +14724,7 @@
               <a:buNone/>
             </a:pPr>
             <a:r>
-              <a:rPr lang="en-US" sz="1250" i="1" dirty="0">
+              <a:rPr lang="en-US" sz="1450" i="1" dirty="0">
                 <a:solidFill>
                   <a:srgbClr val="374151"/>
                 </a:solidFill>
@@ -14683,7 +14734,7 @@
               </a:rPr>
               <a:t>The weaker party is the side with less power over the wording, usually the side that did not write the contract. A lookup table can be checked line by line and never changes between versions.</a:t>
             </a:r>
-            <a:endParaRPr lang="en-US" sz="1250" dirty="0"/>
+            <a:endParaRPr lang="en-US" sz="1450" dirty="0"/>
           </a:p>
         </p:txBody>
       </p:sp>
@@ -14782,7 +14833,7 @@
               <a:buNone/>
             </a:pPr>
             <a:r>
-              <a:rPr lang="en-US" sz="1250" b="1" dirty="0">
+              <a:rPr lang="en-US" sz="1450" b="1" dirty="0">
                 <a:solidFill>
                   <a:srgbClr val="1E2761"/>
                 </a:solidFill>
@@ -14792,7 +14843,7 @@
               </a:rPr>
               <a:t>TRAINING</a:t>
             </a:r>
-            <a:endParaRPr lang="en-US" sz="1250" dirty="0"/>
+            <a:endParaRPr lang="en-US" sz="1450" dirty="0"/>
           </a:p>
         </p:txBody>
       </p:sp>
@@ -14860,7 +14911,7 @@
               <a:buNone/>
             </a:pPr>
             <a:r>
-              <a:rPr lang="en-US" sz="1600" i="1" dirty="0">
+              <a:rPr lang="en-US" sz="1700" i="1" dirty="0">
                 <a:solidFill>
                   <a:srgbClr val="6B7280"/>
                 </a:solidFill>
@@ -14870,7 +14921,7 @@
               </a:rPr>
               <a:t>One Apple M4 laptop, standard settings, and the same 80/20 split for every model</a:t>
             </a:r>
-            <a:endParaRPr lang="en-US" sz="1600" dirty="0"/>
+            <a:endParaRPr lang="en-US" sz="1700" dirty="0"/>
           </a:p>
         </p:txBody>
       </p:sp>
@@ -14949,7 +15000,7 @@
               <a:buNone/>
             </a:pPr>
             <a:r>
-              <a:rPr lang="en-US" sz="1250" b="1" dirty="0">
+              <a:rPr lang="en-US" sz="1450" b="1" dirty="0">
                 <a:solidFill>
                   <a:srgbClr val="141B3D"/>
                 </a:solidFill>
@@ -14959,7 +15010,7 @@
               </a:rPr>
               <a:t>Presence</a:t>
             </a:r>
-            <a:endParaRPr lang="en-US" sz="1250" dirty="0"/>
+            <a:endParaRPr lang="en-US" sz="1450" dirty="0"/>
           </a:p>
         </p:txBody>
       </p:sp>
@@ -14988,7 +15039,7 @@
               <a:buNone/>
             </a:pPr>
             <a:r>
-              <a:rPr lang="en-US" sz="1250" dirty="0">
+              <a:rPr lang="en-US" sz="1450" dirty="0">
                 <a:solidFill>
                   <a:srgbClr val="374151"/>
                 </a:solidFill>
@@ -14996,9 +15047,9 @@
                 <a:ea typeface="Calibri" pitchFamily="34" charset="-122"/>
                 <a:cs typeface="Calibri" pitchFamily="34" charset="-120"/>
               </a:rPr>
-              <a:t>DistilBERT · 24,000 of 53,662 windows · LR 2e-5</a:t>
-            </a:r>
-            <a:endParaRPr lang="en-US" sz="1250" dirty="0"/>
+              <a:t>DistilBERT · 24,000 windows · LR 2e-5</a:t>
+            </a:r>
+            <a:endParaRPr lang="en-US" sz="1450" dirty="0"/>
           </a:p>
         </p:txBody>
       </p:sp>
@@ -15027,7 +15078,7 @@
               <a:buNone/>
             </a:pPr>
             <a:r>
-              <a:rPr lang="en-US" sz="1350" b="1" dirty="0">
+              <a:rPr lang="en-US" sz="1550" b="1" dirty="0">
                 <a:solidFill>
                   <a:srgbClr val="141B3D"/>
                 </a:solidFill>
@@ -15037,7 +15088,7 @@
               </a:rPr>
               <a:t>≈50 min</a:t>
             </a:r>
-            <a:endParaRPr lang="en-US" sz="1350" dirty="0"/>
+            <a:endParaRPr lang="en-US" sz="1550" dirty="0"/>
           </a:p>
         </p:txBody>
       </p:sp>
@@ -15116,7 +15167,7 @@
               <a:buNone/>
             </a:pPr>
             <a:r>
-              <a:rPr lang="en-US" sz="1250" b="1" dirty="0">
+              <a:rPr lang="en-US" sz="1450" b="1" dirty="0">
                 <a:solidFill>
                   <a:srgbClr val="141B3D"/>
                 </a:solidFill>
@@ -15126,7 +15177,7 @@
               </a:rPr>
               <a:t>Span</a:t>
             </a:r>
-            <a:endParaRPr lang="en-US" sz="1250" dirty="0"/>
+            <a:endParaRPr lang="en-US" sz="1450" dirty="0"/>
           </a:p>
         </p:txBody>
       </p:sp>
@@ -15155,7 +15206,7 @@
               <a:buNone/>
             </a:pPr>
             <a:r>
-              <a:rPr lang="en-US" sz="1250" dirty="0">
+              <a:rPr lang="en-US" sz="1450" dirty="0">
                 <a:solidFill>
                   <a:srgbClr val="374151"/>
                 </a:solidFill>
@@ -15163,9 +15214,9 @@
                 <a:ea typeface="Calibri" pitchFamily="34" charset="-122"/>
                 <a:cs typeface="Calibri" pitchFamily="34" charset="-120"/>
               </a:rPr>
-              <a:t>DistilBERT-QA · 8,000 of 11,156 · 320 tokens · LR 3e-5</a:t>
-            </a:r>
-            <a:endParaRPr lang="en-US" sz="1250" dirty="0"/>
+              <a:t>DistilBERT-QA · 8,000 examples · LR 3e-5</a:t>
+            </a:r>
+            <a:endParaRPr lang="en-US" sz="1450" dirty="0"/>
           </a:p>
         </p:txBody>
       </p:sp>
@@ -15194,7 +15245,7 @@
               <a:buNone/>
             </a:pPr>
             <a:r>
-              <a:rPr lang="en-US" sz="1350" b="1" dirty="0">
+              <a:rPr lang="en-US" sz="1550" b="1" dirty="0">
                 <a:solidFill>
                   <a:srgbClr val="141B3D"/>
                 </a:solidFill>
@@ -15204,7 +15255,7 @@
               </a:rPr>
               <a:t>≈26 min</a:t>
             </a:r>
-            <a:endParaRPr lang="en-US" sz="1350" dirty="0"/>
+            <a:endParaRPr lang="en-US" sz="1550" dirty="0"/>
           </a:p>
         </p:txBody>
       </p:sp>
@@ -15283,7 +15334,7 @@
               <a:buNone/>
             </a:pPr>
             <a:r>
-              <a:rPr lang="en-US" sz="1250" b="1" dirty="0">
+              <a:rPr lang="en-US" sz="1450" b="1" dirty="0">
                 <a:solidFill>
                   <a:srgbClr val="141B3D"/>
                 </a:solidFill>
@@ -15293,7 +15344,7 @@
               </a:rPr>
               <a:t>Explanation</a:t>
             </a:r>
-            <a:endParaRPr lang="en-US" sz="1250" dirty="0"/>
+            <a:endParaRPr lang="en-US" sz="1450" dirty="0"/>
           </a:p>
         </p:txBody>
       </p:sp>
@@ -15322,7 +15373,7 @@
               <a:buNone/>
             </a:pPr>
             <a:r>
-              <a:rPr lang="en-US" sz="1250" dirty="0">
+              <a:rPr lang="en-US" sz="1450" dirty="0">
                 <a:solidFill>
                   <a:srgbClr val="374151"/>
                 </a:solidFill>
@@ -15330,9 +15381,9 @@
                 <a:ea typeface="Calibri" pitchFamily="34" charset="-122"/>
                 <a:cs typeface="Calibri" pitchFamily="34" charset="-120"/>
               </a:rPr>
-              <a:t>FLAN-T5-small · 4,000 of 11,156 · CPU · LR 3e-4</a:t>
-            </a:r>
-            <a:endParaRPr lang="en-US" sz="1250" dirty="0"/>
+              <a:t>FLAN-T5-small · 4,000 pairs · CPU · LR 3e-4</a:t>
+            </a:r>
+            <a:endParaRPr lang="en-US" sz="1450" dirty="0"/>
           </a:p>
         </p:txBody>
       </p:sp>
@@ -15361,7 +15412,7 @@
               <a:buNone/>
             </a:pPr>
             <a:r>
-              <a:rPr lang="en-US" sz="1350" b="1" dirty="0">
+              <a:rPr lang="en-US" sz="1550" b="1" dirty="0">
                 <a:solidFill>
                   <a:srgbClr val="141B3D"/>
                 </a:solidFill>
@@ -15371,7 +15422,7 @@
               </a:rPr>
               <a:t>≈13 min</a:t>
             </a:r>
-            <a:endParaRPr lang="en-US" sz="1350" dirty="0"/>
+            <a:endParaRPr lang="en-US" sz="1550" dirty="0"/>
           </a:p>
         </p:txBody>
       </p:sp>
@@ -15424,7 +15475,7 @@
               <a:buNone/>
             </a:pPr>
             <a:r>
-              <a:rPr lang="en-US" sz="1200" i="1" dirty="0">
+              <a:rPr lang="en-US" sz="1400" i="1" dirty="0">
                 <a:solidFill>
                   <a:srgbClr val="6B7280"/>
                 </a:solidFill>
@@ -15434,7 +15485,7 @@
               </a:rPr>
               <a:t>Learning rate: linear decay, no warm-up, clipping at 1.0 (Fig. 4.9)</a:t>
             </a:r>
-            <a:endParaRPr lang="en-US" sz="1200" dirty="0"/>
+            <a:endParaRPr lang="en-US" sz="1400" dirty="0"/>
           </a:p>
         </p:txBody>
       </p:sp>
@@ -15463,7 +15514,7 @@
               <a:buNone/>
             </a:pPr>
             <a:r>
-              <a:rPr lang="en-US" sz="1300" i="1" dirty="0">
+              <a:rPr lang="en-US" sz="1500" i="1" dirty="0">
                 <a:solidFill>
                   <a:srgbClr val="374151"/>
                 </a:solidFill>
@@ -15473,7 +15524,7 @@
               </a:rPr>
               <a:t>Apple M4, 16 GB, Metal (MPS), no CUDA, two epochs each. Re-training in October 2026 reproduced the August scores to within 0.003.</a:t>
             </a:r>
-            <a:endParaRPr lang="en-US" sz="1300" dirty="0"/>
+            <a:endParaRPr lang="en-US" sz="1500" dirty="0"/>
           </a:p>
         </p:txBody>
       </p:sp>
@@ -15554,7 +15605,7 @@
               <a:buNone/>
             </a:pPr>
             <a:r>
-              <a:rPr lang="en-US" sz="1550" b="1" dirty="0">
+              <a:rPr lang="en-US" sz="1650" b="1" dirty="0">
                 <a:solidFill>
                   <a:srgbClr val="141B3D"/>
                 </a:solidFill>
@@ -15564,7 +15615,7 @@
               </a:rPr>
               <a:t>Baseline first</a:t>
             </a:r>
-            <a:endParaRPr lang="en-US" sz="1550" dirty="0"/>
+            <a:endParaRPr lang="en-US" sz="1650" dirty="0"/>
           </a:p>
         </p:txBody>
       </p:sp>
@@ -15593,7 +15644,7 @@
               <a:buNone/>
             </a:pPr>
             <a:r>
-              <a:rPr lang="en-US" sz="1350" dirty="0">
+              <a:rPr lang="en-US" sz="1550" dirty="0">
                 <a:solidFill>
                   <a:srgbClr val="374151"/>
                 </a:solidFill>
@@ -15603,7 +15654,7 @@
               </a:rPr>
               <a:t>TF-IDF (20,000 word and word-pair features) with one logistic-regression model per category. Trains in under a minute; micro-F1 0.775.</a:t>
             </a:r>
-            <a:endParaRPr lang="en-US" sz="1350" dirty="0"/>
+            <a:endParaRPr lang="en-US" sz="1550" dirty="0"/>
           </a:p>
         </p:txBody>
       </p:sp>
@@ -15684,7 +15735,7 @@
               <a:buNone/>
             </a:pPr>
             <a:r>
-              <a:rPr lang="en-US" sz="1550" b="1" dirty="0">
+              <a:rPr lang="en-US" sz="1650" b="1" dirty="0">
                 <a:solidFill>
                   <a:srgbClr val="141B3D"/>
                 </a:solidFill>
@@ -15694,7 +15745,7 @@
               </a:rPr>
               <a:t>Healthy training</a:t>
             </a:r>
-            <a:endParaRPr lang="en-US" sz="1550" dirty="0"/>
+            <a:endParaRPr lang="en-US" sz="1650" dirty="0"/>
           </a:p>
         </p:txBody>
       </p:sp>
@@ -15723,7 +15774,7 @@
               <a:buNone/>
             </a:pPr>
             <a:r>
-              <a:rPr lang="en-US" sz="1350" dirty="0">
+              <a:rPr lang="en-US" sz="1550" dirty="0">
                 <a:solidFill>
                   <a:srgbClr val="374151"/>
                 </a:solidFill>
@@ -15733,7 +15784,7 @@
               </a:rPr>
               <a:t>Presence loss fell from 0.57 to 0.26 and validation loss from 0.275 to 0.254, close to it, so no over-fitting. Summarizer loss 1.17 to 0.08.</a:t>
             </a:r>
-            <a:endParaRPr lang="en-US" sz="1350" dirty="0"/>
+            <a:endParaRPr lang="en-US" sz="1550" dirty="0"/>
           </a:p>
         </p:txBody>
       </p:sp>
@@ -15814,7 +15865,7 @@
               <a:buNone/>
             </a:pPr>
             <a:r>
-              <a:rPr lang="en-US" sz="1550" b="1" dirty="0">
+              <a:rPr lang="en-US" sz="1650" b="1" dirty="0">
                 <a:solidFill>
                   <a:srgbClr val="141B3D"/>
                 </a:solidFill>
@@ -15824,7 +15875,7 @@
               </a:rPr>
               <a:t>Nothing tuned on the test set</a:t>
             </a:r>
-            <a:endParaRPr lang="en-US" sz="1550" dirty="0"/>
+            <a:endParaRPr lang="en-US" sz="1650" dirty="0"/>
           </a:p>
         </p:txBody>
       </p:sp>
@@ -15853,7 +15904,7 @@
               <a:buNone/>
             </a:pPr>
             <a:r>
-              <a:rPr lang="en-US" sz="1350" dirty="0">
+              <a:rPr lang="en-US" sz="1550" dirty="0">
                 <a:solidFill>
                   <a:srgbClr val="374151"/>
                 </a:solidFill>
@@ -15863,7 +15914,7 @@
               </a:rPr>
               <a:t>Every setting is a standard default or fixed by reasoning before training. Presence kept 5% of its training windows for validation; the test set never chose anything.</a:t>
             </a:r>
-            <a:endParaRPr lang="en-US" sz="1350" dirty="0"/>
+            <a:endParaRPr lang="en-US" sz="1550" dirty="0"/>
           </a:p>
         </p:txBody>
       </p:sp>
@@ -15944,7 +15995,7 @@
               <a:buNone/>
             </a:pPr>
             <a:r>
-              <a:rPr lang="en-US" sz="1250" b="1" dirty="0">
+              <a:rPr lang="en-US" sz="1450" b="1" dirty="0">
                 <a:solidFill>
                   <a:srgbClr val="FFFFFF"/>
                 </a:solidFill>
@@ -15954,7 +16005,7 @@
               </a:rPr>
               <a:t>PROBLEMS</a:t>
             </a:r>
-            <a:endParaRPr lang="en-US" sz="1250" dirty="0"/>
+            <a:endParaRPr lang="en-US" sz="1450" dirty="0"/>
           </a:p>
         </p:txBody>
       </p:sp>
@@ -16022,7 +16073,7 @@
               <a:buNone/>
             </a:pPr>
             <a:r>
-              <a:rPr lang="en-US" sz="1600" i="1" dirty="0">
+              <a:rPr lang="en-US" sz="1700" i="1" dirty="0">
                 <a:solidFill>
                   <a:srgbClr val="6B7280"/>
                 </a:solidFill>
@@ -16032,7 +16083,7 @@
               </a:rPr>
               <a:t>Each one had a measured cause and a fix</a:t>
             </a:r>
-            <a:endParaRPr lang="en-US" sz="1600" dirty="0"/>
+            <a:endParaRPr lang="en-US" sz="1700" dirty="0"/>
           </a:p>
         </p:txBody>
       </p:sp>
@@ -16113,7 +16164,7 @@
               <a:buNone/>
             </a:pPr>
             <a:r>
-              <a:rPr lang="en-US" sz="1550" b="1" dirty="0">
+              <a:rPr lang="en-US" sz="1650" b="1" dirty="0">
                 <a:solidFill>
                   <a:srgbClr val="141B3D"/>
                 </a:solidFill>
@@ -16123,7 +16174,7 @@
               </a:rPr>
               <a:t>Contracts are 16× too long for a transformer</a:t>
             </a:r>
-            <a:endParaRPr lang="en-US" sz="1550" dirty="0"/>
+            <a:endParaRPr lang="en-US" sz="1650" dirty="0"/>
           </a:p>
         </p:txBody>
       </p:sp>
@@ -16152,7 +16203,7 @@
               <a:buNone/>
             </a:pPr>
             <a:r>
-              <a:rPr lang="en-US" sz="1350" dirty="0">
+              <a:rPr lang="en-US" sz="1550" dirty="0">
                 <a:solidFill>
                   <a:srgbClr val="374151"/>
                 </a:solidFill>
@@ -16162,7 +16213,7 @@
               </a:rPr>
               <a:t>Read every overlapping window and keep the highest score. A “search first” design was measured first and rejected: it could reach only 64% of clauses.</a:t>
             </a:r>
-            <a:endParaRPr lang="en-US" sz="1350" dirty="0"/>
+            <a:endParaRPr lang="en-US" sz="1550" dirty="0"/>
           </a:p>
         </p:txBody>
       </p:sp>
@@ -16243,7 +16294,7 @@
               <a:buNone/>
             </a:pPr>
             <a:r>
-              <a:rPr lang="en-US" sz="1550" b="1" dirty="0">
+              <a:rPr lang="en-US" sz="1650" b="1" dirty="0">
                 <a:solidFill>
                   <a:srgbClr val="141B3D"/>
                 </a:solidFill>
@@ -16253,7 +16304,7 @@
               </a:rPr>
               <a:t>DeBERTa-v3 broke on the Apple GPU</a:t>
             </a:r>
-            <a:endParaRPr lang="en-US" sz="1550" dirty="0"/>
+            <a:endParaRPr lang="en-US" sz="1650" dirty="0"/>
           </a:p>
         </p:txBody>
       </p:sp>
@@ -16282,7 +16333,7 @@
               <a:buNone/>
             </a:pPr>
             <a:r>
-              <a:rPr lang="en-US" sz="1350" dirty="0">
+              <a:rPr lang="en-US" sz="1550" dirty="0">
                 <a:solidFill>
                   <a:srgbClr val="374151"/>
                 </a:solidFill>
@@ -16292,7 +16343,7 @@
               </a:rPr>
               <a:t>It produced NaN gradients on MPS and took about 89 s per step on the CPU. We switched to DistilBERT; the method stayed the same.</a:t>
             </a:r>
-            <a:endParaRPr lang="en-US" sz="1350" dirty="0"/>
+            <a:endParaRPr lang="en-US" sz="1550" dirty="0"/>
           </a:p>
         </p:txBody>
       </p:sp>
@@ -16373,7 +16424,7 @@
               <a:buNone/>
             </a:pPr>
             <a:r>
-              <a:rPr lang="en-US" sz="1550" b="1" dirty="0">
+              <a:rPr lang="en-US" sz="1650" b="1" dirty="0">
                 <a:solidFill>
                   <a:srgbClr val="141B3D"/>
                 </a:solidFill>
@@ -16383,7 +16434,7 @@
               </a:rPr>
               <a:t>GPU memory was not freed between runs</a:t>
             </a:r>
-            <a:endParaRPr lang="en-US" sz="1550" dirty="0"/>
+            <a:endParaRPr lang="en-US" sz="1650" dirty="0"/>
           </a:p>
         </p:txBody>
       </p:sp>
@@ -16412,7 +16463,7 @@
               <a:buNone/>
             </a:pPr>
             <a:r>
-              <a:rPr lang="en-US" sz="1350" dirty="0">
+              <a:rPr lang="en-US" sz="1550" dirty="0">
                 <a:solidFill>
                   <a:srgbClr val="374151"/>
                 </a:solidFill>
@@ -16422,7 +16473,7 @@
               </a:rPr>
               <a:t>We trained one model per program run and moved the small summarizer to the CPU.</a:t>
             </a:r>
-            <a:endParaRPr lang="en-US" sz="1350" dirty="0"/>
+            <a:endParaRPr lang="en-US" sz="1550" dirty="0"/>
           </a:p>
         </p:txBody>
       </p:sp>
@@ -16503,7 +16554,7 @@
               <a:buNone/>
             </a:pPr>
             <a:r>
-              <a:rPr lang="en-US" sz="1550" b="1" dirty="0">
+              <a:rPr lang="en-US" sz="1650" b="1" dirty="0">
                 <a:solidFill>
                   <a:srgbClr val="141B3D"/>
                 </a:solidFill>
@@ -16513,7 +16564,7 @@
               </a:rPr>
               <a:t>CUAD has no plain-English answers</a:t>
             </a:r>
-            <a:endParaRPr lang="en-US" sz="1550" dirty="0"/>
+            <a:endParaRPr lang="en-US" sz="1650" dirty="0"/>
           </a:p>
         </p:txBody>
       </p:sp>
@@ -16542,7 +16593,7 @@
               <a:buNone/>
             </a:pPr>
             <a:r>
-              <a:rPr lang="en-US" sz="1350" dirty="0">
+              <a:rPr lang="en-US" sz="1550" dirty="0">
                 <a:solidFill>
                   <a:srgbClr val="374151"/>
                 </a:solidFill>
@@ -16552,7 +16603,7 @@
               </a:rPr>
               <a:t>We wrote 41 one-sentence explanations, one per category, from the weaker party's side, and fine-tuned FLAN-T5 on them.</a:t>
             </a:r>
-            <a:endParaRPr lang="en-US" sz="1350" dirty="0"/>
+            <a:endParaRPr lang="en-US" sz="1550" dirty="0"/>
           </a:p>
         </p:txBody>
       </p:sp>

--- a/P25301051-p3-presentation-15-slides.pptx
+++ b/P25301051-p3-presentation-15-slides.pptx
@@ -469,19 +469,19 @@
               <c:strCache>
                 <c:ptCount val="5"/>
                 <c:pt idx="0">
-                  <c:v>Ensemble OR</c:v>
+                  <c:v>Either one (OR)</c:v>
                 </c:pt>
                 <c:pt idx="1">
                   <c:v>Transformer alone</c:v>
                 </c:pt>
                 <c:pt idx="2">
-                  <c:v>Ensemble AVG</c:v>
+                  <c:v>Average of both</c:v>
                 </c:pt>
                 <c:pt idx="3">
-                  <c:v>TF-IDF baseline</c:v>
+                  <c:v>Word model (TF-IDF)</c:v>
                 </c:pt>
                 <c:pt idx="4">
-                  <c:v>AND ensemble</c:v>
+                  <c:v>Both agree (AND)</c:v>
                 </c:pt>
               </c:strCache>
             </c:strRef>
@@ -539,19 +539,19 @@
               <c:strCache>
                 <c:ptCount val="5"/>
                 <c:pt idx="0">
-                  <c:v>Ensemble OR</c:v>
+                  <c:v>Either one (OR)</c:v>
                 </c:pt>
                 <c:pt idx="1">
                   <c:v>Transformer alone</c:v>
                 </c:pt>
                 <c:pt idx="2">
-                  <c:v>Ensemble AVG</c:v>
+                  <c:v>Average of both</c:v>
                 </c:pt>
                 <c:pt idx="3">
-                  <c:v>TF-IDF baseline</c:v>
+                  <c:v>Word model (TF-IDF)</c:v>
                 </c:pt>
                 <c:pt idx="4">
-                  <c:v>AND ensemble</c:v>
+                  <c:v>Both agree (AND)</c:v>
                 </c:pt>
               </c:strCache>
             </c:strRef>
@@ -609,19 +609,19 @@
               <c:strCache>
                 <c:ptCount val="5"/>
                 <c:pt idx="0">
-                  <c:v>Ensemble OR</c:v>
+                  <c:v>Either one (OR)</c:v>
                 </c:pt>
                 <c:pt idx="1">
                   <c:v>Transformer alone</c:v>
                 </c:pt>
                 <c:pt idx="2">
-                  <c:v>Ensemble AVG</c:v>
+                  <c:v>Average of both</c:v>
                 </c:pt>
                 <c:pt idx="3">
-                  <c:v>TF-IDF baseline</c:v>
+                  <c:v>Word model (TF-IDF)</c:v>
                 </c:pt>
                 <c:pt idx="4">
-                  <c:v>AND ensemble</c:v>
+                  <c:v>Both agree (AND)</c:v>
                 </c:pt>
               </c:strCache>
             </c:strRef>
@@ -1175,7 +1175,7 @@
           <a:lstStyle/>
           <a:p>
             <a:r>
-              <a:t>Our project builds a system that reads a contract for the person signing it: it finds which of CUAD's 41 clause types are present, shows the clause text, gives each one a High, Medium or Low risk level with a plain-English line, and runs in an app called Clausify. We cover the data, the pipeline, training, the problems we solved, how we tested, and the results.</a:t>
+              <a:t>Good morning. Our project is a tool that reads a contract for the person signing it. It finds which of 41 types of clause are in the contract, shows the clause, gives it a High, Medium or Low risk level, and explains it in one simple sentence. It runs in an app called Clausify. We will cover the data, how the system works, training, the problems we solved, how we tested it, and the results.</a:t>
             </a:r>
           </a:p>
         </p:txBody>
@@ -1261,7 +1261,7 @@
           <a:lstStyle/>
           <a:p>
             <a:r>
-              <a:t>Example: for an anti-assignment clause the app shows 'You cannot transfer this contract to someone else without permission.' Exact match is 35.5%, lower than overlap, because the exact start and end of a legal clause are often debatable.</a:t>
+              <a:t>For example, for a clause that blocks transferring the contract, the app shows: 'You cannot transfer this contract to someone else without permission.' The model picks the right sentence 70% of the time.</a:t>
             </a:r>
           </a:p>
         </p:txBody>
@@ -1347,7 +1347,7 @@
           <a:lstStyle/>
           <a:p>
             <a:r>
-              <a:t>We resample whole contracts, not single decisions, because the 41 decisions from one contract move together. Nothing was tuned on the test set, and the test notebook only loads saved models.</a:t>
+              <a:t>We kept 102 contracts completely aside for testing. To see how sure each score is, we re-ran the test 10,000 times on random mixes of these contracts. Nothing was chosen by looking at the test results.</a:t>
             </a:r>
           </a:p>
         </p:txBody>
@@ -1433,7 +1433,7 @@
           <a:lstStyle/>
           <a:p>
             <a:r>
-              <a:t>We delivered a complete, tested system and a working app. The next steps make it more trustworthy: a lawyer review of the risk table, a calibrated confidence score, a user study, explanations written for each clause, and contracts from outside CUAD.</a:t>
+              <a:t>We built a complete system that works on contracts it has never seen, and a working app. Next, we want a lawyer to check the risk table, make the confidence bar match real chances, test the app with real users, write explanations for each clause, and try contracts from outside CUAD, such as from Bangladesh.</a:t>
             </a:r>
           </a:p>
         </p:txBody>
@@ -1519,7 +1519,7 @@
           <a:lstStyle/>
           <a:p>
             <a:r>
-              <a:t>CUAD contracts are long: about 33,000 characters for a typical one. The parts that matter, such as unlimited liability, IP assignment or a non-compete, are short and easy to miss. Lawyers are expensive, so many people sign without help. CUAD only finds clause text; we add a risk level, a plain-English line and an app.</a:t>
+              <a:t>Contracts are long, but the clauses that can hurt you, like unlimited liability or a non-compete, are short and easy to miss. A lawyer is expensive, so many people sign without help. CUAD can find clauses, but it does not say how risky they are. We add the risk level, a simple explanation and an app.</a:t>
             </a:r>
           </a:p>
         </p:txBody>
@@ -1605,7 +1605,7 @@
           <a:lstStyle/>
           <a:p>
             <a:r>
-              <a:t>These were practical problems with clear fixes. The window design came from a measurement, not a guess: a search-first design could never reach more than 64% of clauses, below what the simple baseline already finds.</a:t>
+              <a:t>These were practical problems, and each one had a clear fix. Before choosing windows we also checked a 'search first' design; it could reach at most 64% of clauses, so we did not use it.</a:t>
             </a:r>
           </a:p>
         </p:txBody>
@@ -1691,7 +1691,7 @@
           <a:lstStyle/>
           <a:p>
             <a:r>
-              <a:t>Clausify runs all the trained models on a pasted or uploaded contract. By default it uses DistilBERT alone, which finds 84% of High-risk clauses (recall 0.841); the AND-ensemble is available as a setting. The notice on screen says it is not legal advice and that scores are model scores.</a:t>
+              <a:t>Clausify runs all our models on any contract you paste or upload. It shows the risky clauses first, with a reason and a simple explanation. It says clearly on screen that it is not legal advice.</a:t>
             </a:r>
           </a:p>
         </p:txBody>
@@ -1777,7 +1777,7 @@
           <a:lstStyle/>
           <a:p>
             <a:r>
-              <a:t>Our four objectives map onto the four steps of the system: presence, clause text, risk with plain English, and a fair test followed by the app.</a:t>
+              <a:t>We had four goals: find which clauses are present, find their exact words, show the risk in simple English, and test everything fairly before building the app.</a:t>
             </a:r>
           </a:p>
         </p:txBody>
@@ -1863,7 +1863,7 @@
           <a:lstStyle/>
           <a:p>
             <a:r>
-              <a:t>Cleaning was about format, not wrong values: empty cells, lists stored as text, and one column name with an extra space. We then built one row per contract and category, and cut each contract into overlapping windows for the transformer.</a:t>
+              <a:t>The data was already checked by experts, so cleaning was about format: empty cells, lists stored as text, and one column name with an extra space. Then we cut each contract into overlapping windows that the model can read.</a:t>
             </a:r>
           </a:p>
         </p:txBody>
@@ -1949,7 +1949,7 @@
           <a:lstStyle/>
           <a:p>
             <a:r>
-              <a:t>CUAD has 510 contracts and 41 categories. We split by whole contract, 408 for training and 102 for testing, so no clause from a training contract can leak into the test. The chart shows train and test have almost the same share of each category (32.0% vs 32.2% positive overall).</a:t>
+              <a:t>CUAD has 510 contracts and 41 clause types. We split by whole contract: 408 for training and 102 for testing. The chart shows that training and test look almost the same (32.0% and 32.2% of clauses present).</a:t>
             </a:r>
           </a:p>
         </p:txBody>
@@ -2035,7 +2035,7 @@
           <a:lstStyle/>
           <a:p>
             <a:r>
-              <a:t>The presence step reads every window and takes the highest window score for the whole contract; this is multiple-instance learning. A word-based TF-IDF model reads the whole contract, and the AND rule needs both to agree. Then the span model finds the text, the risk table adds the level, and FLAN-T5 adds a plain sentence.</a:t>
+              <a:t>The model reads every window and keeps the highest score for the whole contract. A simple word model reads the whole contract too, and a clause is reported only when both agree. Then the text model finds the words, the risk table adds the level, and FLAN-T5 adds one simple sentence.</a:t>
             </a:r>
           </a:p>
         </p:txBody>
@@ -2121,7 +2121,7 @@
           <a:lstStyle/>
           <a:p>
             <a:r>
-              <a:t>All three models were trained only on the 408 training contracts, with standard fine-tuning settings. We trained the simple TF-IDF baseline first so every neural model had a fair score to beat.</a:t>
+              <a:t>All three models learned only from the 408 training contracts. We built the simple word-count model first, so the AI models had a fair score to beat.</a:t>
             </a:r>
           </a:p>
         </p:txBody>
@@ -2207,7 +2207,7 @@
           <a:lstStyle/>
           <a:p>
             <a:r>
-              <a:t>The AND-ensemble has the highest micro-F1, 0.779, with balanced precision and recall. Statistically it ties with the TF-IDF baseline (bootstrap interval -0.0037 to +0.0115). The clear result is that the simple whole-document model beats the window transformer by 0.082, and that gap survived every check.</a:t>
+              <a:t>When both models must agree, the F1 score is 0.779, the best of all. The simple word model is very close at 0.775, so we call these two a tie. The clear result is that the simple word model beats the transformer alone, and this held in every check.</a:t>
             </a:r>
           </a:p>
         </p:txBody>
@@ -2293,7 +2293,7 @@
           <a:lstStyle/>
           <a:p>
             <a:r>
-              <a:t>Risk is set per category with five written questions, so anyone can check or challenge a level. Eight categories are High, 22 Medium and 11 Low. A lawyer has not reviewed the table yet; that is our first next step.</a:t>
+              <a:t>Each clause type gets one risk level, decided by five simple questions. 8 types are High, 22 are Medium and 11 are Low. A lawyer has not checked the table yet; that is our first next step.</a:t>
             </a:r>
           </a:p>
         </p:txBody>
@@ -2379,7 +2379,7 @@
           <a:lstStyle/>
           <a:p>
             <a:r>
-              <a:t>Each app problem was found by testing with real inputs. The clause-mode numbers come from 721 test-split clauses; the app shows them under every clause-mode result. 38 automated checks now cover these cases.</a:t>
+              <a:t>We found each of these by testing the app with real inputs, then fixed it and tested again. 38 automatic tests now check these cases every time.</a:t>
             </a:r>
           </a:p>
         </p:txBody>
@@ -3336,7 +3336,7 @@
                 <a:ea typeface="Calibri" pitchFamily="34" charset="-122"/>
                 <a:cs typeface="Calibri" pitchFamily="34" charset="-120"/>
               </a:rPr>
-              <a:t>Found by testing the app on real inputs, then fixed and re-tested</a:t>
+              <a:t>Found by testing the app, then fixed and tested again</a:t>
             </a:r>
             <a:endParaRPr lang="en-US" sz="1700" dirty="0"/>
           </a:p>
@@ -3427,7 +3427,7 @@
                 <a:ea typeface="Calibri" pitchFamily="34" charset="-122"/>
                 <a:cs typeface="Calibri" pitchFamily="34" charset="-120"/>
               </a:rPr>
-              <a:t>A list of 6 clauses gave 14 cards</a:t>
+              <a:t>6 clauses gave 14 cards</a:t>
             </a:r>
             <a:endParaRPr lang="en-US" sz="1650" dirty="0"/>
           </a:p>
@@ -3466,7 +3466,7 @@
                 <a:ea typeface="Calibri" pitchFamily="34" charset="-122"/>
                 <a:cs typeface="Calibri" pitchFamily="34" charset="-120"/>
               </a:rPr>
-              <a:t>We added a clause mode in which each paragraph gets exactly one category and one card. A contract with 18 numbered clauses now gives 18 cards.</a:t>
+              <a:t>We added a clause mode: each paragraph gets one clause type and one card. Now 18 numbered clauses give 18 cards.</a:t>
             </a:r>
             <a:endParaRPr lang="en-US" sz="1550" dirty="0"/>
           </a:p>
@@ -3557,7 +3557,7 @@
                 <a:ea typeface="Calibri" pitchFamily="34" charset="-122"/>
                 <a:cs typeface="Calibri" pitchFamily="34" charset="-120"/>
               </a:rPr>
-              <a:t>Scores were not comparable across categories</a:t>
+              <a:t>Scores could not be compared</a:t>
             </a:r>
             <a:endParaRPr lang="en-US" sz="1650" dirty="0"/>
           </a:p>
@@ -3596,7 +3596,7 @@
                 <a:ea typeface="Calibri" pitchFamily="34" charset="-122"/>
                 <a:cs typeface="Calibri" pitchFamily="34" charset="-120"/>
               </a:rPr>
-              <a:t>“Parties” scored about 0.98 on almost any clause. Each score is now adjusted against 1,586 training clauses, which raised correct categories from 9.6% to 42.3%.</a:t>
+              <a:t>“Parties” scored about 0.98 on almost any text. We adjusted each score using 1,586 training clauses, and correct answers rose from 9.6% to 42.3%.</a:t>
             </a:r>
             <a:endParaRPr lang="en-US" sz="1550" dirty="0"/>
           </a:p>
@@ -3687,7 +3687,7 @@
                 <a:ea typeface="Calibri" pitchFamily="34" charset="-122"/>
                 <a:cs typeface="Calibri" pitchFamily="34" charset="-120"/>
               </a:rPr>
-              <a:t>The quoted text was almost the same for every category</a:t>
+              <a:t>The quoted text looked the same everywhere</a:t>
             </a:r>
             <a:endParaRPr lang="en-US" sz="1650" dirty="0"/>
           </a:p>
@@ -3726,7 +3726,7 @@
                 <a:ea typeface="Calibri" pitchFamily="34" charset="-122"/>
                 <a:cs typeface="Calibri" pitchFamily="34" charset="-120"/>
               </a:rPr>
-              <a:t>The presence model now picks the paragraph, and the span model only highlights the key phrase inside it.</a:t>
+              <a:t>Now the first model picks the paragraph, and the text model only highlights the key words inside it.</a:t>
             </a:r>
             <a:endParaRPr lang="en-US" sz="1550" dirty="0"/>
           </a:p>
@@ -3817,7 +3817,7 @@
                 <a:ea typeface="Calibri" pitchFamily="34" charset="-122"/>
                 <a:cs typeface="Calibri" pitchFamily="34" charset="-120"/>
               </a:rPr>
-              <a:t>Very long contracts were slow</a:t>
+              <a:t>Long contracts were slow</a:t>
             </a:r>
             <a:endParaRPr lang="en-US" sz="1650" dirty="0"/>
           </a:p>
@@ -3856,7 +3856,7 @@
                 <a:ea typeface="Calibri" pitchFamily="34" charset="-122"/>
                 <a:cs typeface="Calibri" pitchFamily="34" charset="-120"/>
               </a:rPr>
-              <a:t>The app reads at most 30 windows (about 45,500 characters), so even the longest test contract takes 34.8 s. The app states this on screen.</a:t>
+              <a:t>The app reads at most 30 windows (about 45,500 characters), so even the longest test contract takes only 34.8 seconds. The app tells the user this.</a:t>
             </a:r>
             <a:endParaRPr lang="en-US" sz="1550" dirty="0"/>
           </a:p>
@@ -4130,7 +4130,7 @@
                 <a:ea typeface="Calibri" pitchFamily="34" charset="-122"/>
                 <a:cs typeface="Calibri" pitchFamily="34" charset="-120"/>
               </a:rPr>
-              <a:t>↓  split once by contract, seed 42</a:t>
+              <a:t>↓  split once, by whole contract</a:t>
             </a:r>
             <a:endParaRPr lang="en-US" sz="1500" dirty="0"/>
           </a:p>
@@ -4196,7 +4196,7 @@
                 <a:ea typeface="Calibri" pitchFamily="34" charset="-122"/>
                 <a:cs typeface="Calibri" pitchFamily="34" charset="-120"/>
               </a:rPr>
-              <a:t>102 unseen test contracts  (408 used for training)</a:t>
+              <a:t>102 test contracts kept aside  (408 used for training)</a:t>
             </a:r>
             <a:endParaRPr lang="en-US" sz="1700" dirty="0"/>
           </a:p>
@@ -4301,7 +4301,7 @@
                 <a:ea typeface="Calibri" pitchFamily="34" charset="-122"/>
                 <a:cs typeface="Calibri" pitchFamily="34" charset="-120"/>
               </a:rPr>
-              <a:t>4,182 presence decisions · 2,667 span windows · 150 clauses</a:t>
+              <a:t>4,182 clause checks · 2,667 text windows · 150 explanations</a:t>
             </a:r>
             <a:endParaRPr lang="en-US" sz="1700" dirty="0"/>
           </a:p>
@@ -4379,7 +4379,7 @@
                 <a:ea typeface="Calibri" pitchFamily="34" charset="-122"/>
                 <a:cs typeface="Calibri" pitchFamily="34" charset="-120"/>
               </a:rPr>
-              <a:t>bootstrap resamples of contracts</a:t>
+              <a:t>re-runs on random mixes of the</a:t>
             </a:r>
             <a:endParaRPr lang="en-US" sz="1500" dirty="0"/>
           </a:p>
@@ -4396,7 +4396,7 @@
                 <a:ea typeface="Calibri" pitchFamily="34" charset="-122"/>
                 <a:cs typeface="Calibri" pitchFamily="34" charset="-120"/>
               </a:rPr>
-              <a:t>for every 95% confidence interval</a:t>
+              <a:t>test contracts, for a 95% range</a:t>
             </a:r>
             <a:endParaRPr lang="en-US" sz="1500" dirty="0"/>
           </a:p>
@@ -4435,7 +4435,7 @@
                 <a:ea typeface="Calibri" pitchFamily="34" charset="-122"/>
                 <a:cs typeface="Calibri" pitchFamily="34" charset="-120"/>
               </a:rPr>
-              <a:t>Scores: micro-F1, accuracy, precision, recall and specificity for presence; token-F1 and exact match for clause text; ROUGE-L for explanations. We re-checked the main result with three seeds, the full training set and 20 different splits.</a:t>
+              <a:t>We report accuracy and the F1 score (a balance of finding clauses and avoiding false alarms), a word-overlap score for clause text, and ROUGE-L for explanations. We re-checked the main result with 3 random seeds, all the training data and 20 different splits.</a:t>
             </a:r>
             <a:endParaRPr lang="en-US" sz="1500" dirty="0"/>
           </a:p>
@@ -4604,7 +4604,7 @@
                 <a:ea typeface="Calibri" pitchFamily="34" charset="-122"/>
                 <a:cs typeface="Calibri" pitchFamily="34" charset="-120"/>
               </a:rPr>
-              <a:t>Micro-F1 over 4,182 (contract, category) test decisions</a:t>
+              <a:t>F1 score (0 to 1, higher is better) on 4,182 test checks</a:t>
             </a:r>
             <a:endParaRPr lang="en-US" sz="1700" dirty="0"/>
           </a:p>
@@ -4643,7 +4643,7 @@
                 <a:ea typeface="Calibri" pitchFamily="34" charset="-122"/>
                 <a:cs typeface="Calibri" pitchFamily="34" charset="-120"/>
               </a:rPr>
-              <a:t>Per-category F1, twelve</a:t>
+              <a:t>F1 score of the 12 best</a:t>
             </a:r>
             <a:endParaRPr lang="en-US" sz="1500" dirty="0"/>
           </a:p>
@@ -4660,7 +4660,7 @@
                 <a:ea typeface="Calibri" pitchFamily="34" charset="-122"/>
                 <a:cs typeface="Calibri" pitchFamily="34" charset="-120"/>
               </a:rPr>
-              <a:t>strongest categories (Fig. 5.3)</a:t>
+              <a:t>clause types (Fig. 5.3)</a:t>
             </a:r>
             <a:endParaRPr lang="en-US" sz="1500" dirty="0"/>
           </a:p>
@@ -4751,7 +4751,7 @@
                 <a:ea typeface="Calibri" pitchFamily="34" charset="-122"/>
                 <a:cs typeface="Calibri" pitchFamily="34" charset="-120"/>
               </a:rPr>
-              <a:t>Highest score: the AND-ensemble</a:t>
+              <a:t>Best: both models agreeing</a:t>
             </a:r>
             <a:endParaRPr lang="en-US" sz="1650" dirty="0"/>
           </a:p>
@@ -4790,7 +4790,7 @@
                 <a:ea typeface="Calibri" pitchFamily="34" charset="-122"/>
                 <a:cs typeface="Calibri" pitchFamily="34" charset="-120"/>
               </a:rPr>
-              <a:t>Micro-F1 0.779 · accuracy 85.65% · precision 77.38% · recall 78.41% · specificity 89.10%. Its lead over TF-IDF is inside the 95% interval, so we call it a tie.</a:t>
+              <a:t>F1 0.779 and accuracy 85.65%. It finds 78.41% of real clauses, and 77.38% of what it reports is correct. It is almost tied with the word model.</a:t>
             </a:r>
             <a:endParaRPr lang="en-US" sz="1550" dirty="0"/>
           </a:p>
@@ -4881,7 +4881,7 @@
                 <a:ea typeface="Calibri" pitchFamily="34" charset="-122"/>
                 <a:cs typeface="Calibri" pitchFamily="34" charset="-120"/>
               </a:rPr>
-              <a:t>A strong simple baseline</a:t>
+              <a:t>The simple word model is strong</a:t>
             </a:r>
             <a:endParaRPr lang="en-US" sz="1650" dirty="0"/>
           </a:p>
@@ -4920,7 +4920,7 @@
                 <a:ea typeface="Calibri" pitchFamily="34" charset="-122"/>
                 <a:cs typeface="Calibri" pitchFamily="34" charset="-120"/>
               </a:rPr>
-              <a:t>TF-IDF reaches 0.775 and beats the window transformer (0.692) by 0.082. The gap held with three seeds, all 53,662 windows and six pooling rules.</a:t>
+              <a:t>TF-IDF scores 0.775 and beats the transformer alone (0.692). This held with 3 random seeds, all the training data and 6 ways of combining scores.</a:t>
             </a:r>
             <a:endParaRPr lang="en-US" sz="1550" dirty="0"/>
           </a:p>
@@ -5011,7 +5011,7 @@
                 <a:ea typeface="Calibri" pitchFamily="34" charset="-122"/>
                 <a:cs typeface="Calibri" pitchFamily="34" charset="-120"/>
               </a:rPr>
-              <a:t>Common clauses are almost solved</a:t>
+              <a:t>Common clauses are almost perfect</a:t>
             </a:r>
             <a:endParaRPr lang="en-US" sz="1650" dirty="0"/>
           </a:p>
@@ -5050,7 +5050,7 @@
                 <a:ea typeface="Calibri" pitchFamily="34" charset="-122"/>
                 <a:cs typeface="Calibri" pitchFamily="34" charset="-120"/>
               </a:rPr>
-              <a:t>Document Name 1.000, Parties 0.995, Agreement Date 0.963, Governing Law 0.931. The rarest categories have only 2 to 7 test examples, too few to learn reliably.</a:t>
+              <a:t>Document Name 1.000, Parties 0.995, Agreement Date 0.963, Governing Law 0.931. The rarest types have only 2 to 7 test examples, too few to learn.</a:t>
             </a:r>
             <a:endParaRPr lang="en-US" sz="1550" dirty="0"/>
           </a:p>
@@ -5222,7 +5222,7 @@
                 <a:ea typeface="Cambria" pitchFamily="34" charset="-122"/>
                 <a:cs typeface="Cambria" pitchFamily="34" charset="-120"/>
               </a:rPr>
-              <a:t>Result 2: clause text and plain English</a:t>
+              <a:t>Result 2: clause text and simple English</a:t>
             </a:r>
             <a:endParaRPr lang="en-US" sz="3500" dirty="0"/>
           </a:p>
@@ -5261,7 +5261,7 @@
                 <a:ea typeface="Calibri" pitchFamily="34" charset="-122"/>
                 <a:cs typeface="Calibri" pitchFamily="34" charset="-120"/>
               </a:rPr>
-              <a:t>How the span model and the summarizer do on unseen clauses</a:t>
+              <a:t>How well we find the words of a clause and explain it</a:t>
             </a:r>
             <a:endParaRPr lang="en-US" sz="1700" dirty="0"/>
           </a:p>
@@ -5466,7 +5466,7 @@
                 <a:ea typeface="Calibri" pitchFamily="34" charset="-122"/>
                 <a:cs typeface="Calibri" pitchFamily="34" charset="-120"/>
               </a:rPr>
-              <a:t>picks the category sentence</a:t>
+              <a:t>picks the matching sentence</a:t>
             </a:r>
             <a:endParaRPr lang="en-US" sz="1450" dirty="0"/>
           </a:p>
@@ -5898,7 +5898,7 @@
                 <a:ea typeface="Calibri" pitchFamily="34" charset="-122"/>
                 <a:cs typeface="Calibri" pitchFamily="34" charset="-120"/>
               </a:rPr>
-              <a:t>token-F1 of the clause text</a:t>
+              <a:t>word overlap with the real clause</a:t>
             </a:r>
             <a:endParaRPr lang="en-US" sz="1550" dirty="0"/>
           </a:p>
@@ -5915,7 +5915,7 @@
                 <a:ea typeface="Calibri" pitchFamily="34" charset="-122"/>
                 <a:cs typeface="Calibri" pitchFamily="34" charset="-120"/>
               </a:rPr>
-              <a:t>95% CI 0.743 to 0.782</a:t>
+              <a:t>95% range 0.743 to 0.782</a:t>
             </a:r>
             <a:endParaRPr lang="en-US" sz="1550" dirty="0"/>
           </a:p>
@@ -5993,7 +5993,7 @@
                 <a:ea typeface="Calibri" pitchFamily="34" charset="-122"/>
                 <a:cs typeface="Calibri" pitchFamily="34" charset="-120"/>
               </a:rPr>
-              <a:t>of answers overlap the real clause</a:t>
+              <a:t>of answers match the real clause</a:t>
             </a:r>
             <a:endParaRPr lang="en-US" sz="1550" dirty="0"/>
           </a:p>
@@ -6010,7 +6010,7 @@
                 <a:ea typeface="Calibri" pitchFamily="34" charset="-122"/>
                 <a:cs typeface="Calibri" pitchFamily="34" charset="-120"/>
               </a:rPr>
-              <a:t>well (token-F1 ≥ 0.5)</a:t>
+              <a:t>well (overlap of 0.5 or more)</a:t>
             </a:r>
             <a:endParaRPr lang="en-US" sz="1550" dirty="0"/>
           </a:p>
@@ -6088,7 +6088,7 @@
                 <a:ea typeface="Calibri" pitchFamily="34" charset="-122"/>
                 <a:cs typeface="Calibri" pitchFamily="34" charset="-120"/>
               </a:rPr>
-              <a:t>ROUGE-L of the explanations</a:t>
+              <a:t>ROUGE-L word-match score</a:t>
             </a:r>
             <a:endParaRPr lang="en-US" sz="1550" dirty="0"/>
           </a:p>
@@ -6235,7 +6235,7 @@
                 <a:ea typeface="Calibri" pitchFamily="34" charset="-122"/>
                 <a:cs typeface="Calibri" pitchFamily="34" charset="-120"/>
               </a:rPr>
-              <a:t>The span score is measured on windows that contain the clause, with a 67M-parameter model about ten times smaller than the best published CUAD model. The summarizer explains the category: it outputs one of our 41 sentences, which is why it scores only 0.116 against clause-specific references.</a:t>
+              <a:t>The text score is measured when the model is given the right part of the contract, and our model is about ten times smaller than the best published one. The explanation describes the clause type, not each clause's details, so it scores only 0.116 against clause-specific references.</a:t>
             </a:r>
             <a:endParaRPr lang="en-US" sz="1550" dirty="0"/>
           </a:p>
@@ -6404,7 +6404,7 @@
                 <a:ea typeface="Calibri" pitchFamily="34" charset="-122"/>
                 <a:cs typeface="Calibri" pitchFamily="34" charset="-120"/>
               </a:rPr>
-              <a:t>All the trained models running on any contract, with the risky clauses first</a:t>
+              <a:t>All the trained models running on any contract, risky clauses first</a:t>
             </a:r>
             <a:endParaRPr lang="en-US" sz="1700" dirty="0"/>
           </a:p>
@@ -6443,7 +6443,7 @@
                 <a:ea typeface="Calibri" pitchFamily="34" charset="-122"/>
                 <a:cs typeface="Calibri" pitchFamily="34" charset="-120"/>
               </a:rPr>
-              <a:t>The risk-sorted report (Fig. 4.15)</a:t>
+              <a:t>The report, sorted by risk (Fig. 4.15)</a:t>
             </a:r>
             <a:endParaRPr lang="en-US" sz="1400" dirty="0"/>
           </a:p>
@@ -6534,7 +6534,7 @@
                 <a:ea typeface="Calibri" pitchFamily="34" charset="-122"/>
                 <a:cs typeface="Calibri" pitchFamily="34" charset="-120"/>
               </a:rPr>
-              <a:t>Speed, measured</a:t>
+              <a:t>Speed</a:t>
             </a:r>
             <a:endParaRPr lang="en-US" sz="1650" dirty="0"/>
           </a:p>
@@ -6573,7 +6573,7 @@
                 <a:ea typeface="Calibri" pitchFamily="34" charset="-122"/>
                 <a:cs typeface="Calibri" pitchFamily="34" charset="-120"/>
               </a:rPr>
-              <a:t>Median contract 30.1 s, worst case 34.8 s on a CPU.</a:t>
+              <a:t>About 30 seconds for a normal contract; 34.8 s at most.</a:t>
             </a:r>
             <a:endParaRPr lang="en-US" sz="1550" dirty="0"/>
           </a:p>
@@ -6664,7 +6664,7 @@
                 <a:ea typeface="Calibri" pitchFamily="34" charset="-122"/>
                 <a:cs typeface="Calibri" pitchFamily="34" charset="-120"/>
               </a:rPr>
-              <a:t>Finds High-risk clauses</a:t>
+              <a:t>Finds risky clauses</a:t>
             </a:r>
             <a:endParaRPr lang="en-US" sz="1650" dirty="0"/>
           </a:p>
@@ -6703,7 +6703,7 @@
                 <a:ea typeface="Calibri" pitchFamily="34" charset="-122"/>
                 <a:cs typeface="Calibri" pitchFamily="34" charset="-120"/>
               </a:rPr>
-              <a:t>The default detector finds 84% of High-risk clauses.</a:t>
+              <a:t>By default it finds 84% of High-risk clauses.</a:t>
             </a:r>
             <a:endParaRPr lang="en-US" sz="1550" dirty="0"/>
           </a:p>
@@ -6833,7 +6833,7 @@
                 <a:ea typeface="Calibri" pitchFamily="34" charset="-122"/>
                 <a:cs typeface="Calibri" pitchFamily="34" charset="-120"/>
               </a:rPr>
-              <a:t>One card per clause: 18 numbered clauses give 18 cards.</a:t>
+              <a:t>One card per clause: 18 clauses give 18 cards.</a:t>
             </a:r>
             <a:endParaRPr lang="en-US" sz="1550" dirty="0"/>
           </a:p>
@@ -6924,7 +6924,7 @@
                 <a:ea typeface="Calibri" pitchFamily="34" charset="-122"/>
                 <a:cs typeface="Calibri" pitchFamily="34" charset="-120"/>
               </a:rPr>
-              <a:t>Private by design</a:t>
+              <a:t>Private</a:t>
             </a:r>
             <a:endParaRPr lang="en-US" sz="1650" dirty="0"/>
           </a:p>
@@ -6963,7 +6963,7 @@
                 <a:ea typeface="Calibri" pitchFamily="34" charset="-122"/>
                 <a:cs typeface="Calibri" pitchFamily="34" charset="-120"/>
               </a:rPr>
-              <a:t>Runs locally; the contract is never saved or sent anywhere.</a:t>
+              <a:t>Runs on your own computer; nothing is saved or sent.</a:t>
             </a:r>
             <a:endParaRPr lang="en-US" sz="1550" dirty="0"/>
           </a:p>
@@ -7132,7 +7132,7 @@
                 <a:ea typeface="Calibri" pitchFamily="34" charset="-122"/>
                 <a:cs typeface="Calibri" pitchFamily="34" charset="-120"/>
               </a:rPr>
-              <a:t>PDF, Word or text; whole contract, separate clauses, or Auto</a:t>
+              <a:t>PDF, Word or text; a whole contract or a list of clauses</a:t>
             </a:r>
             <a:endParaRPr lang="en-US" sz="1450" dirty="0"/>
           </a:p>
@@ -7223,7 +7223,7 @@
                 <a:ea typeface="Calibri" pitchFamily="34" charset="-122"/>
                 <a:cs typeface="Calibri" pitchFamily="34" charset="-120"/>
               </a:rPr>
-              <a:t>Risk-sorted cards</a:t>
+              <a:t>Cards sorted by risk</a:t>
             </a:r>
             <a:endParaRPr lang="en-US" sz="1600" dirty="0"/>
           </a:p>
@@ -7262,7 +7262,7 @@
                 <a:ea typeface="Calibri" pitchFamily="34" charset="-122"/>
                 <a:cs typeface="Calibri" pitchFamily="34" charset="-120"/>
               </a:rPr>
-              <a:t>category, risk level and reason, plain-English line, scores and quoted text</a:t>
+              <a:t>clause type, risk level and reason, a simple-English line and the quoted text</a:t>
             </a:r>
             <a:endParaRPr lang="en-US" sz="1450" dirty="0"/>
           </a:p>
@@ -7392,7 +7392,7 @@
                 <a:ea typeface="Calibri" pitchFamily="34" charset="-122"/>
                 <a:cs typeface="Calibri" pitchFamily="34" charset="-120"/>
               </a:rPr>
-              <a:t>every clause found in its risk colour, plus a missing-protection checklist</a:t>
+              <a:t>every clause marked in its risk colour, plus a checklist of missing protections</a:t>
             </a:r>
             <a:endParaRPr lang="en-US" sz="1450" dirty="0"/>
           </a:p>
@@ -7483,7 +7483,7 @@
                 <a:ea typeface="Calibri" pitchFamily="34" charset="-122"/>
                 <a:cs typeface="Calibri" pitchFamily="34" charset="-120"/>
               </a:rPr>
-              <a:t>Downloadable report</a:t>
+              <a:t>Download a report</a:t>
             </a:r>
             <a:endParaRPr lang="en-US" sz="1600" dirty="0"/>
           </a:p>
@@ -7522,7 +7522,7 @@
                 <a:ea typeface="Calibri" pitchFamily="34" charset="-122"/>
                 <a:cs typeface="Calibri" pitchFamily="34" charset="-120"/>
               </a:rPr>
-              <a:t>PDF and CSV files; 38 of 38 automated app tests pass</a:t>
+              <a:t>PDF and CSV files; all 38 app tests pass</a:t>
             </a:r>
             <a:endParaRPr lang="en-US" sz="1450" dirty="0"/>
           </a:p>
@@ -7715,7 +7715,7 @@
                 <a:ea typeface="Calibri" pitchFamily="34" charset="-122"/>
                 <a:cs typeface="Calibri" pitchFamily="34" charset="-120"/>
               </a:rPr>
-              <a:t>What the project delivered, and what we would do next</a:t>
+              <a:t>What we built, and what we would do next</a:t>
             </a:r>
             <a:endParaRPr lang="en-US" sz="1700" dirty="0"/>
           </a:p>
@@ -7820,7 +7820,7 @@
                 <a:ea typeface="Calibri" pitchFamily="34" charset="-122"/>
                 <a:cs typeface="Calibri" pitchFamily="34" charset="-120"/>
               </a:rPr>
-              <a:t>A complete system, tested on unseen contracts</a:t>
+              <a:t>A complete system, tested fairly</a:t>
             </a:r>
             <a:endParaRPr lang="en-US" sz="1600" dirty="0"/>
           </a:p>
@@ -7859,7 +7859,7 @@
                 <a:ea typeface="Calibri" pitchFamily="34" charset="-122"/>
                 <a:cs typeface="Calibri" pitchFamily="34" charset="-120"/>
               </a:rPr>
-              <a:t>presence, clause text, risk level and plain English for 41 clause types</a:t>
+              <a:t>finds clauses, shows the text, gives a risk level and a simple explanation</a:t>
             </a:r>
             <a:endParaRPr lang="en-US" sz="1500" dirty="0"/>
           </a:p>
@@ -7925,7 +7925,7 @@
                 <a:ea typeface="Calibri" pitchFamily="34" charset="-122"/>
                 <a:cs typeface="Calibri" pitchFamily="34" charset="-120"/>
               </a:rPr>
-              <a:t>A strong result on finding clauses</a:t>
+              <a:t>Good at finding clauses</a:t>
             </a:r>
             <a:endParaRPr lang="en-US" sz="1600" dirty="0"/>
           </a:p>
@@ -7964,7 +7964,7 @@
                 <a:ea typeface="Calibri" pitchFamily="34" charset="-122"/>
                 <a:cs typeface="Calibri" pitchFamily="34" charset="-120"/>
               </a:rPr>
-              <a:t>AND-ensemble micro-F1 0.779 and accuracy 85.65%; TF-IDF 0.775 is a strong baseline</a:t>
+              <a:t>F1 0.779 and accuracy 85.65% on 102 unseen contracts</a:t>
             </a:r>
             <a:endParaRPr lang="en-US" sz="1500" dirty="0"/>
           </a:p>
@@ -8030,7 +8030,7 @@
                 <a:ea typeface="Calibri" pitchFamily="34" charset="-122"/>
                 <a:cs typeface="Calibri" pitchFamily="34" charset="-120"/>
               </a:rPr>
-              <a:t>Accurate clause text</a:t>
+              <a:t>Finds the clause words well</a:t>
             </a:r>
             <a:endParaRPr lang="en-US" sz="1600" dirty="0"/>
           </a:p>
@@ -8069,7 +8069,7 @@
                 <a:ea typeface="Calibri" pitchFamily="34" charset="-122"/>
                 <a:cs typeface="Calibri" pitchFamily="34" charset="-120"/>
               </a:rPr>
-              <a:t>token-F1 0.764, with 82.8% good overlap when the window holds the clause</a:t>
+              <a:t>word overlap 0.764; 82.8% of answers match well</a:t>
             </a:r>
             <a:endParaRPr lang="en-US" sz="1500" dirty="0"/>
           </a:p>
@@ -8135,7 +8135,7 @@
                 <a:ea typeface="Calibri" pitchFamily="34" charset="-122"/>
                 <a:cs typeface="Calibri" pitchFamily="34" charset="-120"/>
               </a:rPr>
-              <a:t>A working, tested app</a:t>
+              <a:t>A working app</a:t>
             </a:r>
             <a:endParaRPr lang="en-US" sz="1600" dirty="0"/>
           </a:p>
@@ -8174,7 +8174,7 @@
                 <a:ea typeface="Calibri" pitchFamily="34" charset="-122"/>
                 <a:cs typeface="Calibri" pitchFamily="34" charset="-120"/>
               </a:rPr>
-              <a:t>Clausify runs locally in about 30 s per contract; 38 of 38 tests pass</a:t>
+              <a:t>Clausify takes about 30 s per contract; all 38 tests pass</a:t>
             </a:r>
             <a:endParaRPr lang="en-US" sz="1500" dirty="0"/>
           </a:p>
@@ -8279,7 +8279,7 @@
                 <a:ea typeface="Calibri" pitchFamily="34" charset="-122"/>
                 <a:cs typeface="Calibri" pitchFamily="34" charset="-120"/>
               </a:rPr>
-              <a:t>Lawyer review of the risk table</a:t>
+              <a:t>A lawyer checks the risk table</a:t>
             </a:r>
             <a:endParaRPr lang="en-US" sz="1600" dirty="0"/>
           </a:p>
@@ -8318,7 +8318,7 @@
                 <a:ea typeface="Calibri" pitchFamily="34" charset="-122"/>
                 <a:cs typeface="Calibri" pitchFamily="34" charset="-120"/>
               </a:rPr>
-              <a:t>two or three reviewers, with agreement measured by kappa</a:t>
+              <a:t>two or three lawyers, and we measure how much they agree</a:t>
             </a:r>
             <a:endParaRPr lang="en-US" sz="1500" dirty="0"/>
           </a:p>
@@ -8384,7 +8384,7 @@
                 <a:ea typeface="Calibri" pitchFamily="34" charset="-122"/>
                 <a:cs typeface="Calibri" pitchFamily="34" charset="-120"/>
               </a:rPr>
-              <a:t>Calibrate the confidence score</a:t>
+              <a:t>Make the confidence bar honest</a:t>
             </a:r>
             <a:endParaRPr lang="en-US" sz="1600" dirty="0"/>
           </a:p>
@@ -8423,7 +8423,7 @@
                 <a:ea typeface="Calibri" pitchFamily="34" charset="-122"/>
                 <a:cs typeface="Calibri" pitchFamily="34" charset="-120"/>
               </a:rPr>
-              <a:t>fit it on a validation split so the bar reads as a probability</a:t>
+              <a:t>so a score of 0.9 really means a 90% chance</a:t>
             </a:r>
             <a:endParaRPr lang="en-US" sz="1500" dirty="0"/>
           </a:p>
@@ -8489,7 +8489,7 @@
                 <a:ea typeface="Calibri" pitchFamily="34" charset="-122"/>
                 <a:cs typeface="Calibri" pitchFamily="34" charset="-120"/>
               </a:rPr>
-              <a:t>A user study</a:t>
+              <a:t>Test with real users</a:t>
             </a:r>
             <a:endParaRPr lang="en-US" sz="1600" dirty="0"/>
           </a:p>
@@ -8528,7 +8528,7 @@
                 <a:ea typeface="Calibri" pitchFamily="34" charset="-122"/>
                 <a:cs typeface="Calibri" pitchFamily="34" charset="-120"/>
               </a:rPr>
-              <a:t>5 to 10 non-lawyers, measuring time and clauses found</a:t>
+              <a:t>5 to 10 non-lawyers, timing how fast they find clauses</a:t>
             </a:r>
             <a:endParaRPr lang="en-US" sz="1500" dirty="0"/>
           </a:p>
@@ -8594,7 +8594,7 @@
                 <a:ea typeface="Calibri" pitchFamily="34" charset="-122"/>
                 <a:cs typeface="Calibri" pitchFamily="34" charset="-120"/>
               </a:rPr>
-              <a:t>Explanations for each clause</a:t>
+              <a:t>Explain each clause, not just its type</a:t>
             </a:r>
             <a:endParaRPr lang="en-US" sz="1600" dirty="0"/>
           </a:p>
@@ -8633,7 +8633,7 @@
                 <a:ea typeface="Calibri" pitchFamily="34" charset="-122"/>
                 <a:cs typeface="Calibri" pitchFamily="34" charset="-120"/>
               </a:rPr>
-              <a:t>grow the 150-clause trial set into a few thousand targets</a:t>
+              <a:t>write a few thousand clause-specific explanations</a:t>
             </a:r>
             <a:endParaRPr lang="en-US" sz="1500" dirty="0"/>
           </a:p>
@@ -8699,7 +8699,7 @@
                 <a:ea typeface="Calibri" pitchFamily="34" charset="-122"/>
                 <a:cs typeface="Calibri" pitchFamily="34" charset="-120"/>
               </a:rPr>
-              <a:t>Beyond CUAD</a:t>
+              <a:t>Go beyond CUAD</a:t>
             </a:r>
             <a:endParaRPr lang="en-US" sz="1600" dirty="0"/>
           </a:p>
@@ -8738,7 +8738,7 @@
                 <a:ea typeface="Calibri" pitchFamily="34" charset="-122"/>
                 <a:cs typeface="Calibri" pitchFamily="34" charset="-120"/>
               </a:rPr>
-              <a:t>larger models on a GPU, and contracts from Bangladesh</a:t>
+              <a:t>bigger models on a GPU, and contracts from Bangladesh</a:t>
             </a:r>
             <a:endParaRPr lang="en-US" sz="1500" dirty="0"/>
           </a:p>
@@ -8868,7 +8868,7 @@
                 <a:ea typeface="Cambria" pitchFamily="34" charset="-122"/>
                 <a:cs typeface="Cambria" pitchFamily="34" charset="-120"/>
               </a:rPr>
-              <a:t>Contracts are long, and the risky parts are short</a:t>
+              <a:t>Contracts are long, but the risky parts are short</a:t>
             </a:r>
             <a:endParaRPr lang="en-US" sz="3500" dirty="0"/>
           </a:p>
@@ -8907,7 +8907,7 @@
                 <a:ea typeface="Calibri" pitchFamily="34" charset="-122"/>
                 <a:cs typeface="Calibri" pitchFamily="34" charset="-120"/>
               </a:rPr>
-              <a:t>Why we built a system that reads a contract for the person signing it</a:t>
+              <a:t>Why we built a tool that reads a contract for the person signing it</a:t>
             </a:r>
             <a:endParaRPr lang="en-US" sz="1700" dirty="0"/>
           </a:p>
@@ -9037,7 +9037,7 @@
                 <a:ea typeface="Calibri" pitchFamily="34" charset="-122"/>
                 <a:cs typeface="Calibri" pitchFamily="34" charset="-120"/>
               </a:rPr>
-              <a:t>A typical CUAD contract has about 33,000 characters (5,000 words); the longest has more than 338,000.</a:t>
+              <a:t>A normal contract has about 33,000 characters (5,000 words). The longest has more than 338,000.</a:t>
             </a:r>
             <a:endParaRPr lang="en-US" sz="1550" dirty="0"/>
           </a:p>
@@ -9128,7 +9128,7 @@
                 <a:ea typeface="Calibri" pitchFamily="34" charset="-122"/>
                 <a:cs typeface="Calibri" pitchFamily="34" charset="-120"/>
               </a:rPr>
-              <a:t>Lawyers are expensive</a:t>
+              <a:t>Lawyers cost money</a:t>
             </a:r>
             <a:endParaRPr lang="en-US" sz="1650" dirty="0"/>
           </a:p>
@@ -9167,7 +9167,7 @@
                 <a:ea typeface="Calibri" pitchFamily="34" charset="-122"/>
                 <a:cs typeface="Calibri" pitchFamily="34" charset="-120"/>
               </a:rPr>
-              <a:t>A full review takes hours and costs money that freelancers and small businesses often cannot pay, so many people sign without understanding the risks.</a:t>
+              <a:t>Checking a contract takes a lawyer hours. Many freelancers and small businesses cannot pay, so they sign without knowing the risks.</a:t>
             </a:r>
             <a:endParaRPr lang="en-US" sz="1550" dirty="0"/>
           </a:p>
@@ -9258,7 +9258,7 @@
                 <a:ea typeface="Calibri" pitchFamily="34" charset="-122"/>
                 <a:cs typeface="Calibri" pitchFamily="34" charset="-120"/>
               </a:rPr>
-              <a:t>CUAD only finds the text</a:t>
+              <a:t>Existing tools only find text</a:t>
             </a:r>
             <a:endParaRPr lang="en-US" sz="1650" dirty="0"/>
           </a:p>
@@ -9297,7 +9297,7 @@
                 <a:ea typeface="Calibri" pitchFamily="34" charset="-122"/>
                 <a:cs typeface="Calibri" pitchFamily="34" charset="-120"/>
               </a:rPr>
-              <a:t>Given a category, the CUAD benchmark finds the clause. It does not say how risky the clause is or what it means in plain words.</a:t>
+              <a:t>The CUAD dataset can find where a clause is. It does not say how risky the clause is or what it means.</a:t>
             </a:r>
             <a:endParaRPr lang="en-US" sz="1550" dirty="0"/>
           </a:p>
@@ -9427,7 +9427,7 @@
                 <a:ea typeface="Calibri" pitchFamily="34" charset="-122"/>
                 <a:cs typeface="Calibri" pitchFamily="34" charset="-120"/>
               </a:rPr>
-              <a:t>A risk level for every clause category, a one-sentence plain-English explanation, and Clausify, an app that shows the risky clauses first.</a:t>
+              <a:t>A risk level for each clause, a one-line explanation in simple English, and an app called Clausify that shows risky clauses first.</a:t>
             </a:r>
             <a:endParaRPr lang="en-US" sz="1550" dirty="0"/>
           </a:p>
@@ -9557,7 +9557,7 @@
                 <a:ea typeface="Cambria" pitchFamily="34" charset="-122"/>
                 <a:cs typeface="Cambria" pitchFamily="34" charset="-120"/>
               </a:rPr>
-              <a:t>Objectives</a:t>
+              <a:t>Our goals</a:t>
             </a:r>
             <a:endParaRPr lang="en-US" sz="3500" dirty="0"/>
           </a:p>
@@ -9596,7 +9596,7 @@
                 <a:ea typeface="Calibri" pitchFamily="34" charset="-122"/>
                 <a:cs typeface="Calibri" pitchFamily="34" charset="-120"/>
               </a:rPr>
-              <a:t>Four goals, which the rest of this talk follows</a:t>
+              <a:t>Four goals that guide the rest of this talk</a:t>
             </a:r>
             <a:endParaRPr lang="en-US" sz="1700" dirty="0"/>
           </a:p>
@@ -9726,7 +9726,7 @@
                 <a:ea typeface="Calibri" pitchFamily="34" charset="-122"/>
                 <a:cs typeface="Calibri" pitchFamily="34" charset="-120"/>
               </a:rPr>
-              <a:t>Find which clauses are present</a:t>
+              <a:t>Find which clauses are in a contract</a:t>
             </a:r>
             <a:endParaRPr lang="en-US" sz="1650" dirty="0"/>
           </a:p>
@@ -9765,7 +9765,7 @@
                 <a:ea typeface="Calibri" pitchFamily="34" charset="-122"/>
                 <a:cs typeface="Calibri" pitchFamily="34" charset="-120"/>
               </a:rPr>
-              <a:t>For each of the 41 CUAD categories, decide whether a contract has a clause of that type, and compare a transformer with a strong word-based baseline.</a:t>
+              <a:t>Check each contract for 41 types of clause, and compare a modern AI model with a simple word-count model.</a:t>
             </a:r>
             <a:endParaRPr lang="en-US" sz="1550" dirty="0"/>
           </a:p>
@@ -9895,7 +9895,7 @@
                 <a:ea typeface="Calibri" pitchFamily="34" charset="-122"/>
                 <a:cs typeface="Calibri" pitchFamily="34" charset="-120"/>
               </a:rPr>
-              <a:t>Find the exact clause text</a:t>
+              <a:t>Find the exact words of each clause</a:t>
             </a:r>
             <a:endParaRPr lang="en-US" sz="1650" dirty="0"/>
           </a:p>
@@ -9934,7 +9934,7 @@
                 <a:ea typeface="Calibri" pitchFamily="34" charset="-122"/>
                 <a:cs typeface="Calibri" pitchFamily="34" charset="-120"/>
               </a:rPr>
-              <a:t>Extract the words of each clause found, treated as a question-answering task in the style of SQuAD.</a:t>
+              <a:t>Point to the place in the contract where each clause is written.</a:t>
             </a:r>
             <a:endParaRPr lang="en-US" sz="1550" dirty="0"/>
           </a:p>
@@ -10064,7 +10064,7 @@
                 <a:ea typeface="Calibri" pitchFamily="34" charset="-122"/>
                 <a:cs typeface="Calibri" pitchFamily="34" charset="-120"/>
               </a:rPr>
-              <a:t>Show the risk in plain English</a:t>
+              <a:t>Show the risk in simple English</a:t>
             </a:r>
             <a:endParaRPr lang="en-US" sz="1650" dirty="0"/>
           </a:p>
@@ -10103,7 +10103,7 @@
                 <a:ea typeface="Calibri" pitchFamily="34" charset="-122"/>
                 <a:cs typeface="Calibri" pitchFamily="34" charset="-120"/>
               </a:rPr>
-              <a:t>Give each clause found a High, Medium or Low level with a reason, and a one-sentence explanation.</a:t>
+              <a:t>Mark each clause High, Medium or Low risk, with a reason and a one-line explanation.</a:t>
             </a:r>
             <a:endParaRPr lang="en-US" sz="1550" dirty="0"/>
           </a:p>
@@ -10233,7 +10233,7 @@
                 <a:ea typeface="Calibri" pitchFamily="34" charset="-122"/>
                 <a:cs typeface="Calibri" pitchFamily="34" charset="-120"/>
               </a:rPr>
-              <a:t>Test fairly, then build the app</a:t>
+              <a:t>Test fairly, then build an app</a:t>
             </a:r>
             <a:endParaRPr lang="en-US" sz="1650" dirty="0"/>
           </a:p>
@@ -10272,7 +10272,7 @@
                 <a:ea typeface="Calibri" pitchFamily="34" charset="-122"/>
                 <a:cs typeface="Calibri" pitchFamily="34" charset="-120"/>
               </a:rPr>
-              <a:t>Test every model on 102 contracts never seen in training, then put all the models into the Clausify web app.</a:t>
+              <a:t>Test on 102 contracts the models never saw, then put everything into the Clausify app.</a:t>
             </a:r>
             <a:endParaRPr lang="en-US" sz="1550" dirty="0"/>
           </a:p>
@@ -10402,7 +10402,7 @@
                 <a:ea typeface="Cambria" pitchFamily="34" charset="-122"/>
                 <a:cs typeface="Cambria" pitchFamily="34" charset="-120"/>
               </a:rPr>
-              <a:t>The CUAD dataset</a:t>
+              <a:t>Our data: CUAD</a:t>
             </a:r>
             <a:endParaRPr lang="en-US" sz="3500" dirty="0"/>
           </a:p>
@@ -10441,7 +10441,7 @@
                 <a:ea typeface="Calibri" pitchFamily="34" charset="-122"/>
                 <a:cs typeface="Calibri" pitchFamily="34" charset="-120"/>
               </a:rPr>
-              <a:t>510 real business contracts, marked by legal experts for 41 clause categories</a:t>
+              <a:t>510 real business contracts, marked by legal experts for 41 types of clause</a:t>
             </a:r>
             <a:endParaRPr lang="en-US" sz="1700" dirty="0"/>
           </a:p>
@@ -10597,7 +10597,7 @@
                 <a:ea typeface="Calibri" pitchFamily="34" charset="-122"/>
                 <a:cs typeface="Calibri" pitchFamily="34" charset="-120"/>
               </a:rPr>
-              <a:t>clause categories</a:t>
+              <a:t>clause types</a:t>
             </a:r>
             <a:endParaRPr lang="en-US" sz="1550" dirty="0"/>
           </a:p>
@@ -10675,7 +10675,7 @@
                 <a:ea typeface="Calibri" pitchFamily="34" charset="-122"/>
                 <a:cs typeface="Calibri" pitchFamily="34" charset="-120"/>
               </a:rPr>
-              <a:t>median contract (chars)</a:t>
+              <a:t>characters in a normal contract</a:t>
             </a:r>
             <a:endParaRPr lang="en-US" sz="1550" dirty="0"/>
           </a:p>
@@ -10753,7 +10753,7 @@
                 <a:ea typeface="Calibri" pitchFamily="34" charset="-122"/>
                 <a:cs typeface="Calibri" pitchFamily="34" charset="-120"/>
               </a:rPr>
-              <a:t>median clause (chars)</a:t>
+              <a:t>characters in a normal clause</a:t>
             </a:r>
             <a:endParaRPr lang="en-US" sz="1550" dirty="0"/>
           </a:p>
@@ -10816,7 +10816,7 @@
                 <a:ea typeface="Calibri" pitchFamily="34" charset="-122"/>
                 <a:cs typeface="Calibri" pitchFamily="34" charset="-120"/>
               </a:rPr>
-              <a:t>Per-category positive rate, train vs test (Fig. 4.8)</a:t>
+              <a:t>How often each clause type appears, training vs test (Fig. 4.8)</a:t>
             </a:r>
             <a:endParaRPr lang="en-US" sz="1400" dirty="0"/>
           </a:p>
@@ -10907,7 +10907,7 @@
                 <a:ea typeface="Calibri" pitchFamily="34" charset="-122"/>
                 <a:cs typeface="Calibri" pitchFamily="34" charset="-120"/>
               </a:rPr>
-              <a:t>Contract-level 80/20 split</a:t>
+              <a:t>80/20 split by contract</a:t>
             </a:r>
             <a:endParaRPr lang="en-US" sz="1650" dirty="0"/>
           </a:p>
@@ -10946,7 +10946,7 @@
                 <a:ea typeface="Calibri" pitchFamily="34" charset="-122"/>
                 <a:cs typeface="Calibri" pitchFamily="34" charset="-120"/>
               </a:rPr>
-              <a:t>408 training and 102 test contracts, seed 42, used by all three models. No clause from a training contract can reach the test set.</a:t>
+              <a:t>408 contracts for training and 102 for testing, the same for every model. No test contract is ever seen in training.</a:t>
             </a:r>
             <a:endParaRPr lang="en-US" sz="1550" dirty="0"/>
           </a:p>
@@ -11037,7 +11037,7 @@
                 <a:ea typeface="Calibri" pitchFamily="34" charset="-122"/>
                 <a:cs typeface="Calibri" pitchFamily="34" charset="-120"/>
               </a:rPr>
-              <a:t>Very uneven categories</a:t>
+              <a:t>Some clause types are rare</a:t>
             </a:r>
             <a:endParaRPr lang="en-US" sz="1650" dirty="0"/>
           </a:p>
@@ -11076,7 +11076,7 @@
                 <a:ea typeface="Calibri" pitchFamily="34" charset="-122"/>
                 <a:cs typeface="Calibri" pitchFamily="34" charset="-120"/>
               </a:rPr>
-              <a:t>From 100% of contracts (Document Name) down to 2.5% (Source Code Escrow). The median category appears in 23% of contracts.</a:t>
+              <a:t>Document Name is in every contract, but Source Code Escrow is in only 2.5%. A typical clause type is in 23% of contracts.</a:t>
             </a:r>
             <a:endParaRPr lang="en-US" sz="1550" dirty="0"/>
           </a:p>
@@ -11206,7 +11206,7 @@
                 <a:ea typeface="Calibri" pitchFamily="34" charset="-122"/>
                 <a:cs typeface="Calibri" pitchFamily="34" charset="-120"/>
               </a:rPr>
-              <a:t>The experts' marking reportedly cost about $2M, so the data cannot be grown. We start from pre-trained models and guard against over-fitting.</a:t>
+              <a:t>The experts' labels reportedly cost about $2M, so we cannot add more. We start from models that are already pre-trained.</a:t>
             </a:r>
             <a:endParaRPr lang="en-US" sz="1550" dirty="0"/>
           </a:p>
@@ -11375,7 +11375,7 @@
                 <a:ea typeface="Calibri" pitchFamily="34" charset="-122"/>
                 <a:cs typeface="Calibri" pitchFamily="34" charset="-120"/>
               </a:rPr>
-              <a:t>From two CUAD files to examples the models can learn from</a:t>
+              <a:t>Turning two CUAD files into examples the models can learn from</a:t>
             </a:r>
             <a:endParaRPr lang="en-US" sz="1700" dirty="0"/>
           </a:p>
@@ -11544,7 +11544,7 @@
                 <a:ea typeface="Calibri" pitchFamily="34" charset="-122"/>
                 <a:cs typeface="Calibri" pitchFamily="34" charset="-120"/>
               </a:rPr>
-              <a:t>Empty cells mean the category is absent, clause lists stored as text are parsed, and blank answers are dropped. Expert values are kept as they are.</a:t>
+              <a:t>Empty cells mean the clause is missing. Lists saved as text are read properly, and blank answers are removed.</a:t>
             </a:r>
             <a:endParaRPr lang="en-US" sz="1550" dirty="0"/>
           </a:p>
@@ -11674,7 +11674,7 @@
                 <a:ea typeface="Calibri" pitchFamily="34" charset="-122"/>
                 <a:cs typeface="Calibri" pitchFamily="34" charset="-120"/>
               </a:rPr>
-              <a:t>Fix a column-name typo</a:t>
+              <a:t>Fix a typo in a column name</a:t>
             </a:r>
             <a:endParaRPr lang="en-US" sz="1650" dirty="0"/>
           </a:p>
@@ -11713,7 +11713,7 @@
                 <a:ea typeface="Calibri" pitchFamily="34" charset="-122"/>
                 <a:cs typeface="Calibri" pitchFamily="34" charset="-120"/>
               </a:rPr>
-              <a:t>One answer column has an extra space in its name, so columns are paired by position instead of by name.</a:t>
+              <a:t>One column name had an extra space, so we matched columns by their position, not their name.</a:t>
             </a:r>
             <a:endParaRPr lang="en-US" sz="1550" dirty="0"/>
           </a:p>
@@ -11843,7 +11843,7 @@
                 <a:ea typeface="Calibri" pitchFamily="34" charset="-122"/>
                 <a:cs typeface="Calibri" pitchFamily="34" charset="-120"/>
               </a:rPr>
-              <a:t>One row per (contract, category)</a:t>
+              <a:t>One row per contract and clause type</a:t>
             </a:r>
             <a:endParaRPr lang="en-US" sz="1650" dirty="0"/>
           </a:p>
@@ -11882,7 +11882,7 @@
                 <a:ea typeface="Calibri" pitchFamily="34" charset="-122"/>
                 <a:cs typeface="Calibri" pitchFamily="34" charset="-120"/>
               </a:rPr>
-              <a:t>510 × 41 = 20,910 labelled rows, of which 32.1% are positive.</a:t>
+              <a:t>510 × 41 = 20,910 rows. In 32.1% of them the clause is present.</a:t>
             </a:r>
             <a:endParaRPr lang="en-US" sz="1550" dirty="0"/>
           </a:p>
@@ -12051,7 +12051,7 @@
                 <a:ea typeface="Calibri" pitchFamily="34" charset="-122"/>
                 <a:cs typeface="Calibri" pitchFamily="34" charset="-120"/>
               </a:rPr>
-              <a:t>2,000-character windows every 1,500 characters. The 500-character overlap is longer than the median clause, giving 53,662 training windows (39.2% positive).</a:t>
+              <a:t>Windows are 2,000-character pieces that overlap by 500 characters, so no clause is cut in half. This gives 53,662 training windows.</a:t>
             </a:r>
             <a:endParaRPr lang="en-US" sz="1550" dirty="0"/>
           </a:p>
@@ -12220,7 +12220,7 @@
                 <a:ea typeface="Calibri" pitchFamily="34" charset="-122"/>
                 <a:cs typeface="Calibri" pitchFamily="34" charset="-120"/>
               </a:rPr>
-              <a:t>Four steps, from raw text to a risk-sorted report</a:t>
+              <a:t>Four steps, from contract text to a report sorted by risk</a:t>
             </a:r>
             <a:endParaRPr lang="en-US" sz="1700" dirty="0"/>
           </a:p>
@@ -12430,7 +12430,7 @@
                 <a:ea typeface="Cambria" pitchFamily="34" charset="-122"/>
                 <a:cs typeface="Cambria" pitchFamily="34" charset="-120"/>
               </a:rPr>
-              <a:t>1 Presence</a:t>
+              <a:t>1 Find clauses</a:t>
             </a:r>
             <a:endParaRPr lang="en-US" sz="1700" dirty="0"/>
           </a:p>
@@ -12469,7 +12469,7 @@
                 <a:ea typeface="Calibri" pitchFamily="34" charset="-122"/>
                 <a:cs typeface="Calibri" pitchFamily="34" charset="-120"/>
               </a:rPr>
-              <a:t>TF-IDF + windowed DistilBERT</a:t>
+              <a:t>word model + small BERT</a:t>
             </a:r>
             <a:endParaRPr lang="en-US" sz="1500" dirty="0"/>
           </a:p>
@@ -12574,7 +12574,7 @@
                 <a:ea typeface="Cambria" pitchFamily="34" charset="-122"/>
                 <a:cs typeface="Cambria" pitchFamily="34" charset="-120"/>
               </a:rPr>
-              <a:t>2 Span</a:t>
+              <a:t>2 Find text</a:t>
             </a:r>
             <a:endParaRPr lang="en-US" sz="1700" dirty="0"/>
           </a:p>
@@ -12613,7 +12613,7 @@
                 <a:ea typeface="Calibri" pitchFamily="34" charset="-122"/>
                 <a:cs typeface="Calibri" pitchFamily="34" charset="-120"/>
               </a:rPr>
-              <a:t>DistilBERT-QA</a:t>
+              <a:t>question-answering model</a:t>
             </a:r>
             <a:endParaRPr lang="en-US" sz="1500" dirty="0"/>
           </a:p>
@@ -12757,7 +12757,7 @@
                 <a:ea typeface="Calibri" pitchFamily="34" charset="-122"/>
                 <a:cs typeface="Calibri" pitchFamily="34" charset="-120"/>
               </a:rPr>
-              <a:t>41-category risk table</a:t>
+              <a:t>risk table for 41 types</a:t>
             </a:r>
             <a:endParaRPr lang="en-US" sz="1500" dirty="0"/>
           </a:p>
@@ -12862,7 +12862,7 @@
                 <a:ea typeface="Cambria" pitchFamily="34" charset="-122"/>
                 <a:cs typeface="Cambria" pitchFamily="34" charset="-120"/>
               </a:rPr>
-              <a:t>4 Explanation</a:t>
+              <a:t>4 Explain</a:t>
             </a:r>
             <a:endParaRPr lang="en-US" sz="1700" dirty="0"/>
           </a:p>
@@ -12901,7 +12901,7 @@
                 <a:ea typeface="Calibri" pitchFamily="34" charset="-122"/>
                 <a:cs typeface="Calibri" pitchFamily="34" charset="-120"/>
               </a:rPr>
-              <a:t>FLAN-T5-small</a:t>
+              <a:t>FLAN-T5 writes one line</a:t>
             </a:r>
             <a:endParaRPr lang="en-US" sz="1500" dirty="0"/>
           </a:p>
@@ -12967,7 +12967,7 @@
                 <a:ea typeface="Calibri" pitchFamily="34" charset="-122"/>
                 <a:cs typeface="Calibri" pitchFamily="34" charset="-120"/>
               </a:rPr>
-              <a:t>which of 41 types?</a:t>
+              <a:t>which clauses?</a:t>
             </a:r>
             <a:endParaRPr lang="en-US" sz="1500" dirty="0"/>
           </a:p>
@@ -13033,7 +13033,7 @@
                 <a:ea typeface="Calibri" pitchFamily="34" charset="-122"/>
                 <a:cs typeface="Calibri" pitchFamily="34" charset="-120"/>
               </a:rPr>
-              <a:t>the clause text</a:t>
+              <a:t>the exact words</a:t>
             </a:r>
             <a:endParaRPr lang="en-US" sz="1500" dirty="0"/>
           </a:p>
@@ -13165,7 +13165,7 @@
                 <a:ea typeface="Calibri" pitchFamily="34" charset="-122"/>
                 <a:cs typeface="Calibri" pitchFamily="34" charset="-120"/>
               </a:rPr>
-              <a:t>one plain sentence</a:t>
+              <a:t>one simple sentence</a:t>
             </a:r>
             <a:endParaRPr lang="en-US" sz="1500" dirty="0"/>
           </a:p>
@@ -13254,7 +13254,7 @@
                 <a:ea typeface="Calibri" pitchFamily="34" charset="-122"/>
                 <a:cs typeface="Calibri" pitchFamily="34" charset="-120"/>
               </a:rPr>
-              <a:t>the clause, 196 chars</a:t>
+              <a:t>the clause (196 characters)</a:t>
             </a:r>
             <a:endParaRPr lang="en-US" sz="1450" dirty="0"/>
           </a:p>
@@ -13713,7 +13713,7 @@
                 <a:ea typeface="Calibri" pitchFamily="34" charset="-122"/>
                 <a:cs typeface="Calibri" pitchFamily="34" charset="-120"/>
               </a:rPr>
-              <a:t>⋮  22 windows for a median contract, 226 for the longest</a:t>
+              <a:t>⋮  22 windows for a normal contract, 226 for the longest</a:t>
             </a:r>
             <a:endParaRPr lang="en-US" sz="1450" dirty="0"/>
           </a:p>
@@ -13779,7 +13779,7 @@
                 <a:ea typeface="Calibri" pitchFamily="34" charset="-122"/>
                 <a:cs typeface="Calibri" pitchFamily="34" charset="-120"/>
               </a:rPr>
-              <a:t>max = 0.91</a:t>
+              <a:t>highest = 0.91</a:t>
             </a:r>
             <a:endParaRPr lang="en-US" sz="1600" dirty="0"/>
           </a:p>
@@ -13796,7 +13796,7 @@
                 <a:ea typeface="Calibri" pitchFamily="34" charset="-122"/>
                 <a:cs typeface="Calibri" pitchFamily="34" charset="-120"/>
               </a:rPr>
-              <a:t>→ present</a:t>
+              <a:t>→ clause found</a:t>
             </a:r>
             <a:endParaRPr lang="en-US" sz="1600" dirty="0"/>
           </a:p>
@@ -13887,7 +13887,7 @@
                 <a:ea typeface="Calibri" pitchFamily="34" charset="-122"/>
                 <a:cs typeface="Calibri" pitchFamily="34" charset="-120"/>
               </a:rPr>
-              <a:t>Every clause is covered</a:t>
+              <a:t>No clause is missed</a:t>
             </a:r>
             <a:endParaRPr lang="en-US" sz="1650" dirty="0"/>
           </a:p>
@@ -13926,7 +13926,7 @@
                 <a:ea typeface="Calibri" pitchFamily="34" charset="-122"/>
                 <a:cs typeface="Calibri" pitchFamily="34" charset="-120"/>
               </a:rPr>
-              <a:t>Windows overlap by 500 characters, more than the median clause, so no clause falls between two windows.</a:t>
+              <a:t>Windows overlap by 500 characters, which is longer than a normal clause.</a:t>
             </a:r>
             <a:endParaRPr lang="en-US" sz="1550" dirty="0"/>
           </a:p>
@@ -14017,7 +14017,7 @@
                 <a:ea typeface="Calibri" pitchFamily="34" charset="-122"/>
                 <a:cs typeface="Calibri" pitchFamily="34" charset="-120"/>
               </a:rPr>
-              <a:t>Two models must agree</a:t>
+              <a:t>Both models must agree</a:t>
             </a:r>
             <a:endParaRPr lang="en-US" sz="1650" dirty="0"/>
           </a:p>
@@ -14056,7 +14056,7 @@
                 <a:ea typeface="Calibri" pitchFamily="34" charset="-122"/>
                 <a:cs typeface="Calibri" pitchFamily="34" charset="-120"/>
               </a:rPr>
-              <a:t>A category is reported only when TF-IDF and DistilBERT both score at least 0.5, which removes many false alarms.</a:t>
+              <a:t>A clause is reported only when both models give it a score of at least 0.5. This cuts false alarms.</a:t>
             </a:r>
             <a:endParaRPr lang="en-US" sz="1550" dirty="0"/>
           </a:p>
@@ -14095,7 +14095,7 @@
                 <a:ea typeface="Calibri" pitchFamily="34" charset="-122"/>
                 <a:cs typeface="Calibri" pitchFamily="34" charset="-120"/>
               </a:rPr>
-              <a:t>Measured before training: a “search first” design could find at most 64.0% of clauses, so we read every window instead.</a:t>
+              <a:t>We checked first: a “search first” design could reach at most 64% of clauses, so we read every window instead.</a:t>
             </a:r>
             <a:endParaRPr lang="en-US" sz="1500" dirty="0"/>
           </a:p>
@@ -14225,7 +14225,7 @@
                 <a:ea typeface="Cambria" pitchFamily="34" charset="-122"/>
                 <a:cs typeface="Cambria" pitchFamily="34" charset="-120"/>
               </a:rPr>
-              <a:t>The risk layer</a:t>
+              <a:t>How we set the risk level</a:t>
             </a:r>
             <a:endParaRPr lang="en-US" sz="3500" dirty="0"/>
           </a:p>
@@ -14264,7 +14264,7 @@
                 <a:ea typeface="Calibri" pitchFamily="34" charset="-122"/>
                 <a:cs typeface="Calibri" pitchFamily="34" charset="-120"/>
               </a:rPr>
-              <a:t>A fixed level for each of the 41 categories, judged from the weaker party's side</a:t>
+              <a:t>One fixed level for each of the 41 clause types, from the weaker side's point of view</a:t>
             </a:r>
             <a:endParaRPr lang="en-US" sz="1700" dirty="0"/>
           </a:p>
@@ -14303,7 +14303,7 @@
                 <a:ea typeface="Calibri" pitchFamily="34" charset="-122"/>
                 <a:cs typeface="Calibri" pitchFamily="34" charset="-120"/>
               </a:rPr>
-              <a:t>Number of categories at each risk level (full table in Appendix A)</a:t>
+              <a:t>Number of clause types at each risk level (full list in Appendix A)</a:t>
             </a:r>
             <a:endParaRPr lang="en-US" sz="1400" dirty="0"/>
           </a:p>
@@ -14394,7 +14394,7 @@
                 <a:ea typeface="Calibri" pitchFamily="34" charset="-122"/>
                 <a:cs typeface="Calibri" pitchFamily="34" charset="-120"/>
               </a:rPr>
-              <a:t>Five questions per category</a:t>
+              <a:t>Five questions for each type</a:t>
             </a:r>
             <a:endParaRPr lang="en-US" sz="1650" dirty="0"/>
           </a:p>
@@ -14433,7 +14433,7 @@
                 <a:ea typeface="Calibri" pitchFamily="34" charset="-122"/>
                 <a:cs typeface="Calibri" pitchFamily="34" charset="-120"/>
               </a:rPr>
-              <a:t>Money at risk? Can it be undone? Limits on future freedom? One-sided? Does it last after the contract?</a:t>
+              <a:t>Can it cost money? Can it be undone? Does it limit you later? Is it one-sided? Does it last after the contract?</a:t>
             </a:r>
             <a:endParaRPr lang="en-US" sz="1550" dirty="0"/>
           </a:p>
@@ -14563,7 +14563,7 @@
                 <a:ea typeface="Calibri" pitchFamily="34" charset="-122"/>
                 <a:cs typeface="Calibri" pitchFamily="34" charset="-120"/>
               </a:rPr>
-              <a:t>High: no money limit, cannot be undone, or limits freedom later. Low: only records a fact. Medium: the rest.</a:t>
+              <a:t>High: no money limit, cannot be undone, or limits you later. Low: only records a fact. Medium: the rest.</a:t>
             </a:r>
             <a:endParaRPr lang="en-US" sz="1550" dirty="0"/>
           </a:p>
@@ -14654,7 +14654,7 @@
                 <a:ea typeface="Calibri" pitchFamily="34" charset="-122"/>
                 <a:cs typeface="Calibri" pitchFamily="34" charset="-120"/>
               </a:rPr>
-              <a:t>Examples, with a one-line reason shown in the app</a:t>
+              <a:t>Examples (the app shows a one-line reason for each)</a:t>
             </a:r>
             <a:endParaRPr lang="en-US" sz="1650" dirty="0"/>
           </a:p>
@@ -14732,7 +14732,7 @@
                 <a:ea typeface="Calibri" pitchFamily="34" charset="-122"/>
                 <a:cs typeface="Calibri" pitchFamily="34" charset="-120"/>
               </a:rPr>
-              <a:t>The weaker party is the side with less power over the wording, usually the side that did not write the contract. A lookup table can be checked line by line and never changes between versions.</a:t>
+              <a:t>The “weaker side” is the party with less say over the wording, usually the one who did not write the contract. A fixed table is easy to check and never changes by itself.</a:t>
             </a:r>
             <a:endParaRPr lang="en-US" sz="1450" dirty="0"/>
           </a:p>
@@ -14880,7 +14880,7 @@
                 <a:ea typeface="Cambria" pitchFamily="34" charset="-122"/>
                 <a:cs typeface="Cambria" pitchFamily="34" charset="-120"/>
               </a:rPr>
-              <a:t>How we trained the three models</a:t>
+              <a:t>How we trained the models</a:t>
             </a:r>
             <a:endParaRPr lang="en-US" sz="3500" dirty="0"/>
           </a:p>
@@ -14919,7 +14919,7 @@
                 <a:ea typeface="Calibri" pitchFamily="34" charset="-122"/>
                 <a:cs typeface="Calibri" pitchFamily="34" charset="-120"/>
               </a:rPr>
-              <a:t>One Apple M4 laptop, standard settings, and the same 80/20 split for every model</a:t>
+              <a:t>One Apple laptop, standard settings, and the same 80/20 split for every model</a:t>
             </a:r>
             <a:endParaRPr lang="en-US" sz="1700" dirty="0"/>
           </a:p>
@@ -15008,7 +15008,7 @@
                 <a:ea typeface="Calibri" pitchFamily="34" charset="-122"/>
                 <a:cs typeface="Calibri" pitchFamily="34" charset="-120"/>
               </a:rPr>
-              <a:t>Presence</a:t>
+              <a:t>Find clauses</a:t>
             </a:r>
             <a:endParaRPr lang="en-US" sz="1450" dirty="0"/>
           </a:p>
@@ -15047,7 +15047,7 @@
                 <a:ea typeface="Calibri" pitchFamily="34" charset="-122"/>
                 <a:cs typeface="Calibri" pitchFamily="34" charset="-120"/>
               </a:rPr>
-              <a:t>DistilBERT · 24,000 windows · LR 2e-5</a:t>
+              <a:t>DistilBERT · 24,000 windows</a:t>
             </a:r>
             <a:endParaRPr lang="en-US" sz="1450" dirty="0"/>
           </a:p>
@@ -15175,7 +15175,7 @@
                 <a:ea typeface="Calibri" pitchFamily="34" charset="-122"/>
                 <a:cs typeface="Calibri" pitchFamily="34" charset="-120"/>
               </a:rPr>
-              <a:t>Span</a:t>
+              <a:t>Find text</a:t>
             </a:r>
             <a:endParaRPr lang="en-US" sz="1450" dirty="0"/>
           </a:p>
@@ -15214,7 +15214,7 @@
                 <a:ea typeface="Calibri" pitchFamily="34" charset="-122"/>
                 <a:cs typeface="Calibri" pitchFamily="34" charset="-120"/>
               </a:rPr>
-              <a:t>DistilBERT-QA · 8,000 examples · LR 3e-5</a:t>
+              <a:t>DistilBERT-QA · 8,000 examples</a:t>
             </a:r>
             <a:endParaRPr lang="en-US" sz="1450" dirty="0"/>
           </a:p>
@@ -15342,7 +15342,7 @@
                 <a:ea typeface="Calibri" pitchFamily="34" charset="-122"/>
                 <a:cs typeface="Calibri" pitchFamily="34" charset="-120"/>
               </a:rPr>
-              <a:t>Explanation</a:t>
+              <a:t>Explain</a:t>
             </a:r>
             <a:endParaRPr lang="en-US" sz="1450" dirty="0"/>
           </a:p>
@@ -15381,7 +15381,7 @@
                 <a:ea typeface="Calibri" pitchFamily="34" charset="-122"/>
                 <a:cs typeface="Calibri" pitchFamily="34" charset="-120"/>
               </a:rPr>
-              <a:t>FLAN-T5-small · 4,000 pairs · CPU · LR 3e-4</a:t>
+              <a:t>FLAN-T5-small · 4,000 examples</a:t>
             </a:r>
             <a:endParaRPr lang="en-US" sz="1450" dirty="0"/>
           </a:p>
@@ -15483,7 +15483,7 @@
                 <a:ea typeface="Calibri" pitchFamily="34" charset="-122"/>
                 <a:cs typeface="Calibri" pitchFamily="34" charset="-120"/>
               </a:rPr>
-              <a:t>Learning rate: linear decay, no warm-up, clipping at 1.0 (Fig. 4.9)</a:t>
+              <a:t>The learning rate starts high and falls steadily (Fig. 4.9)</a:t>
             </a:r>
             <a:endParaRPr lang="en-US" sz="1400" dirty="0"/>
           </a:p>
@@ -15522,7 +15522,7 @@
                 <a:ea typeface="Calibri" pitchFamily="34" charset="-122"/>
                 <a:cs typeface="Calibri" pitchFamily="34" charset="-120"/>
               </a:rPr>
-              <a:t>Apple M4, 16 GB, Metal (MPS), no CUDA, two epochs each. Re-training in October 2026 reproduced the August scores to within 0.003.</a:t>
+              <a:t>Apple M4 laptop with 16 GB memory and no NVIDIA GPU. Each model saw its data twice. Training again in October gave the same scores (within 0.003).</a:t>
             </a:r>
             <a:endParaRPr lang="en-US" sz="1500" dirty="0"/>
           </a:p>
@@ -15613,7 +15613,7 @@
                 <a:ea typeface="Calibri" pitchFamily="34" charset="-122"/>
                 <a:cs typeface="Calibri" pitchFamily="34" charset="-120"/>
               </a:rPr>
-              <a:t>Baseline first</a:t>
+              <a:t>Simple model first</a:t>
             </a:r>
             <a:endParaRPr lang="en-US" sz="1650" dirty="0"/>
           </a:p>
@@ -15652,7 +15652,7 @@
                 <a:ea typeface="Calibri" pitchFamily="34" charset="-122"/>
                 <a:cs typeface="Calibri" pitchFamily="34" charset="-120"/>
               </a:rPr>
-              <a:t>TF-IDF (20,000 word and word-pair features) with one logistic-regression model per category. Trains in under a minute; micro-F1 0.775.</a:t>
+              <a:t>A word-count model (TF-IDF) with one classifier for each clause type. It trains in under a minute and scores 0.775.</a:t>
             </a:r>
             <a:endParaRPr lang="en-US" sz="1550" dirty="0"/>
           </a:p>
@@ -15743,7 +15743,7 @@
                 <a:ea typeface="Calibri" pitchFamily="34" charset="-122"/>
                 <a:cs typeface="Calibri" pitchFamily="34" charset="-120"/>
               </a:rPr>
-              <a:t>Healthy training</a:t>
+              <a:t>Training went well</a:t>
             </a:r>
             <a:endParaRPr lang="en-US" sz="1650" dirty="0"/>
           </a:p>
@@ -15782,7 +15782,7 @@
                 <a:ea typeface="Calibri" pitchFamily="34" charset="-122"/>
                 <a:cs typeface="Calibri" pitchFamily="34" charset="-120"/>
               </a:rPr>
-              <a:t>Presence loss fell from 0.57 to 0.26 and validation loss from 0.275 to 0.254, close to it, so no over-fitting. Summarizer loss 1.17 to 0.08.</a:t>
+              <a:t>The training loss fell from 0.57 to 0.26, and the held-back check stayed close (0.275 to 0.254), so the model did not just memorise.</a:t>
             </a:r>
             <a:endParaRPr lang="en-US" sz="1550" dirty="0"/>
           </a:p>
@@ -15873,7 +15873,7 @@
                 <a:ea typeface="Calibri" pitchFamily="34" charset="-122"/>
                 <a:cs typeface="Calibri" pitchFamily="34" charset="-120"/>
               </a:rPr>
-              <a:t>Nothing tuned on the test set</a:t>
+              <a:t>No peeking at the test set</a:t>
             </a:r>
             <a:endParaRPr lang="en-US" sz="1650" dirty="0"/>
           </a:p>
@@ -15912,7 +15912,7 @@
                 <a:ea typeface="Calibri" pitchFamily="34" charset="-122"/>
                 <a:cs typeface="Calibri" pitchFamily="34" charset="-120"/>
               </a:rPr>
-              <a:t>Every setting is a standard default or fixed by reasoning before training. Presence kept 5% of its training windows for validation; the test set never chose anything.</a:t>
+              <a:t>We used standard settings and chose nothing by looking at the test contracts. 5% of the training windows were kept back for checking.</a:t>
             </a:r>
             <a:endParaRPr lang="en-US" sz="1550" dirty="0"/>
           </a:p>
@@ -16081,7 +16081,7 @@
                 <a:ea typeface="Calibri" pitchFamily="34" charset="-122"/>
                 <a:cs typeface="Calibri" pitchFamily="34" charset="-120"/>
               </a:rPr>
-              <a:t>Each one had a measured cause and a fix</a:t>
+              <a:t>What went wrong, and how we fixed it</a:t>
             </a:r>
             <a:endParaRPr lang="en-US" sz="1700" dirty="0"/>
           </a:p>
@@ -16172,7 +16172,7 @@
                 <a:ea typeface="Calibri" pitchFamily="34" charset="-122"/>
                 <a:cs typeface="Calibri" pitchFamily="34" charset="-120"/>
               </a:rPr>
-              <a:t>Contracts are 16× too long for a transformer</a:t>
+              <a:t>Contracts are too long for the model</a:t>
             </a:r>
             <a:endParaRPr lang="en-US" sz="1650" dirty="0"/>
           </a:p>
@@ -16211,7 +16211,7 @@
                 <a:ea typeface="Calibri" pitchFamily="34" charset="-122"/>
                 <a:cs typeface="Calibri" pitchFamily="34" charset="-120"/>
               </a:rPr>
-              <a:t>Read every overlapping window and keep the highest score. A “search first” design was measured first and rejected: it could reach only 64% of clauses.</a:t>
+              <a:t>A normal contract is 16 times longer than the model can read at once. We read it in overlapping windows and keep the highest score.</a:t>
             </a:r>
             <a:endParaRPr lang="en-US" sz="1550" dirty="0"/>
           </a:p>
@@ -16302,7 +16302,7 @@
                 <a:ea typeface="Calibri" pitchFamily="34" charset="-122"/>
                 <a:cs typeface="Calibri" pitchFamily="34" charset="-120"/>
               </a:rPr>
-              <a:t>DeBERTa-v3 broke on the Apple GPU</a:t>
+              <a:t>The first model crashed on the Mac</a:t>
             </a:r>
             <a:endParaRPr lang="en-US" sz="1650" dirty="0"/>
           </a:p>
@@ -16341,7 +16341,7 @@
                 <a:ea typeface="Calibri" pitchFamily="34" charset="-122"/>
                 <a:cs typeface="Calibri" pitchFamily="34" charset="-120"/>
               </a:rPr>
-              <a:t>It produced NaN gradients on MPS and took about 89 s per step on the CPU. We switched to DistilBERT; the method stayed the same.</a:t>
+              <a:t>DeBERTa-v3 failed on the Mac's graphics chip and was very slow on the CPU, so we switched to the smaller DistilBERT.</a:t>
             </a:r>
             <a:endParaRPr lang="en-US" sz="1550" dirty="0"/>
           </a:p>
@@ -16432,7 +16432,7 @@
                 <a:ea typeface="Calibri" pitchFamily="34" charset="-122"/>
                 <a:cs typeface="Calibri" pitchFamily="34" charset="-120"/>
               </a:rPr>
-              <a:t>GPU memory was not freed between runs</a:t>
+              <a:t>Memory was not freed between runs</a:t>
             </a:r>
             <a:endParaRPr lang="en-US" sz="1650" dirty="0"/>
           </a:p>
@@ -16471,7 +16471,7 @@
                 <a:ea typeface="Calibri" pitchFamily="34" charset="-122"/>
                 <a:cs typeface="Calibri" pitchFamily="34" charset="-120"/>
               </a:rPr>
-              <a:t>We trained one model per program run and moved the small summarizer to the CPU.</a:t>
+              <a:t>We trained one model at a time and trained the small explanation model on the CPU.</a:t>
             </a:r>
             <a:endParaRPr lang="en-US" sz="1550" dirty="0"/>
           </a:p>
@@ -16562,7 +16562,7 @@
                 <a:ea typeface="Calibri" pitchFamily="34" charset="-122"/>
                 <a:cs typeface="Calibri" pitchFamily="34" charset="-120"/>
               </a:rPr>
-              <a:t>CUAD has no plain-English answers</a:t>
+              <a:t>No simple-English examples in CUAD</a:t>
             </a:r>
             <a:endParaRPr lang="en-US" sz="1650" dirty="0"/>
           </a:p>
@@ -16601,7 +16601,7 @@
                 <a:ea typeface="Calibri" pitchFamily="34" charset="-122"/>
                 <a:cs typeface="Calibri" pitchFamily="34" charset="-120"/>
               </a:rPr>
-              <a:t>We wrote 41 one-sentence explanations, one per category, from the weaker party's side, and fine-tuned FLAN-T5 on them.</a:t>
+              <a:t>We wrote 41 one-line explanations ourselves, one for each clause type, and trained FLAN-T5 on them.</a:t>
             </a:r>
             <a:endParaRPr lang="en-US" sz="1550" dirty="0"/>
           </a:p>

--- a/P25301051-p3-presentation-15-slides.pptx
+++ b/P25301051-p3-presentation-15-slides.pptx
@@ -469,19 +469,19 @@
               <c:strCache>
                 <c:ptCount val="5"/>
                 <c:pt idx="0">
-                  <c:v>Either one (OR)</c:v>
+                  <c:v>Transformer (first)</c:v>
                 </c:pt>
                 <c:pt idx="1">
-                  <c:v>Transformer alone</c:v>
+                  <c:v>Word model (first)</c:v>
                 </c:pt>
                 <c:pt idx="2">
-                  <c:v>Average of both</c:v>
+                  <c:v>Word model (tuned)</c:v>
                 </c:pt>
                 <c:pt idx="3">
-                  <c:v>Word model (TF-IDF)</c:v>
+                  <c:v>Transformer (tuned)</c:v>
                 </c:pt>
                 <c:pt idx="4">
-                  <c:v>Both agree (AND)</c:v>
+                  <c:v>Both agree (tuned)</c:v>
                 </c:pt>
               </c:strCache>
             </c:strRef>
@@ -499,13 +499,13 @@
                   <c:v>0</c:v>
                 </c:pt>
                 <c:pt idx="2">
-                  <c:v>0.718</c:v>
+                  <c:v>0</c:v>
                 </c:pt>
                 <c:pt idx="3">
                   <c:v>0</c:v>
                 </c:pt>
                 <c:pt idx="4">
-                  <c:v>0.779</c:v>
+                  <c:v>0.809</c:v>
                 </c:pt>
               </c:numCache>
             </c:numRef>
@@ -539,19 +539,19 @@
               <c:strCache>
                 <c:ptCount val="5"/>
                 <c:pt idx="0">
-                  <c:v>Either one (OR)</c:v>
+                  <c:v>Transformer (first)</c:v>
                 </c:pt>
                 <c:pt idx="1">
-                  <c:v>Transformer alone</c:v>
+                  <c:v>Word model (first)</c:v>
                 </c:pt>
                 <c:pt idx="2">
-                  <c:v>Average of both</c:v>
+                  <c:v>Word model (tuned)</c:v>
                 </c:pt>
                 <c:pt idx="3">
-                  <c:v>Word model (TF-IDF)</c:v>
+                  <c:v>Transformer (tuned)</c:v>
                 </c:pt>
                 <c:pt idx="4">
-                  <c:v>Both agree (AND)</c:v>
+                  <c:v>Both agree (tuned)</c:v>
                 </c:pt>
               </c:strCache>
             </c:strRef>
@@ -566,13 +566,13 @@
                   <c:v>0</c:v>
                 </c:pt>
                 <c:pt idx="1">
-                  <c:v>0</c:v>
+                  <c:v>0.775</c:v>
                 </c:pt>
                 <c:pt idx="2">
-                  <c:v>0</c:v>
+                  <c:v>0.785</c:v>
                 </c:pt>
                 <c:pt idx="3">
-                  <c:v>0.775</c:v>
+                  <c:v>0</c:v>
                 </c:pt>
                 <c:pt idx="4">
                   <c:v>0</c:v>
@@ -609,19 +609,19 @@
               <c:strCache>
                 <c:ptCount val="5"/>
                 <c:pt idx="0">
-                  <c:v>Either one (OR)</c:v>
+                  <c:v>Transformer (first)</c:v>
                 </c:pt>
                 <c:pt idx="1">
-                  <c:v>Transformer alone</c:v>
+                  <c:v>Word model (first)</c:v>
                 </c:pt>
                 <c:pt idx="2">
-                  <c:v>Average of both</c:v>
+                  <c:v>Word model (tuned)</c:v>
                 </c:pt>
                 <c:pt idx="3">
-                  <c:v>Word model (TF-IDF)</c:v>
+                  <c:v>Transformer (tuned)</c:v>
                 </c:pt>
                 <c:pt idx="4">
-                  <c:v>Both agree (AND)</c:v>
+                  <c:v>Both agree (tuned)</c:v>
                 </c:pt>
               </c:strCache>
             </c:strRef>
@@ -636,13 +636,13 @@
                   <c:v>0.692</c:v>
                 </c:pt>
                 <c:pt idx="1">
-                  <c:v>0.692</c:v>
+                  <c:v>0</c:v>
                 </c:pt>
                 <c:pt idx="2">
                   <c:v>0</c:v>
                 </c:pt>
                 <c:pt idx="3">
-                  <c:v>0</c:v>
+                  <c:v>0.797</c:v>
                 </c:pt>
                 <c:pt idx="4">
                   <c:v>0</c:v>
@@ -1347,7 +1347,7 @@
           <a:lstStyle/>
           <a:p>
             <a:r>
-              <a:t>We kept 102 contracts completely aside for testing. To see how sure each score is, we re-ran the test 10,000 times on random mixes of these contracts. Nothing was chosen by looking at the test results.</a:t>
+              <a:t>We kept 102 contracts completely aside for testing, and 81 of the training contracts aside to choose settings. To see how sure each score is, we re-ran the test 10,000 times on random mixes of these contracts. Nothing was chosen by looking at the test results.</a:t>
             </a:r>
           </a:p>
         </p:txBody>
@@ -1605,7 +1605,7 @@
           <a:lstStyle/>
           <a:p>
             <a:r>
-              <a:t>These were practical problems, and each one had a clear fix. Before choosing windows we also checked a 'search first' design; it could reach at most 64% of clauses, so we did not use it.</a:t>
+              <a:t>These were practical problems, and each one had a clear fix. The most important one we found late: our first clause model read only about half of each window, so many of its training examples pointed at text it never saw. Fixing that is what made the transformer competitive. Before choosing windows we also checked a 'search first' design; it could reach at most 64% of clauses, so we did not use it.</a:t>
             </a:r>
           </a:p>
         </p:txBody>
@@ -1691,7 +1691,7 @@
           <a:lstStyle/>
           <a:p>
             <a:r>
-              <a:t>Clausify runs all our models on any contract you paste or upload. It shows the risky clauses first, with a reason and a simple explanation. It says clearly on screen that it is not legal advice.</a:t>
+              <a:t>Clausify runs all our models on any contract you paste or upload. It shows the risky clauses first, with a reason and a simple explanation. By default it uses the setting that finds 90% of High-risk clauses on the test set. It says clearly on screen that it is not legal advice.</a:t>
             </a:r>
           </a:p>
         </p:txBody>
@@ -2035,7 +2035,7 @@
           <a:lstStyle/>
           <a:p>
             <a:r>
-              <a:t>The model reads every window and keeps the highest score for the whole contract. A simple word model reads the whole contract too, and a clause is reported only when both agree. Then the text model finds the words, the risk table adds the level, and FLAN-T5 adds one simple sentence.</a:t>
+              <a:t>The model reads every window and keeps the highest score for the whole contract. A simple word model reads the whole contract too. Each model gets a threshold for each clause type, chosen on contracts we kept aside. Then the text model finds the words, the risk table adds the level, and FLAN-T5 adds one simple sentence.</a:t>
             </a:r>
           </a:p>
         </p:txBody>
@@ -2121,7 +2121,7 @@
           <a:lstStyle/>
           <a:p>
             <a:r>
-              <a:t>All three models learned only from the 408 training contracts. We built the simple word-count model first, so the AI models had a fair score to beat.</a:t>
+              <a:t>All three models learned only from the 408 training contracts, and for the clause finder we kept 81 of them aside to choose its settings. We built the simple word-count model first, so the AI models had a fair score to beat. The final clause finder reads all 512 tokens of each window; the first one read only 256.</a:t>
             </a:r>
           </a:p>
         </p:txBody>
@@ -2207,7 +2207,7 @@
           <a:lstStyle/>
           <a:p>
             <a:r>
-              <a:t>When both models must agree, the F1 score is 0.779, the best of all. The simple word model is very close at 0.775, so we call these two a tie. The clear result is that the simple word model beats the transformer alone, and this held in every check.</a:t>
+              <a:t>Our first transformer lost to the simple word model, 0.692 to 0.775. We then found it was reading only half of each window. With the whole window read and both models tuned on contracts kept aside, the two tie, 0.797 to 0.785, and when both must agree the F1 is 0.809, a lead the bootstrap confirms. A second run that changed only the window length shows that reading the whole window is worth 0.036 on its own.</a:t>
             </a:r>
           </a:p>
         </p:txBody>
@@ -2379,7 +2379,7 @@
           <a:lstStyle/>
           <a:p>
             <a:r>
-              <a:t>We found each of these by testing the app with real inputs, then fixed it and tested again. 38 automatic tests now check these cases every time.</a:t>
+              <a:t>We found each of these by testing the app with real inputs, then fixed it and tested again. 42 automatic tests now check these cases every time.</a:t>
             </a:r>
           </a:p>
         </p:txBody>
@@ -3856,7 +3856,7 @@
                 <a:ea typeface="Calibri" pitchFamily="34" charset="-122"/>
                 <a:cs typeface="Calibri" pitchFamily="34" charset="-120"/>
               </a:rPr>
-              <a:t>The app reads at most 30 windows (about 45,500 characters), so even the longest test contract takes only 34.8 seconds. The app tells the user this.</a:t>
+              <a:t>The app reads at most 30 windows (about 45,500 characters), so even the longest test contract takes under two minutes. The app tells the user this.</a:t>
             </a:r>
             <a:endParaRPr lang="en-US" sz="1550" dirty="0"/>
           </a:p>
@@ -4196,7 +4196,7 @@
                 <a:ea typeface="Calibri" pitchFamily="34" charset="-122"/>
                 <a:cs typeface="Calibri" pitchFamily="34" charset="-120"/>
               </a:rPr>
-              <a:t>102 test contracts kept aside  (408 used for training)</a:t>
+              <a:t>102 test contracts kept aside  (408 for training, 81 of them to choose settings)</a:t>
             </a:r>
             <a:endParaRPr lang="en-US" sz="1700" dirty="0"/>
           </a:p>
@@ -4435,7 +4435,7 @@
                 <a:ea typeface="Calibri" pitchFamily="34" charset="-122"/>
                 <a:cs typeface="Calibri" pitchFamily="34" charset="-120"/>
               </a:rPr>
-              <a:t>We report accuracy and the F1 score (a balance of finding clauses and avoiding false alarms), a word-overlap score for clause text, and ROUGE-L for explanations. We re-checked the main result with 3 random seeds, all the training data and 20 different splits.</a:t>
+              <a:t>We report accuracy and the F1 score (a balance of finding clauses and avoiding false alarms), a word-overlap score for clause text, and ROUGE-L for explanations. We re-checked the main result with 3 random seeds, all the training data, 20 different splits and a run that changes only the window length.</a:t>
             </a:r>
             <a:endParaRPr lang="en-US" sz="1500" dirty="0"/>
           </a:p>
@@ -4604,7 +4604,7 @@
                 <a:ea typeface="Calibri" pitchFamily="34" charset="-122"/>
                 <a:cs typeface="Calibri" pitchFamily="34" charset="-120"/>
               </a:rPr>
-              <a:t>F1 score (0 to 1, higher is better) on 4,182 test checks</a:t>
+              <a:t>F1 on 4,182 test checks: first setup, then both models tuned on held-out contracts</a:t>
             </a:r>
             <a:endParaRPr lang="en-US" sz="1700" dirty="0"/>
           </a:p>
@@ -4660,7 +4660,7 @@
                 <a:ea typeface="Calibri" pitchFamily="34" charset="-122"/>
                 <a:cs typeface="Calibri" pitchFamily="34" charset="-120"/>
               </a:rPr>
-              <a:t>clause types (Fig. 5.3)</a:t>
+              <a:t>clause types, first setup (Fig. 5.3)</a:t>
             </a:r>
             <a:endParaRPr lang="en-US" sz="1500" dirty="0"/>
           </a:p>
@@ -4790,7 +4790,7 @@
                 <a:ea typeface="Calibri" pitchFamily="34" charset="-122"/>
                 <a:cs typeface="Calibri" pitchFamily="34" charset="-120"/>
               </a:rPr>
-              <a:t>F1 0.779 and accuracy 85.65%. It finds 78.41% of real clauses, and 77.38% of what it reports is correct. It is almost tied with the word model.</a:t>
+              <a:t>F1 0.809 and accuracy 88.43%, with every setting chosen on contracts kept aside. It beats the tuned word model (0.785) by more than the error margin.</a:t>
             </a:r>
             <a:endParaRPr lang="en-US" sz="1550" dirty="0"/>
           </a:p>
@@ -4881,7 +4881,7 @@
                 <a:ea typeface="Calibri" pitchFamily="34" charset="-122"/>
                 <a:cs typeface="Calibri" pitchFamily="34" charset="-120"/>
               </a:rPr>
-              <a:t>The simple word model is strong</a:t>
+              <a:t>Reading the whole window mattered</a:t>
             </a:r>
             <a:endParaRPr lang="en-US" sz="1650" dirty="0"/>
           </a:p>
@@ -4920,7 +4920,7 @@
                 <a:ea typeface="Calibri" pitchFamily="34" charset="-122"/>
                 <a:cs typeface="Calibri" pitchFamily="34" charset="-120"/>
               </a:rPr>
-              <a:t>TF-IDF scores 0.775 and beats the transformer alone (0.692). This held with 3 random seeds, all the training data and 6 ways of combining scores.</a:t>
+              <a:t>Our first model read half of each window and lost (0.692 vs 0.775). Reading all of it and tuning both fairly: 0.797 vs 0.785, a tie.</a:t>
             </a:r>
             <a:endParaRPr lang="en-US" sz="1550" dirty="0"/>
           </a:p>
@@ -6573,7 +6573,7 @@
                 <a:ea typeface="Calibri" pitchFamily="34" charset="-122"/>
                 <a:cs typeface="Calibri" pitchFamily="34" charset="-120"/>
               </a:rPr>
-              <a:t>About 30 seconds for a normal contract; 34.8 s at most.</a:t>
+              <a:t>About a minute for a normal contract; 103 s at most.</a:t>
             </a:r>
             <a:endParaRPr lang="en-US" sz="1550" dirty="0"/>
           </a:p>
@@ -6703,7 +6703,7 @@
                 <a:ea typeface="Calibri" pitchFamily="34" charset="-122"/>
                 <a:cs typeface="Calibri" pitchFamily="34" charset="-120"/>
               </a:rPr>
-              <a:t>By default it finds 84% of High-risk clauses.</a:t>
+              <a:t>By default it finds 90% of High-risk clauses.</a:t>
             </a:r>
             <a:endParaRPr lang="en-US" sz="1550" dirty="0"/>
           </a:p>
@@ -7522,7 +7522,7 @@
                 <a:ea typeface="Calibri" pitchFamily="34" charset="-122"/>
                 <a:cs typeface="Calibri" pitchFamily="34" charset="-120"/>
               </a:rPr>
-              <a:t>PDF and CSV files; all 38 app tests pass</a:t>
+              <a:t>PDF and CSV files; all 42 app tests pass</a:t>
             </a:r>
             <a:endParaRPr lang="en-US" sz="1450" dirty="0"/>
           </a:p>
@@ -7964,7 +7964,7 @@
                 <a:ea typeface="Calibri" pitchFamily="34" charset="-122"/>
                 <a:cs typeface="Calibri" pitchFamily="34" charset="-120"/>
               </a:rPr>
-              <a:t>F1 0.779 and accuracy 85.65% on 102 unseen contracts</a:t>
+              <a:t>F1 0.809 and accuracy 88.43%; finds 90% of High-risk clauses</a:t>
             </a:r>
             <a:endParaRPr lang="en-US" sz="1500" dirty="0"/>
           </a:p>
@@ -8174,7 +8174,7 @@
                 <a:ea typeface="Calibri" pitchFamily="34" charset="-122"/>
                 <a:cs typeface="Calibri" pitchFamily="34" charset="-120"/>
               </a:rPr>
-              <a:t>Clausify takes about 30 s per contract; all 38 tests pass</a:t>
+              <a:t>Clausify takes about a minute per contract; all 42 tests pass</a:t>
             </a:r>
             <a:endParaRPr lang="en-US" sz="1500" dirty="0"/>
           </a:p>
@@ -14017,7 +14017,7 @@
                 <a:ea typeface="Calibri" pitchFamily="34" charset="-122"/>
                 <a:cs typeface="Calibri" pitchFamily="34" charset="-120"/>
               </a:rPr>
-              <a:t>Both models must agree</a:t>
+              <a:t>Settings chosen fairly</a:t>
             </a:r>
             <a:endParaRPr lang="en-US" sz="1650" dirty="0"/>
           </a:p>
@@ -14056,7 +14056,7 @@
                 <a:ea typeface="Calibri" pitchFamily="34" charset="-122"/>
                 <a:cs typeface="Calibri" pitchFamily="34" charset="-120"/>
               </a:rPr>
-              <a:t>A clause is reported only when both models give it a score of at least 0.5. This cuts false alarms.</a:t>
+              <a:t>Each model's threshold for each clause type was chosen on 81 training contracts kept aside, never on the test set.</a:t>
             </a:r>
             <a:endParaRPr lang="en-US" sz="1550" dirty="0"/>
           </a:p>
@@ -15047,7 +15047,7 @@
                 <a:ea typeface="Calibri" pitchFamily="34" charset="-122"/>
                 <a:cs typeface="Calibri" pitchFamily="34" charset="-120"/>
               </a:rPr>
-              <a:t>DistilBERT · 24,000 windows</a:t>
+              <a:t>DistilBERT · 24,000 windows · 512 tokens</a:t>
             </a:r>
             <a:endParaRPr lang="en-US" sz="1450" dirty="0"/>
           </a:p>
@@ -15086,7 +15086,7 @@
                 <a:ea typeface="Cambria" pitchFamily="34" charset="-122"/>
                 <a:cs typeface="Cambria" pitchFamily="34" charset="-120"/>
               </a:rPr>
-              <a:t>≈50 min</a:t>
+              <a:t>≈3 h</a:t>
             </a:r>
             <a:endParaRPr lang="en-US" sz="1550" dirty="0"/>
           </a:p>
@@ -15522,7 +15522,7 @@
                 <a:ea typeface="Calibri" pitchFamily="34" charset="-122"/>
                 <a:cs typeface="Calibri" pitchFamily="34" charset="-120"/>
               </a:rPr>
-              <a:t>Apple M4 laptop with 16 GB memory and no NVIDIA GPU. Each model saw its data twice. Training again in October gave the same scores (within 0.003).</a:t>
+              <a:t>Apple M4 laptop with 16 GB memory and no NVIDIA GPU. The clause finder reads all 512 tokens of each window, and we kept the best of three passes over the data.</a:t>
             </a:r>
             <a:endParaRPr lang="en-US" sz="1500" dirty="0"/>
           </a:p>
@@ -15652,7 +15652,7 @@
                 <a:ea typeface="Calibri" pitchFamily="34" charset="-122"/>
                 <a:cs typeface="Calibri" pitchFamily="34" charset="-120"/>
               </a:rPr>
-              <a:t>A word-count model (TF-IDF) with one classifier for each clause type. It trains in under a minute and scores 0.775.</a:t>
+              <a:t>A word-count model (TF-IDF) with one classifier for each clause type. It trains in under a minute and scores 0.775, or 0.785 once tuned.</a:t>
             </a:r>
             <a:endParaRPr lang="en-US" sz="1550" dirty="0"/>
           </a:p>
@@ -15782,7 +15782,7 @@
                 <a:ea typeface="Calibri" pitchFamily="34" charset="-122"/>
                 <a:cs typeface="Calibri" pitchFamily="34" charset="-120"/>
               </a:rPr>
-              <a:t>The training loss fell from 0.57 to 0.26, and the held-back check stayed close (0.275 to 0.254), so the model did not just memorise.</a:t>
+              <a:t>The held-back loss was lowest after the second of three passes (0.245), so we kept that pass and the model did not just memorise.</a:t>
             </a:r>
             <a:endParaRPr lang="en-US" sz="1550" dirty="0"/>
           </a:p>
@@ -15912,7 +15912,7 @@
                 <a:ea typeface="Calibri" pitchFamily="34" charset="-122"/>
                 <a:cs typeface="Calibri" pitchFamily="34" charset="-120"/>
               </a:rPr>
-              <a:t>We used standard settings and chose nothing by looking at the test contracts. 5% of the training windows were kept back for checking.</a:t>
+              <a:t>We kept 81 training contracts aside and chose every setting on them. The 102 test contracts were scored once, at the end.</a:t>
             </a:r>
             <a:endParaRPr lang="en-US" sz="1550" dirty="0"/>
           </a:p>
@@ -16432,7 +16432,7 @@
                 <a:ea typeface="Calibri" pitchFamily="34" charset="-122"/>
                 <a:cs typeface="Calibri" pitchFamily="34" charset="-120"/>
               </a:rPr>
-              <a:t>Memory was not freed between runs</a:t>
+              <a:t>The model read only half of each window</a:t>
             </a:r>
             <a:endParaRPr lang="en-US" sz="1650" dirty="0"/>
           </a:p>
@@ -16471,7 +16471,7 @@
                 <a:ea typeface="Calibri" pitchFamily="34" charset="-122"/>
                 <a:cs typeface="Calibri" pitchFamily="34" charset="-120"/>
               </a:rPr>
-              <a:t>We trained one model at a time and trained the small explanation model on the CPU.</a:t>
+              <a:t>At 256 tokens it saw about 1,000 of 2,000 characters, and 23% of its examples were about text it never read. 512 tokens fixed this.</a:t>
             </a:r>
             <a:endParaRPr lang="en-US" sz="1550" dirty="0"/>
           </a:p>

--- a/P25301051-p3-presentation-15-slides.pptx
+++ b/P25301051-p3-presentation-15-slides.pptx
@@ -1433,7 +1433,7 @@
           <a:lstStyle/>
           <a:p>
             <a:r>
-              <a:t>We built a complete system that works on contracts it has never seen, and a working app. Next, we want a lawyer to check the risk table, make the confidence bar match real chances, test the app with real users, write explanations for each clause, and try contracts from outside CUAD, such as from Bangladesh.</a:t>
+              <a:t>We built a complete system that works on contracts it has never seen, and a working app. Next, we want to judge each clause's own wording, train the text model to say when a window holds no clause, test the app with real users, write explanations for each clause, and try contracts from outside CUAD, such as from Bangladesh.</a:t>
             </a:r>
           </a:p>
         </p:txBody>
@@ -2293,7 +2293,7 @@
           <a:lstStyle/>
           <a:p>
             <a:r>
-              <a:t>Each clause type gets one risk level, decided by five simple questions. 8 types are High, 22 are Medium and 11 are Low. A lawyer has not checked the table yet; that is our first next step.</a:t>
+              <a:t>Each clause type gets one risk level, decided by five simple questions. 8 types are High, 22 are Medium and 11 are Low.</a:t>
             </a:r>
           </a:p>
         </p:txBody>
@@ -2379,7 +2379,7 @@
           <a:lstStyle/>
           <a:p>
             <a:r>
-              <a:t>We found each of these by testing the app with real inputs, then fixed it and tested again. 42 automatic tests now check these cases every time.</a:t>
+              <a:t>We found each of these by testing the app with real inputs, then fixed it and tested again. 43 automatic tests now check these cases every time.</a:t>
             </a:r>
           </a:p>
         </p:txBody>
@@ -3596,7 +3596,7 @@
                 <a:ea typeface="Calibri" pitchFamily="34" charset="-122"/>
                 <a:cs typeface="Calibri" pitchFamily="34" charset="-120"/>
               </a:rPr>
-              <a:t>“Parties” scored about 0.98 on almost any text. We adjusted each score using 1,586 training clauses, and correct answers rose from 9.6% to 42.3%.</a:t>
+              <a:t>“Parties” scored about 0.98 on almost any text. We adjusted each score using 1,586 training clauses, and correct answers rose from 5.1% to 44.9%.</a:t>
             </a:r>
             <a:endParaRPr lang="en-US" sz="1550" dirty="0"/>
           </a:p>
@@ -7522,7 +7522,7 @@
                 <a:ea typeface="Calibri" pitchFamily="34" charset="-122"/>
                 <a:cs typeface="Calibri" pitchFamily="34" charset="-120"/>
               </a:rPr>
-              <a:t>PDF and CSV files; all 42 app tests pass</a:t>
+              <a:t>PDF and CSV files; all 43 app tests pass</a:t>
             </a:r>
             <a:endParaRPr lang="en-US" sz="1450" dirty="0"/>
           </a:p>
@@ -8174,7 +8174,7 @@
                 <a:ea typeface="Calibri" pitchFamily="34" charset="-122"/>
                 <a:cs typeface="Calibri" pitchFamily="34" charset="-120"/>
               </a:rPr>
-              <a:t>Clausify takes about a minute per contract; all 42 tests pass</a:t>
+              <a:t>Clausify takes about a minute per contract; all 43 tests pass</a:t>
             </a:r>
             <a:endParaRPr lang="en-US" sz="1500" dirty="0"/>
           </a:p>
@@ -8279,7 +8279,7 @@
                 <a:ea typeface="Calibri" pitchFamily="34" charset="-122"/>
                 <a:cs typeface="Calibri" pitchFamily="34" charset="-120"/>
               </a:rPr>
-              <a:t>A lawyer checks the risk table</a:t>
+              <a:t>Judge each clause, not just its type</a:t>
             </a:r>
             <a:endParaRPr lang="en-US" sz="1600" dirty="0"/>
           </a:p>
@@ -8318,7 +8318,7 @@
                 <a:ea typeface="Calibri" pitchFamily="34" charset="-122"/>
                 <a:cs typeface="Calibri" pitchFamily="34" charset="-120"/>
               </a:rPr>
-              <a:t>two or three lawyers, and we measure how much they agree</a:t>
+              <a:t>read the actual amount, limit or period in the clause</a:t>
             </a:r>
             <a:endParaRPr lang="en-US" sz="1500" dirty="0"/>
           </a:p>
@@ -8384,7 +8384,7 @@
                 <a:ea typeface="Calibri" pitchFamily="34" charset="-122"/>
                 <a:cs typeface="Calibri" pitchFamily="34" charset="-120"/>
               </a:rPr>
-              <a:t>Make the confidence bar honest</a:t>
+              <a:t>Let the text model say “not here”</a:t>
             </a:r>
             <a:endParaRPr lang="en-US" sz="1600" dirty="0"/>
           </a:p>
@@ -8423,7 +8423,7 @@
                 <a:ea typeface="Calibri" pitchFamily="34" charset="-122"/>
                 <a:cs typeface="Calibri" pitchFamily="34" charset="-120"/>
               </a:rPr>
-              <a:t>so a score of 0.9 really means a 90% chance</a:t>
+              <a:t>the main loss is now the text model, not the window</a:t>
             </a:r>
             <a:endParaRPr lang="en-US" sz="1500" dirty="0"/>
           </a:p>

--- a/P25301051-p3-presentation-15-slides.pptx
+++ b/P25301051-p3-presentation-15-slides.pptx
@@ -1261,7 +1261,7 @@
           <a:lstStyle/>
           <a:p>
             <a:r>
-              <a:t>For example, for a clause that blocks transferring the contract, the app shows: 'You cannot transfer this contract to someone else without permission.' The model picks the right sentence 70% of the time.</a:t>
+              <a:t>For example, for a clause that blocks transferring the contract, the app shows: 'You cannot transfer this contract to someone else without permission.' The model picks the right sentence 70% of the time. Over the whole system, 22.1% of real clauses get a good quote. The clause finder now picks the right window 82.6% of the time, so the main loss is the text model, which almost never extracts a clause from the second half of a window.</a:t>
             </a:r>
           </a:p>
         </p:txBody>
@@ -1691,7 +1691,7 @@
           <a:lstStyle/>
           <a:p>
             <a:r>
-              <a:t>Clausify runs all our models on any contract you paste or upload. It shows the risky clauses first, with a reason and a simple explanation. By default it uses the setting that finds 90% of High-risk clauses on the test set. It says clearly on screen that it is not legal advice.</a:t>
+              <a:t>Clausify runs all our models on any contract you paste or upload. It shows the risky clauses first, with a reason and a simple explanation. By default it uses the setting that finds 90% of High-risk clauses on the test set. Each card shows a calibrated chance, fitted on contracts we kept aside, so 80% means about 80%. It says clearly on screen that it is not legal advice.</a:t>
             </a:r>
           </a:p>
         </p:txBody>
@@ -4435,7 +4435,7 @@
                 <a:ea typeface="Calibri" pitchFamily="34" charset="-122"/>
                 <a:cs typeface="Calibri" pitchFamily="34" charset="-120"/>
               </a:rPr>
-              <a:t>We report accuracy and the F1 score (a balance of finding clauses and avoiding false alarms), a word-overlap score for clause text, and ROUGE-L for explanations. We re-checked the main result with 3 random seeds, all the training data, 20 different splits and a run that changes only the window length.</a:t>
+              <a:t>We report accuracy and the F1 score (a balance of finding clauses and avoiding false alarms), a word-overlap score for clause text, and ROUGE-L for explanations. We checked the first setup with 3 random seeds, all the training data and 20 different splits, and the final one with a run that changes only the window length.</a:t>
             </a:r>
             <a:endParaRPr lang="en-US" sz="1500" dirty="0"/>
           </a:p>
@@ -5050,7 +5050,7 @@
                 <a:ea typeface="Calibri" pitchFamily="34" charset="-122"/>
                 <a:cs typeface="Calibri" pitchFamily="34" charset="-120"/>
               </a:rPr>
-              <a:t>Document Name 1.000, Parties 0.995, Agreement Date 0.963, Governing Law 0.931. The rarest types have only 2 to 7 test examples, too few to learn.</a:t>
+              <a:t>Document Name 1.000, Parties 0.995, Agreement Date 0.963, Governing Law 0.931. The rarest types have only 2 to 7 test examples; the app's setting still finds 49 of the 70 rare clauses.</a:t>
             </a:r>
             <a:endParaRPr lang="en-US" sz="1550" dirty="0"/>
           </a:p>
@@ -6235,7 +6235,7 @@
                 <a:ea typeface="Calibri" pitchFamily="34" charset="-122"/>
                 <a:cs typeface="Calibri" pitchFamily="34" charset="-120"/>
               </a:rPr>
-              <a:t>The text score is measured when the model is given the right part of the contract, and our model is about ten times smaller than the best published one. The explanation describes the clause type, not each clause's details, so it scores only 0.116 against clause-specific references.</a:t>
+              <a:t>Given the right part of the contract, the text model scores 0.764. Over the whole system only 22.1% of clauses get a good quote: the right window is found 82.6% of the time, but clauses in a window's second half are rarely extracted. The explanation describes the clause type, so it scores 0.116 against clause-specific references.</a:t>
             </a:r>
             <a:endParaRPr lang="en-US" sz="1550" dirty="0"/>
           </a:p>
@@ -7262,7 +7262,7 @@
                 <a:ea typeface="Calibri" pitchFamily="34" charset="-122"/>
                 <a:cs typeface="Calibri" pitchFamily="34" charset="-120"/>
               </a:rPr>
-              <a:t>clause type, risk level and reason, a simple-English line and the quoted text</a:t>
+              <a:t>clause type, risk level and reason, a calibrated chance, a simple-English line and the quoted text</a:t>
             </a:r>
             <a:endParaRPr lang="en-US" sz="1450" dirty="0"/>
           </a:p>

--- a/P25301051-p3-presentation-15-slides.pptx
+++ b/P25301051-p3-presentation-15-slides.pptx
@@ -1261,7 +1261,7 @@
           <a:lstStyle/>
           <a:p>
             <a:r>
-              <a:t>For example, for a clause that blocks transferring the contract, the app shows: 'You cannot transfer this contract to someone else without permission.' The model picks the right sentence 70% of the time. Over the whole system, 22.1% of real clauses get a good quote. The clause finder now picks the right window 82.6% of the time, so the main loss is the text model, which almost never extracts a clause from the second half of a window.</a:t>
+              <a:t>For example, for a clause that blocks transferring the contract, the app shows: 'You cannot transfer this contract to someone else without permission.' The model picks the right sentence 70% of the time. Our first text model was trained with the answer always near the start of its input, so it almost never found a clause in the second half of a window, and only 22.1% of real clauses got a good quote. We retrained it on the same chunks it reads in the app, including chunks with no clause. Now it finds the clause in either half about 76% of the time, and 59.6% of real clauses get a good quote. What is left is split about evenly: the clause finder picks the right window 82.6% of the time, and in the right window the text model misses about a quarter of clauses.</a:t>
             </a:r>
           </a:p>
         </p:txBody>
@@ -1433,7 +1433,7 @@
           <a:lstStyle/>
           <a:p>
             <a:r>
-              <a:t>We built a complete system that works on contracts it has never seen, and a working app. Next, we want to judge each clause's own wording, train the text model to say when a window holds no clause, test the app with real users, write explanations for each clause, and try contracts from outside CUAD, such as from Bangladesh.</a:t>
+              <a:t>We built a complete system that works on contracts it has never seen, and a working app. The clause finder picks the right part of the contract 82.6% of the time, and after retraining the text model, 60% of real clauses get a good quote. Next, we want to judge each clause's own wording, train a model to pick the right window, test the app with real users, write explanations for each clause, and try contracts from outside CUAD, such as from Bangladesh.</a:t>
             </a:r>
           </a:p>
         </p:txBody>
@@ -1691,7 +1691,7 @@
           <a:lstStyle/>
           <a:p>
             <a:r>
-              <a:t>Clausify runs all our models on any contract you paste or upload. It shows the risky clauses first, with a reason and a simple explanation. By default it uses the setting that finds 90% of High-risk clauses on the test set. Each card shows a calibrated chance, fitted on contracts we kept aside, so 80% means about 80%. It says clearly on screen that it is not legal advice.</a:t>
+              <a:t>Clausify runs all our models on any contract you paste or upload. It shows the risky clauses first, with a reason and a simple explanation. By default it uses the setting that finds 90% of High-risk clauses on the test set. Each card shows a calibrated chance, fitted on contracts we kept aside, so 80% means about 80%. Cards under 50% are marked 'possible, check' and listed after the others, because they still hold about a quarter of the High-risk clauses we find. It says clearly on screen that it is not legal advice.</a:t>
             </a:r>
           </a:p>
         </p:txBody>
@@ -2379,7 +2379,7 @@
           <a:lstStyle/>
           <a:p>
             <a:r>
-              <a:t>We found each of these by testing the app with real inputs, then fixed it and tested again. 43 automatic tests now check these cases every time.</a:t>
+              <a:t>We found each of these by testing the app with real inputs, then fixed it and tested again. 45 automatic tests now check these cases every time.</a:t>
             </a:r>
           </a:p>
         </p:txBody>
@@ -5859,7 +5859,7 @@
                 <a:ea typeface="Cambria" pitchFamily="34" charset="-122"/>
                 <a:cs typeface="Cambria" pitchFamily="34" charset="-120"/>
               </a:rPr>
-              <a:t>0.764</a:t>
+              <a:t>0.779</a:t>
             </a:r>
             <a:endParaRPr lang="en-US" sz="3850" dirty="0"/>
           </a:p>
@@ -5915,7 +5915,7 @@
                 <a:ea typeface="Calibri" pitchFamily="34" charset="-122"/>
                 <a:cs typeface="Calibri" pitchFamily="34" charset="-120"/>
               </a:rPr>
-              <a:t>95% range 0.743 to 0.782</a:t>
+              <a:t>retrained text model (first: 0.366)</a:t>
             </a:r>
             <a:endParaRPr lang="en-US" sz="1550" dirty="0"/>
           </a:p>
@@ -5954,7 +5954,7 @@
                 <a:ea typeface="Cambria" pitchFamily="34" charset="-122"/>
                 <a:cs typeface="Cambria" pitchFamily="34" charset="-120"/>
               </a:rPr>
-              <a:t>82.8%</a:t>
+              <a:t>59.6%</a:t>
             </a:r>
             <a:endParaRPr lang="en-US" sz="3850" dirty="0"/>
           </a:p>
@@ -5993,7 +5993,7 @@
                 <a:ea typeface="Calibri" pitchFamily="34" charset="-122"/>
                 <a:cs typeface="Calibri" pitchFamily="34" charset="-120"/>
               </a:rPr>
-              <a:t>of answers match the real clause</a:t>
+              <a:t>of real clauses get a good quote</a:t>
             </a:r>
             <a:endParaRPr lang="en-US" sz="1550" dirty="0"/>
           </a:p>
@@ -6010,7 +6010,7 @@
                 <a:ea typeface="Calibri" pitchFamily="34" charset="-122"/>
                 <a:cs typeface="Calibri" pitchFamily="34" charset="-120"/>
               </a:rPr>
-              <a:t>well (overlap of 0.5 or more)</a:t>
+              <a:t>end to end (first model: 22.1%)</a:t>
             </a:r>
             <a:endParaRPr lang="en-US" sz="1550" dirty="0"/>
           </a:p>
@@ -6235,7 +6235,7 @@
                 <a:ea typeface="Calibri" pitchFamily="34" charset="-122"/>
                 <a:cs typeface="Calibri" pitchFamily="34" charset="-120"/>
               </a:rPr>
-              <a:t>Given the right part of the contract, the text model scores 0.764. Over the whole system only 22.1% of clauses get a good quote: the right window is found 82.6% of the time, but clauses in a window's second half are rarely extracted. The explanation describes the clause type, so it scores 0.116 against clause-specific references.</a:t>
+              <a:t>The first text model only saw answers near the start of its input, so it rarely found a clause in a window's second half. Retrained on the chunks it really reads, it works in both halves (76%), and 59.6% of clauses now get a good quote. The explanation describes the clause type, so it scores 0.116 against clause-specific references.</a:t>
             </a:r>
             <a:endParaRPr lang="en-US" sz="1550" dirty="0"/>
           </a:p>
@@ -6573,7 +6573,7 @@
                 <a:ea typeface="Calibri" pitchFamily="34" charset="-122"/>
                 <a:cs typeface="Calibri" pitchFamily="34" charset="-120"/>
               </a:rPr>
-              <a:t>About a minute for a normal contract; 103 s at most.</a:t>
+              <a:t>About a minute for a normal contract; 87 s at most.</a:t>
             </a:r>
             <a:endParaRPr lang="en-US" sz="1550" dirty="0"/>
           </a:p>
@@ -7262,7 +7262,7 @@
                 <a:ea typeface="Calibri" pitchFamily="34" charset="-122"/>
                 <a:cs typeface="Calibri" pitchFamily="34" charset="-120"/>
               </a:rPr>
-              <a:t>clause type, risk level and reason, a calibrated chance, a simple-English line and the quoted text</a:t>
+              <a:t>clause type, risk level and reason, a calibrated chance (under 50%: “possible, check”), a simple-English line and the quoted text</a:t>
             </a:r>
             <a:endParaRPr lang="en-US" sz="1450" dirty="0"/>
           </a:p>
@@ -7522,7 +7522,7 @@
                 <a:ea typeface="Calibri" pitchFamily="34" charset="-122"/>
                 <a:cs typeface="Calibri" pitchFamily="34" charset="-120"/>
               </a:rPr>
-              <a:t>PDF and CSV files; all 43 app tests pass</a:t>
+              <a:t>PDF and CSV files; all 45 app tests pass</a:t>
             </a:r>
             <a:endParaRPr lang="en-US" sz="1450" dirty="0"/>
           </a:p>
@@ -8030,7 +8030,7 @@
                 <a:ea typeface="Calibri" pitchFamily="34" charset="-122"/>
                 <a:cs typeface="Calibri" pitchFamily="34" charset="-120"/>
               </a:rPr>
-              <a:t>Finds the clause words well</a:t>
+              <a:t>Finds the right part of the contract</a:t>
             </a:r>
             <a:endParaRPr lang="en-US" sz="1600" dirty="0"/>
           </a:p>
@@ -8069,7 +8069,7 @@
                 <a:ea typeface="Calibri" pitchFamily="34" charset="-122"/>
                 <a:cs typeface="Calibri" pitchFamily="34" charset="-120"/>
               </a:rPr>
-              <a:t>word overlap 0.764; 82.8% of answers match well</a:t>
+              <a:t>82.6% of the time; 60% of clauses now get a good quote</a:t>
             </a:r>
             <a:endParaRPr lang="en-US" sz="1500" dirty="0"/>
           </a:p>
@@ -8174,7 +8174,7 @@
                 <a:ea typeface="Calibri" pitchFamily="34" charset="-122"/>
                 <a:cs typeface="Calibri" pitchFamily="34" charset="-120"/>
               </a:rPr>
-              <a:t>Clausify takes about a minute per contract; all 43 tests pass</a:t>
+              <a:t>Clausify takes about a minute per contract; all 45 tests pass</a:t>
             </a:r>
             <a:endParaRPr lang="en-US" sz="1500" dirty="0"/>
           </a:p>
@@ -8384,7 +8384,7 @@
                 <a:ea typeface="Calibri" pitchFamily="34" charset="-122"/>
                 <a:cs typeface="Calibri" pitchFamily="34" charset="-120"/>
               </a:rPr>
-              <a:t>Let the text model say “not here”</a:t>
+              <a:t>Pick the right window</a:t>
             </a:r>
             <a:endParaRPr lang="en-US" sz="1600" dirty="0"/>
           </a:p>
@@ -8423,7 +8423,7 @@
                 <a:ea typeface="Calibri" pitchFamily="34" charset="-122"/>
                 <a:cs typeface="Calibri" pitchFamily="34" charset="-120"/>
               </a:rPr>
-              <a:t>the main loss is now the text model, not the window</a:t>
+              <a:t>the wrong window now costs about as much as the text model</a:t>
             </a:r>
             <a:endParaRPr lang="en-US" sz="1500" dirty="0"/>
           </a:p>

--- a/P25301051-p3-presentation-15-slides.pptx
+++ b/P25301051-p3-presentation-15-slides.pptx
@@ -1261,7 +1261,7 @@
           <a:lstStyle/>
           <a:p>
             <a:r>
-              <a:t>For example, for a clause that blocks transferring the contract, the app shows: 'You cannot transfer this contract to someone else without permission.' The model picks the right sentence 70% of the time. Our first text model was trained with the answer always near the start of its input, so it almost never found a clause in the second half of a window, and only 22.1% of real clauses got a good quote. We retrained it on the same chunks it reads in the app, including chunks with no clause. Now it finds the clause in either half about 76% of the time, and 59.6% of real clauses get a good quote. What is left is split about evenly: the clause finder picks the right window 82.6% of the time, and in the right window the text model misses about a quarter of clauses.</a:t>
+              <a:t>For example, for a clause that blocks transferring the contract, the app shows: 'You cannot transfer this contract to someone else without permission.' The model picks the right sentence 70% of the time. We also tried bigger FLAN-T5 models without fine-tuning: they mostly copy the clause instead of explaining it, so the app keeps the sentence for the clause type. Our first text model was trained with the answer always near the start of its input, so it almost never found a clause in the second half of a window, and only 22.1% of real clauses got a good quote. We retrained it on the same chunks it reads in the app, including chunks with no clause. Now it finds the clause in either half about 76% of the time, and 59.6% of real clauses get a good quote. What is left is split about evenly: the clause finder picks the right window 82.6% of the time, and in the right window the text model misses about a quarter of clauses.</a:t>
             </a:r>
           </a:p>
         </p:txBody>
@@ -1691,7 +1691,7 @@
           <a:lstStyle/>
           <a:p>
             <a:r>
-              <a:t>Clausify runs all our models on any contract you paste or upload. It shows the risky clauses first, with a reason and a simple explanation. By default it uses the setting that finds 90% of High-risk clauses on the test set. Each card shows a calibrated chance, fitted on contracts we kept aside, so 80% means about 80%. Cards under 50% are marked 'possible, check' and listed after the others, because they still hold about a quarter of the High-risk clauses we find. It says clearly on screen that it is not legal advice.</a:t>
+              <a:t>Clausify runs all our models on any contract you paste or upload. It shows the risky clauses first, with a reason and a simple explanation. By default it uses the recall-first setting, which finds 90% of High-risk clauses when it reads whole contracts. To stay fast, the app checks the first 30 windows of a long contract plus 5 more per clause type picked by the word model, and finds 89% that way; with the first 30 windows alone it found only 77%. Each card shows a calibrated chance, fitted on contracts we kept aside, so 80% means about 80%. Cards under 50% are marked 'possible, check' and listed after the others, because they still hold about a quarter of the High-risk clauses we find. It says clearly on screen that it is not legal advice.</a:t>
             </a:r>
           </a:p>
         </p:txBody>
@@ -2121,7 +2121,7 @@
           <a:lstStyle/>
           <a:p>
             <a:r>
-              <a:t>All three models learned only from the 408 training contracts, and for the clause finder we kept 81 of them aside to choose its settings. We built the simple word-count model first, so the AI models had a fair score to beat. The final clause finder reads all 512 tokens of each window; the first one read only 256.</a:t>
+              <a:t>All three models learned only from the 408 training contracts, and for the clause finder we kept 81 of them aside to choose its settings. We built the simple word-count model first, so the AI models had a fair score to beat. The final clause finder reads all 512 tokens of each window; the first one read only 256. The text model shown here is the retrained one: it learned from the same 1,200-character chunks it reads in the app, with the 81 aside contracts used to choose its settings.</a:t>
             </a:r>
           </a:p>
         </p:txBody>
@@ -2379,7 +2379,7 @@
           <a:lstStyle/>
           <a:p>
             <a:r>
-              <a:t>We found each of these by testing the app with real inputs, then fixed it and tested again. 45 automatic tests now check these cases every time.</a:t>
+              <a:t>We found each of these by testing the app with real inputs, then fixed it and tested again. Two were real model problems, not just app problems. Clause mode reused the clause finder, which was trained to scan windows, so we trained a classifier for the job; it is right 72.1% of the time on 721 test clauses, against 44.9% before. And the app read only the first 30 windows of a long contract, which cut the share of High-risk clauses found from 90% to 77%; letting the word model pick 5 more windows per clause type brings it back to 89%. Automatic tests check these cases every time.</a:t>
             </a:r>
           </a:p>
         </p:txBody>
@@ -3557,7 +3557,7 @@
                 <a:ea typeface="Calibri" pitchFamily="34" charset="-122"/>
                 <a:cs typeface="Calibri" pitchFamily="34" charset="-120"/>
               </a:rPr>
-              <a:t>Scores could not be compared</a:t>
+              <a:t>Clause types were often wrong</a:t>
             </a:r>
             <a:endParaRPr lang="en-US" sz="1650" dirty="0"/>
           </a:p>
@@ -3596,7 +3596,7 @@
                 <a:ea typeface="Calibri" pitchFamily="34" charset="-122"/>
                 <a:cs typeface="Calibri" pitchFamily="34" charset="-120"/>
               </a:rPr>
-              <a:t>“Parties” scored about 0.98 on almost any text. We adjusted each score using 1,586 training clauses, and correct answers rose from 5.1% to 44.9%.</a:t>
+              <a:t>Reusing the clause finder picked the right type 44.9% of the time. A classifier trained for the job now gets 72.1%.</a:t>
             </a:r>
             <a:endParaRPr lang="en-US" sz="1550" dirty="0"/>
           </a:p>
@@ -3687,7 +3687,7 @@
                 <a:ea typeface="Calibri" pitchFamily="34" charset="-122"/>
                 <a:cs typeface="Calibri" pitchFamily="34" charset="-120"/>
               </a:rPr>
-              <a:t>The quoted text looked the same everywhere</a:t>
+              <a:t>The quoted text was often wrong</a:t>
             </a:r>
             <a:endParaRPr lang="en-US" sz="1650" dirty="0"/>
           </a:p>
@@ -3726,7 +3726,7 @@
                 <a:ea typeface="Calibri" pitchFamily="34" charset="-122"/>
                 <a:cs typeface="Calibri" pitchFamily="34" charset="-120"/>
               </a:rPr>
-              <a:t>Now the first model picks the paragraph, and the text model only highlights the key words inside it.</a:t>
+              <a:t>We retrained the text model on the chunks it really reads. It now finds the clause in the right window 76% of the time.</a:t>
             </a:r>
             <a:endParaRPr lang="en-US" sz="1550" dirty="0"/>
           </a:p>
@@ -3817,7 +3817,7 @@
                 <a:ea typeface="Calibri" pitchFamily="34" charset="-122"/>
                 <a:cs typeface="Calibri" pitchFamily="34" charset="-120"/>
               </a:rPr>
-              <a:t>Long contracts were slow</a:t>
+              <a:t>Long contracts were only partly read</a:t>
             </a:r>
             <a:endParaRPr lang="en-US" sz="1650" dirty="0"/>
           </a:p>
@@ -3856,7 +3856,7 @@
                 <a:ea typeface="Calibri" pitchFamily="34" charset="-122"/>
                 <a:cs typeface="Calibri" pitchFamily="34" charset="-120"/>
               </a:rPr>
-              <a:t>The app reads at most 30 windows (about 45,500 characters), so even the longest test contract takes under two minutes. The app tells the user this.</a:t>
+              <a:t>Reading the first 30 windows found 77% of High-risk clauses. Adding 5 windows per type, picked by the word model, finds 89%.</a:t>
             </a:r>
             <a:endParaRPr lang="en-US" sz="1550" dirty="0"/>
           </a:p>
@@ -6573,7 +6573,7 @@
                 <a:ea typeface="Calibri" pitchFamily="34" charset="-122"/>
                 <a:cs typeface="Calibri" pitchFamily="34" charset="-120"/>
               </a:rPr>
-              <a:t>About a minute for a normal contract; 87 s at most.</a:t>
+              <a:t>About a minute for a normal contract; about 2 minutes at most.</a:t>
             </a:r>
             <a:endParaRPr lang="en-US" sz="1550" dirty="0"/>
           </a:p>
@@ -6703,7 +6703,7 @@
                 <a:ea typeface="Calibri" pitchFamily="34" charset="-122"/>
                 <a:cs typeface="Calibri" pitchFamily="34" charset="-120"/>
               </a:rPr>
-              <a:t>By default it finds 90% of High-risk clauses.</a:t>
+              <a:t>As it reads contracts, the app finds 89% of High-risk clauses.</a:t>
             </a:r>
             <a:endParaRPr lang="en-US" sz="1550" dirty="0"/>
           </a:p>
@@ -7522,7 +7522,7 @@
                 <a:ea typeface="Calibri" pitchFamily="34" charset="-122"/>
                 <a:cs typeface="Calibri" pitchFamily="34" charset="-120"/>
               </a:rPr>
-              <a:t>PDF and CSV files; all 45 app tests pass</a:t>
+              <a:t>PDF and CSV files; all 46 app tests pass</a:t>
             </a:r>
             <a:endParaRPr lang="en-US" sz="1450" dirty="0"/>
           </a:p>
@@ -7964,7 +7964,7 @@
                 <a:ea typeface="Calibri" pitchFamily="34" charset="-122"/>
                 <a:cs typeface="Calibri" pitchFamily="34" charset="-120"/>
               </a:rPr>
-              <a:t>F1 0.809 and accuracy 88.43%; finds 90% of High-risk clauses</a:t>
+              <a:t>best F1 0.809 (balanced); the app's recall-first setting finds 89% of High-risk clauses</a:t>
             </a:r>
             <a:endParaRPr lang="en-US" sz="1500" dirty="0"/>
           </a:p>
@@ -8174,7 +8174,7 @@
                 <a:ea typeface="Calibri" pitchFamily="34" charset="-122"/>
                 <a:cs typeface="Calibri" pitchFamily="34" charset="-120"/>
               </a:rPr>
-              <a:t>Clausify takes about a minute per contract; all 45 tests pass</a:t>
+              <a:t>Clausify takes about a minute per contract; all 46 tests pass</a:t>
             </a:r>
             <a:endParaRPr lang="en-US" sz="1500" dirty="0"/>
           </a:p>
@@ -15214,7 +15214,7 @@
                 <a:ea typeface="Calibri" pitchFamily="34" charset="-122"/>
                 <a:cs typeface="Calibri" pitchFamily="34" charset="-120"/>
               </a:rPr>
-              <a:t>DistilBERT-QA · 8,000 examples</a:t>
+              <a:t>DistilBERT-QA · 11,967 chunks</a:t>
             </a:r>
             <a:endParaRPr lang="en-US" sz="1450" dirty="0"/>
           </a:p>
@@ -15253,7 +15253,7 @@
                 <a:ea typeface="Cambria" pitchFamily="34" charset="-122"/>
                 <a:cs typeface="Cambria" pitchFamily="34" charset="-120"/>
               </a:rPr>
-              <a:t>≈26 min</a:t>
+              <a:t>≈46 min</a:t>
             </a:r>
             <a:endParaRPr lang="en-US" sz="1550" dirty="0"/>
           </a:p>

--- a/P25301051-p3-presentation-15-slides.pptx
+++ b/P25301051-p3-presentation-15-slides.pptx
@@ -3007,7 +3007,7 @@
                 <a:ea typeface="Calibri" pitchFamily="34" charset="-122"/>
                 <a:cs typeface="Calibri" pitchFamily="34" charset="-120"/>
               </a:rPr>
-              <a:t>Afnan Mazumdar, 24141229</a:t>
+              <a:t>Afnan Mazumder, 24141229</a:t>
             </a:r>
             <a:endParaRPr lang="en-US" sz="1600" dirty="0"/>
           </a:p>

--- a/P25301051-p3-presentation-15-slides.pptx
+++ b/P25301051-p3-presentation-15-slides.pptx
@@ -6963,7 +6963,7 @@
                 <a:ea typeface="Calibri" pitchFamily="34" charset="-122"/>
                 <a:cs typeface="Calibri" pitchFamily="34" charset="-120"/>
               </a:rPr>
-              <a:t>Runs on your own computer; nothing is saved or sent.</a:t>
+              <a:t>Run on your own computer, nothing is saved or sent.</a:t>
             </a:r>
             <a:endParaRPr lang="en-US" sz="1550" dirty="0"/>
           </a:p>
@@ -7392,7 +7392,7 @@
                 <a:ea typeface="Calibri" pitchFamily="34" charset="-122"/>
                 <a:cs typeface="Calibri" pitchFamily="34" charset="-120"/>
               </a:rPr>
-              <a:t>every clause marked in its risk colour, plus a checklist of missing protections</a:t>
+              <a:t>every clause marked in its risk color, plus a checklist of missing protections</a:t>
             </a:r>
             <a:endParaRPr lang="en-US" sz="1450" dirty="0"/>
           </a:p>
@@ -9258,7 +9258,7 @@
                 <a:ea typeface="Calibri" pitchFamily="34" charset="-122"/>
                 <a:cs typeface="Calibri" pitchFamily="34" charset="-120"/>
               </a:rPr>
-              <a:t>Existing tools only find text</a:t>
+              <a:t>CUAD-based tools only find text</a:t>
             </a:r>
             <a:endParaRPr lang="en-US" sz="1650" dirty="0"/>
           </a:p>
